--- a/assets/presentations/2026-07-26-todo-hablaba-de-ti.pptx
+++ b/assets/presentations/2026-07-26-todo-hablaba-de-ti.pptx
@@ -2,15 +2,15 @@
 <file path=ppt/presentation.xml><?xml version="1.0" encoding="utf-8"?>
 <p:presentation xmlns:p="http://schemas.openxmlformats.org/presentationml/2006/main">
   <p:sldMasterIdLst>
-    <p:sldMasterId xmlns:r="http://schemas.openxmlformats.org/officeDocument/2006/relationships" id="2147483648" r:id="R3136edf18be348bc"/>
+    <p:sldMasterId xmlns:r="http://schemas.openxmlformats.org/officeDocument/2006/relationships" id="2147483648" r:id="Rf53feb853ad74b7b"/>
   </p:sldMasterIdLst>
   <p:notesMasterIdLst>
-    <p:notesMasterId xmlns:r="http://schemas.openxmlformats.org/officeDocument/2006/relationships" r:id="R49a9a2f78da44ead"/>
+    <p:notesMasterId xmlns:r="http://schemas.openxmlformats.org/officeDocument/2006/relationships" r:id="Rd12f3e867e454076"/>
   </p:notesMasterIdLst>
   <p:sldIdLst>
-    <p:sldId xmlns:r="http://schemas.openxmlformats.org/officeDocument/2006/relationships" id="256" r:id="R1eb40779b28a4463"/>
-    <p:sldId xmlns:r="http://schemas.openxmlformats.org/officeDocument/2006/relationships" id="257" r:id="R8b1229cb32bd42a1"/>
-    <p:sldId xmlns:r="http://schemas.openxmlformats.org/officeDocument/2006/relationships" id="258" r:id="R4399669b6d484941"/>
+    <p:sldId xmlns:r="http://schemas.openxmlformats.org/officeDocument/2006/relationships" id="256" r:id="R5e2561db2a564748"/>
+    <p:sldId xmlns:r="http://schemas.openxmlformats.org/officeDocument/2006/relationships" id="257" r:id="R5ba0308bae3347cf"/>
+    <p:sldId xmlns:r="http://schemas.openxmlformats.org/officeDocument/2006/relationships" id="258" r:id="R57a7fb8f18e1411e"/>
   </p:sldIdLst>
   <p:sldSz cx="12192000" cy="6858000"/>
   <p:notesSz cx="6858000" cy="9144000"/>
@@ -747,7 +747,7 @@
   </p:cSld>
   <p:clrMap bg1="lt1" tx1="dk1" bg2="lt2" tx2="dk2" accent1="accent1" accent2="accent2" accent3="accent3" accent4="accent4" accent5="accent5" accent6="accent6" hlink="hlink" folHlink="folHlink"/>
   <p:sldLayoutIdLst>
-    <p:sldLayoutId xmlns:r="http://schemas.openxmlformats.org/officeDocument/2006/relationships" id="2147483649" r:id="R82a0a647df084b99"/>
+    <p:sldLayoutId xmlns:r="http://schemas.openxmlformats.org/officeDocument/2006/relationships" id="2147483649" r:id="R6798532ddf1e4a8a"/>
   </p:sldLayoutIdLst>
   <p:txStyles>
     <p:titleStyle>
@@ -1288,14 +1288,14 @@
       </p:grpSpPr>
       <p:pic>
         <p:nvPicPr>
-          <p:cNvPr id="40" name=""/>
+          <p:cNvPr id="41" name=""/>
           <p:cNvPicPr>
             <a:picLocks xmlns:a="http://schemas.openxmlformats.org/drawingml/2006/main" noChangeAspect="1"/>
           </p:cNvPicPr>
           <p:nvPr/>
         </p:nvPicPr>
         <p:blipFill>
-          <a:blip xmlns:r="http://schemas.openxmlformats.org/officeDocument/2006/relationships" xmlns:a="http://schemas.openxmlformats.org/drawingml/2006/main" r:embed="Re522d80027cb420d"/>
+          <a:blip xmlns:r="http://schemas.openxmlformats.org/officeDocument/2006/relationships" xmlns:a="http://schemas.openxmlformats.org/drawingml/2006/main" r:embed="R97a21f9c8568483f"/>
           <a:srcRect xmlns:a="http://schemas.openxmlformats.org/drawingml/2006/main" l="0" t="27" r="0" b="27"/>
           <a:stretch xmlns:a="http://schemas.openxmlformats.org/drawingml/2006/main">
             <a:fillRect l="0" t="0" r="0" b="0"/>
@@ -1351,10 +1351,8 @@
               </a:lnSpc>
               <a:buNone/>
               <a:defRPr sz="2925" b="0" i="0">
-                <a:ln w="10478">
-                  <a:solidFill>
-                    <a:srgbClr val="071824"/>
-                  </a:solidFill>
+                <a:ln w="0">
+                  <a:noFill/>
                   <a:prstDash val="solid"/>
                 </a:ln>
                 <a:solidFill>
@@ -1367,10 +1365,8 @@
             </a:pPr>
             <a:r>
               <a:rPr sz="2925" b="0" i="0">
-                <a:ln w="10478">
-                  <a:solidFill>
-                    <a:srgbClr val="071824"/>
-                  </a:solidFill>
+                <a:ln w="0">
+                  <a:noFill/>
                   <a:prstDash val="solid"/>
                 </a:ln>
                 <a:solidFill>
@@ -1425,10 +1421,8 @@
               </a:lnSpc>
               <a:buNone/>
               <a:defRPr sz="1575" b="0" i="0">
-                <a:ln w="10478">
-                  <a:solidFill>
-                    <a:srgbClr val="071824"/>
-                  </a:solidFill>
+                <a:ln w="0">
+                  <a:noFill/>
                   <a:prstDash val="solid"/>
                 </a:ln>
                 <a:solidFill>
@@ -1441,10 +1435,8 @@
             </a:pPr>
             <a:r>
               <a:rPr sz="1575" b="0" i="0">
-                <a:ln w="10478">
-                  <a:solidFill>
-                    <a:srgbClr val="071824"/>
-                  </a:solidFill>
+                <a:ln w="0">
+                  <a:noFill/>
                   <a:prstDash val="solid"/>
                 </a:ln>
                 <a:solidFill>
@@ -1532,10 +1524,8 @@
               </a:lnSpc>
               <a:buNone/>
               <a:defRPr sz="2325" b="1" i="0">
-                <a:ln w="10478">
-                  <a:solidFill>
-                    <a:srgbClr val="071824"/>
-                  </a:solidFill>
+                <a:ln w="0">
+                  <a:noFill/>
                   <a:prstDash val="solid"/>
                 </a:ln>
                 <a:solidFill>
@@ -1548,10 +1538,8 @@
             </a:pPr>
             <a:r>
               <a:rPr sz="2325" b="1" i="0">
-                <a:ln w="10478">
-                  <a:solidFill>
-                    <a:srgbClr val="071824"/>
-                  </a:solidFill>
+                <a:ln w="0">
+                  <a:noFill/>
                   <a:prstDash val="solid"/>
                 </a:ln>
                 <a:solidFill>
@@ -1571,10 +1559,8 @@
               </a:lnSpc>
               <a:buNone/>
               <a:defRPr sz="2325" b="1" i="0">
-                <a:ln w="10478">
-                  <a:solidFill>
-                    <a:srgbClr val="071824"/>
-                  </a:solidFill>
+                <a:ln w="0">
+                  <a:noFill/>
                   <a:prstDash val="solid"/>
                 </a:ln>
                 <a:solidFill>
@@ -1587,10 +1573,8 @@
             </a:pPr>
             <a:r>
               <a:rPr sz="2325" b="1" i="0">
-                <a:ln w="10478">
-                  <a:solidFill>
-                    <a:srgbClr val="071824"/>
-                  </a:solidFill>
+                <a:ln w="0">
+                  <a:noFill/>
                   <a:prstDash val="solid"/>
                 </a:ln>
                 <a:solidFill>
@@ -1645,10 +1629,8 @@
               </a:lnSpc>
               <a:buNone/>
               <a:defRPr sz="1425" b="0" i="0">
-                <a:ln w="10478">
-                  <a:solidFill>
-                    <a:srgbClr val="071824"/>
-                  </a:solidFill>
+                <a:ln w="0">
+                  <a:noFill/>
                   <a:prstDash val="solid"/>
                 </a:ln>
                 <a:solidFill>
@@ -1661,10 +1643,8 @@
             </a:pPr>
             <a:r>
               <a:rPr sz="1425" b="0" i="0">
-                <a:ln w="10478">
-                  <a:solidFill>
-                    <a:srgbClr val="071824"/>
-                  </a:solidFill>
+                <a:ln w="0">
+                  <a:noFill/>
                   <a:prstDash val="solid"/>
                 </a:ln>
                 <a:solidFill>
@@ -1719,10 +1699,8 @@
               </a:lnSpc>
               <a:buNone/>
               <a:defRPr sz="1425" b="0" i="1">
-                <a:ln w="10478">
-                  <a:solidFill>
-                    <a:srgbClr val="071824"/>
-                  </a:solidFill>
+                <a:ln w="0">
+                  <a:noFill/>
                   <a:prstDash val="solid"/>
                 </a:ln>
                 <a:solidFill>
@@ -1735,10 +1713,8 @@
             </a:pPr>
             <a:r>
               <a:rPr sz="1425" b="0" i="1">
-                <a:ln w="10478">
-                  <a:solidFill>
-                    <a:srgbClr val="071824"/>
-                  </a:solidFill>
+                <a:ln w="0">
+                  <a:noFill/>
                   <a:prstDash val="solid"/>
                 </a:ln>
                 <a:solidFill>
@@ -1857,6 +1833,10 @@
               </a:lnSpc>
               <a:buNone/>
               <a:defRPr sz="975" b="0" i="0">
+                <a:ln w="0">
+                  <a:noFill/>
+                  <a:prstDash val="solid"/>
+                </a:ln>
                 <a:solidFill>
                   <a:srgbClr val="FFFFFF"/>
                 </a:solidFill>
@@ -1867,6 +1847,10 @@
             </a:pPr>
             <a:r>
               <a:rPr sz="975" b="0" i="0">
+                <a:ln w="0">
+                  <a:noFill/>
+                  <a:prstDash val="solid"/>
+                </a:ln>
                 <a:solidFill>
                   <a:srgbClr val="FFFFFF"/>
                 </a:solidFill>
@@ -1919,10 +1903,8 @@
               </a:lnSpc>
               <a:buNone/>
               <a:defRPr sz="1350" b="0" i="0">
-                <a:ln w="10478">
-                  <a:solidFill>
-                    <a:srgbClr val="071824"/>
-                  </a:solidFill>
+                <a:ln w="0">
+                  <a:noFill/>
                   <a:prstDash val="solid"/>
                 </a:ln>
                 <a:solidFill>
@@ -1935,10 +1917,8 @@
             </a:pPr>
             <a:r>
               <a:rPr sz="1350" b="0" i="0">
-                <a:ln w="10478">
-                  <a:solidFill>
-                    <a:srgbClr val="071824"/>
-                  </a:solidFill>
+                <a:ln w="0">
+                  <a:noFill/>
                   <a:prstDash val="solid"/>
                 </a:ln>
                 <a:solidFill>
@@ -1993,10 +1973,8 @@
               </a:lnSpc>
               <a:buNone/>
               <a:defRPr sz="1200" b="0" i="0">
-                <a:ln w="10478">
-                  <a:solidFill>
-                    <a:srgbClr val="071824"/>
-                  </a:solidFill>
+                <a:ln w="0">
+                  <a:noFill/>
                   <a:prstDash val="solid"/>
                 </a:ln>
                 <a:solidFill>
@@ -2009,10 +1987,8 @@
             </a:pPr>
             <a:r>
               <a:rPr sz="1200" b="0" i="0">
-                <a:ln w="10478">
-                  <a:solidFill>
-                    <a:srgbClr val="071824"/>
-                  </a:solidFill>
+                <a:ln w="0">
+                  <a:noFill/>
                   <a:prstDash val="solid"/>
                 </a:ln>
                 <a:solidFill>
@@ -2098,10 +2074,8 @@
               </a:lnSpc>
               <a:buNone/>
               <a:defRPr sz="1125" b="0" i="0">
-                <a:ln w="10478">
-                  <a:solidFill>
-                    <a:srgbClr val="071824"/>
-                  </a:solidFill>
+                <a:ln w="0">
+                  <a:noFill/>
                   <a:prstDash val="solid"/>
                 </a:ln>
                 <a:solidFill>
@@ -2114,10 +2088,8 @@
             </a:pPr>
             <a:r>
               <a:rPr sz="1125" b="0" i="0">
-                <a:ln w="10478">
-                  <a:solidFill>
-                    <a:srgbClr val="071824"/>
-                  </a:solidFill>
+                <a:ln w="0">
+                  <a:noFill/>
                   <a:prstDash val="solid"/>
                 </a:ln>
                 <a:solidFill>
@@ -2205,6 +2177,10 @@
               </a:lnSpc>
               <a:buNone/>
               <a:defRPr sz="975" b="0" i="0">
+                <a:ln w="0">
+                  <a:noFill/>
+                  <a:prstDash val="solid"/>
+                </a:ln>
                 <a:solidFill>
                   <a:srgbClr val="FFFFFF"/>
                 </a:solidFill>
@@ -2215,6 +2191,10 @@
             </a:pPr>
             <a:r>
               <a:rPr sz="975" b="0" i="0">
+                <a:ln w="0">
+                  <a:noFill/>
+                  <a:prstDash val="solid"/>
+                </a:ln>
                 <a:solidFill>
                   <a:srgbClr val="FFFFFF"/>
                 </a:solidFill>
@@ -2267,10 +2247,8 @@
               </a:lnSpc>
               <a:buNone/>
               <a:defRPr sz="1350" b="0" i="0">
-                <a:ln w="10478">
-                  <a:solidFill>
-                    <a:srgbClr val="071824"/>
-                  </a:solidFill>
+                <a:ln w="0">
+                  <a:noFill/>
                   <a:prstDash val="solid"/>
                 </a:ln>
                 <a:solidFill>
@@ -2283,10 +2261,8 @@
             </a:pPr>
             <a:r>
               <a:rPr sz="1350" b="0" i="0">
-                <a:ln w="10478">
-                  <a:solidFill>
-                    <a:srgbClr val="071824"/>
-                  </a:solidFill>
+                <a:ln w="0">
+                  <a:noFill/>
                   <a:prstDash val="solid"/>
                 </a:ln>
                 <a:solidFill>
@@ -2341,10 +2317,8 @@
               </a:lnSpc>
               <a:buNone/>
               <a:defRPr sz="1200" b="0" i="0">
-                <a:ln w="10478">
-                  <a:solidFill>
-                    <a:srgbClr val="071824"/>
-                  </a:solidFill>
+                <a:ln w="0">
+                  <a:noFill/>
                   <a:prstDash val="solid"/>
                 </a:ln>
                 <a:solidFill>
@@ -2357,10 +2331,8 @@
             </a:pPr>
             <a:r>
               <a:rPr sz="1200" b="0" i="0">
-                <a:ln w="10478">
-                  <a:solidFill>
-                    <a:srgbClr val="071824"/>
-                  </a:solidFill>
+                <a:ln w="0">
+                  <a:noFill/>
                   <a:prstDash val="solid"/>
                 </a:ln>
                 <a:solidFill>
@@ -2446,10 +2418,8 @@
               </a:lnSpc>
               <a:buNone/>
               <a:defRPr sz="1125" b="0" i="0">
-                <a:ln w="10478">
-                  <a:solidFill>
-                    <a:srgbClr val="071824"/>
-                  </a:solidFill>
+                <a:ln w="0">
+                  <a:noFill/>
                   <a:prstDash val="solid"/>
                 </a:ln>
                 <a:solidFill>
@@ -2462,10 +2432,8 @@
             </a:pPr>
             <a:r>
               <a:rPr sz="1125" b="0" i="0">
-                <a:ln w="10478">
-                  <a:solidFill>
-                    <a:srgbClr val="071824"/>
-                  </a:solidFill>
+                <a:ln w="0">
+                  <a:noFill/>
                   <a:prstDash val="solid"/>
                 </a:ln>
                 <a:solidFill>
@@ -2553,6 +2521,10 @@
               </a:lnSpc>
               <a:buNone/>
               <a:defRPr sz="975" b="0" i="0">
+                <a:ln w="0">
+                  <a:noFill/>
+                  <a:prstDash val="solid"/>
+                </a:ln>
                 <a:solidFill>
                   <a:srgbClr val="FFFFFF"/>
                 </a:solidFill>
@@ -2563,6 +2535,10 @@
             </a:pPr>
             <a:r>
               <a:rPr sz="975" b="0" i="0">
+                <a:ln w="0">
+                  <a:noFill/>
+                  <a:prstDash val="solid"/>
+                </a:ln>
                 <a:solidFill>
                   <a:srgbClr val="FFFFFF"/>
                 </a:solidFill>
@@ -2615,10 +2591,8 @@
               </a:lnSpc>
               <a:buNone/>
               <a:defRPr sz="1350" b="0" i="0">
-                <a:ln w="10478">
-                  <a:solidFill>
-                    <a:srgbClr val="071824"/>
-                  </a:solidFill>
+                <a:ln w="0">
+                  <a:noFill/>
                   <a:prstDash val="solid"/>
                 </a:ln>
                 <a:solidFill>
@@ -2631,10 +2605,8 @@
             </a:pPr>
             <a:r>
               <a:rPr sz="1350" b="0" i="0">
-                <a:ln w="10478">
-                  <a:solidFill>
-                    <a:srgbClr val="071824"/>
-                  </a:solidFill>
+                <a:ln w="0">
+                  <a:noFill/>
                   <a:prstDash val="solid"/>
                 </a:ln>
                 <a:solidFill>
@@ -2689,10 +2661,8 @@
               </a:lnSpc>
               <a:buNone/>
               <a:defRPr sz="1200" b="0" i="0">
-                <a:ln w="10478">
-                  <a:solidFill>
-                    <a:srgbClr val="071824"/>
-                  </a:solidFill>
+                <a:ln w="0">
+                  <a:noFill/>
                   <a:prstDash val="solid"/>
                 </a:ln>
                 <a:solidFill>
@@ -2705,10 +2675,8 @@
             </a:pPr>
             <a:r>
               <a:rPr sz="1200" b="0" i="0">
-                <a:ln w="10478">
-                  <a:solidFill>
-                    <a:srgbClr val="071824"/>
-                  </a:solidFill>
+                <a:ln w="0">
+                  <a:noFill/>
                   <a:prstDash val="solid"/>
                 </a:ln>
                 <a:solidFill>
@@ -2794,10 +2762,8 @@
               </a:lnSpc>
               <a:buNone/>
               <a:defRPr sz="1125" b="0" i="0">
-                <a:ln w="10478">
-                  <a:solidFill>
-                    <a:srgbClr val="071824"/>
-                  </a:solidFill>
+                <a:ln w="0">
+                  <a:noFill/>
                   <a:prstDash val="solid"/>
                 </a:ln>
                 <a:solidFill>
@@ -2810,10 +2776,8 @@
             </a:pPr>
             <a:r>
               <a:rPr sz="1125" b="0" i="0">
-                <a:ln w="10478">
-                  <a:solidFill>
-                    <a:srgbClr val="071824"/>
-                  </a:solidFill>
+                <a:ln w="0">
+                  <a:noFill/>
                   <a:prstDash val="solid"/>
                 </a:ln>
                 <a:solidFill>
@@ -2901,6 +2865,10 @@
               </a:lnSpc>
               <a:buNone/>
               <a:defRPr sz="975" b="0" i="0">
+                <a:ln w="0">
+                  <a:noFill/>
+                  <a:prstDash val="solid"/>
+                </a:ln>
                 <a:solidFill>
                   <a:srgbClr val="FFFFFF"/>
                 </a:solidFill>
@@ -2911,6 +2879,10 @@
             </a:pPr>
             <a:r>
               <a:rPr sz="975" b="0" i="0">
+                <a:ln w="0">
+                  <a:noFill/>
+                  <a:prstDash val="solid"/>
+                </a:ln>
                 <a:solidFill>
                   <a:srgbClr val="FFFFFF"/>
                 </a:solidFill>
@@ -2963,10 +2935,8 @@
               </a:lnSpc>
               <a:buNone/>
               <a:defRPr sz="1350" b="0" i="0">
-                <a:ln w="10478">
-                  <a:solidFill>
-                    <a:srgbClr val="071824"/>
-                  </a:solidFill>
+                <a:ln w="0">
+                  <a:noFill/>
                   <a:prstDash val="solid"/>
                 </a:ln>
                 <a:solidFill>
@@ -2979,10 +2949,8 @@
             </a:pPr>
             <a:r>
               <a:rPr sz="1350" b="0" i="0">
-                <a:ln w="10478">
-                  <a:solidFill>
-                    <a:srgbClr val="071824"/>
-                  </a:solidFill>
+                <a:ln w="0">
+                  <a:noFill/>
                   <a:prstDash val="solid"/>
                 </a:ln>
                 <a:solidFill>
@@ -3037,10 +3005,8 @@
               </a:lnSpc>
               <a:buNone/>
               <a:defRPr sz="1200" b="0" i="0">
-                <a:ln w="10478">
-                  <a:solidFill>
-                    <a:srgbClr val="071824"/>
-                  </a:solidFill>
+                <a:ln w="0">
+                  <a:noFill/>
                   <a:prstDash val="solid"/>
                 </a:ln>
                 <a:solidFill>
@@ -3053,10 +3019,8 @@
             </a:pPr>
             <a:r>
               <a:rPr sz="1200" b="0" i="0">
-                <a:ln w="10478">
-                  <a:solidFill>
-                    <a:srgbClr val="071824"/>
-                  </a:solidFill>
+                <a:ln w="0">
+                  <a:noFill/>
                   <a:prstDash val="solid"/>
                 </a:ln>
                 <a:solidFill>
@@ -3142,10 +3106,8 @@
               </a:lnSpc>
               <a:buNone/>
               <a:defRPr sz="1125" b="0" i="0">
-                <a:ln w="10478">
-                  <a:solidFill>
-                    <a:srgbClr val="071824"/>
-                  </a:solidFill>
+                <a:ln w="0">
+                  <a:noFill/>
                   <a:prstDash val="solid"/>
                 </a:ln>
                 <a:solidFill>
@@ -3158,10 +3120,8 @@
             </a:pPr>
             <a:r>
               <a:rPr sz="1125" b="0" i="0">
-                <a:ln w="10478">
-                  <a:solidFill>
-                    <a:srgbClr val="071824"/>
-                  </a:solidFill>
+                <a:ln w="0">
+                  <a:noFill/>
                   <a:prstDash val="solid"/>
                 </a:ln>
                 <a:solidFill>
@@ -3249,6 +3209,10 @@
               </a:lnSpc>
               <a:buNone/>
               <a:defRPr sz="975" b="0" i="0">
+                <a:ln w="0">
+                  <a:noFill/>
+                  <a:prstDash val="solid"/>
+                </a:ln>
                 <a:solidFill>
                   <a:srgbClr val="FFFFFF"/>
                 </a:solidFill>
@@ -3259,6 +3223,10 @@
             </a:pPr>
             <a:r>
               <a:rPr sz="975" b="0" i="0">
+                <a:ln w="0">
+                  <a:noFill/>
+                  <a:prstDash val="solid"/>
+                </a:ln>
                 <a:solidFill>
                   <a:srgbClr val="FFFFFF"/>
                 </a:solidFill>
@@ -3311,10 +3279,8 @@
               </a:lnSpc>
               <a:buNone/>
               <a:defRPr sz="1350" b="0" i="0">
-                <a:ln w="10478">
-                  <a:solidFill>
-                    <a:srgbClr val="071824"/>
-                  </a:solidFill>
+                <a:ln w="0">
+                  <a:noFill/>
                   <a:prstDash val="solid"/>
                 </a:ln>
                 <a:solidFill>
@@ -3327,10 +3293,8 @@
             </a:pPr>
             <a:r>
               <a:rPr sz="1350" b="0" i="0">
-                <a:ln w="10478">
-                  <a:solidFill>
-                    <a:srgbClr val="071824"/>
-                  </a:solidFill>
+                <a:ln w="0">
+                  <a:noFill/>
                   <a:prstDash val="solid"/>
                 </a:ln>
                 <a:solidFill>
@@ -3385,10 +3349,8 @@
               </a:lnSpc>
               <a:buNone/>
               <a:defRPr sz="1200" b="0" i="0">
-                <a:ln w="10478">
-                  <a:solidFill>
-                    <a:srgbClr val="071824"/>
-                  </a:solidFill>
+                <a:ln w="0">
+                  <a:noFill/>
                   <a:prstDash val="solid"/>
                 </a:ln>
                 <a:solidFill>
@@ -3401,10 +3363,8 @@
             </a:pPr>
             <a:r>
               <a:rPr sz="1200" b="0" i="0">
-                <a:ln w="10478">
-                  <a:solidFill>
-                    <a:srgbClr val="071824"/>
-                  </a:solidFill>
+                <a:ln w="0">
+                  <a:noFill/>
                   <a:prstDash val="solid"/>
                 </a:ln>
                 <a:solidFill>
@@ -3490,10 +3450,8 @@
               </a:lnSpc>
               <a:buNone/>
               <a:defRPr sz="1125" b="0" i="0">
-                <a:ln w="10478">
-                  <a:solidFill>
-                    <a:srgbClr val="071824"/>
-                  </a:solidFill>
+                <a:ln w="0">
+                  <a:noFill/>
                   <a:prstDash val="solid"/>
                 </a:ln>
                 <a:solidFill>
@@ -3506,10 +3464,8 @@
             </a:pPr>
             <a:r>
               <a:rPr sz="1125" b="0" i="0">
-                <a:ln w="10478">
-                  <a:solidFill>
-                    <a:srgbClr val="071824"/>
-                  </a:solidFill>
+                <a:ln w="0">
+                  <a:noFill/>
                   <a:prstDash val="solid"/>
                 </a:ln>
                 <a:solidFill>
@@ -3564,6 +3520,10 @@
               </a:lnSpc>
               <a:buNone/>
               <a:defRPr sz="900" b="0" i="0">
+                <a:ln w="0">
+                  <a:noFill/>
+                  <a:prstDash val="solid"/>
+                </a:ln>
                 <a:solidFill>
                   <a:srgbClr val="F5F0E7"/>
                 </a:solidFill>
@@ -3574,6 +3534,10 @@
             </a:pPr>
             <a:r>
               <a:rPr sz="900" b="0" i="0">
+                <a:ln w="0">
+                  <a:noFill/>
+                  <a:prstDash val="solid"/>
+                </a:ln>
                 <a:solidFill>
                   <a:srgbClr val="F5F0E7"/>
                 </a:solidFill>

--- a/assets/presentations/2026-07-26-todo-hablaba-de-ti.pptx
+++ b/assets/presentations/2026-07-26-todo-hablaba-de-ti.pptx
@@ -2,15 +2,15 @@
 <file path=ppt/presentation.xml><?xml version="1.0" encoding="utf-8"?>
 <p:presentation xmlns:p="http://schemas.openxmlformats.org/presentationml/2006/main">
   <p:sldMasterIdLst>
-    <p:sldMasterId xmlns:r="http://schemas.openxmlformats.org/officeDocument/2006/relationships" id="2147483648" r:id="Rf53feb853ad74b7b"/>
+    <p:sldMasterId xmlns:r="http://schemas.openxmlformats.org/officeDocument/2006/relationships" id="2147483648" r:id="Rd68bd49f8ff54a50"/>
   </p:sldMasterIdLst>
   <p:notesMasterIdLst>
-    <p:notesMasterId xmlns:r="http://schemas.openxmlformats.org/officeDocument/2006/relationships" r:id="Rd12f3e867e454076"/>
+    <p:notesMasterId xmlns:r="http://schemas.openxmlformats.org/officeDocument/2006/relationships" r:id="R89a75f4ff7ec4470"/>
   </p:notesMasterIdLst>
   <p:sldIdLst>
-    <p:sldId xmlns:r="http://schemas.openxmlformats.org/officeDocument/2006/relationships" id="256" r:id="R5e2561db2a564748"/>
-    <p:sldId xmlns:r="http://schemas.openxmlformats.org/officeDocument/2006/relationships" id="257" r:id="R5ba0308bae3347cf"/>
-    <p:sldId xmlns:r="http://schemas.openxmlformats.org/officeDocument/2006/relationships" id="258" r:id="R57a7fb8f18e1411e"/>
+    <p:sldId xmlns:r="http://schemas.openxmlformats.org/officeDocument/2006/relationships" id="256" r:id="Re23e28456ffa4def"/>
+    <p:sldId xmlns:r="http://schemas.openxmlformats.org/officeDocument/2006/relationships" id="257" r:id="R5a32bc0afa294928"/>
+    <p:sldId xmlns:r="http://schemas.openxmlformats.org/officeDocument/2006/relationships" id="258" r:id="R4d61c62ffe784a2f"/>
   </p:sldIdLst>
   <p:sldSz cx="12192000" cy="6858000"/>
   <p:notesSz cx="6858000" cy="9144000"/>
@@ -747,7 +747,7 @@
   </p:cSld>
   <p:clrMap bg1="lt1" tx1="dk1" bg2="lt2" tx2="dk2" accent1="accent1" accent2="accent2" accent3="accent3" accent4="accent4" accent5="accent5" accent6="accent6" hlink="hlink" folHlink="folHlink"/>
   <p:sldLayoutIdLst>
-    <p:sldLayoutId xmlns:r="http://schemas.openxmlformats.org/officeDocument/2006/relationships" id="2147483649" r:id="R6798532ddf1e4a8a"/>
+    <p:sldLayoutId xmlns:r="http://schemas.openxmlformats.org/officeDocument/2006/relationships" id="2147483649" r:id="R37fb8c6ccadd4b64"/>
   </p:sldLayoutIdLst>
   <p:txStyles>
     <p:titleStyle>
@@ -1295,7 +1295,7 @@
           <p:nvPr/>
         </p:nvPicPr>
         <p:blipFill>
-          <a:blip xmlns:r="http://schemas.openxmlformats.org/officeDocument/2006/relationships" xmlns:a="http://schemas.openxmlformats.org/drawingml/2006/main" r:embed="R97a21f9c8568483f"/>
+          <a:blip xmlns:r="http://schemas.openxmlformats.org/officeDocument/2006/relationships" xmlns:a="http://schemas.openxmlformats.org/drawingml/2006/main" r:embed="R04ee78ba47b243fa"/>
           <a:srcRect xmlns:a="http://schemas.openxmlformats.org/drawingml/2006/main" l="0" t="27" r="0" b="27"/>
           <a:stretch xmlns:a="http://schemas.openxmlformats.org/drawingml/2006/main">
             <a:fillRect l="0" t="0" r="0" b="0"/>
@@ -1350,7 +1350,7 @@
                 <a:spcPct val="100000"/>
               </a:lnSpc>
               <a:buNone/>
-              <a:defRPr sz="2925" b="0" i="0">
+              <a:defRPr sz="2400" b="1" i="0">
                 <a:ln w="0">
                   <a:noFill/>
                   <a:prstDash val="solid"/>
@@ -1358,13 +1358,13 @@
                 <a:solidFill>
                   <a:srgbClr val="FFFFFF"/>
                 </a:solidFill>
-                <a:latin typeface="Arial"/>
-                <a:ea typeface="Arial"/>
-                <a:cs typeface="Arial"/>
+                <a:latin typeface="Calibri"/>
+                <a:ea typeface="Calibri"/>
+                <a:cs typeface="Calibri"/>
               </a:defRPr>
             </a:pPr>
             <a:r>
-              <a:rPr sz="2925" b="0" i="0">
+              <a:rPr sz="2400" b="1" i="0">
                 <a:ln w="0">
                   <a:noFill/>
                   <a:prstDash val="solid"/>
@@ -1372,9 +1372,9 @@
                 <a:solidFill>
                   <a:srgbClr val="FFFFFF"/>
                 </a:solidFill>
-                <a:latin typeface="Arial"/>
-                <a:ea typeface="Arial"/>
-                <a:cs typeface="Arial"/>
+                <a:latin typeface="Calibri"/>
+                <a:ea typeface="Calibri"/>
+                <a:cs typeface="Calibri"/>
               </a:rPr>
               <a:t>TODO HABLABA DE TI</a:t>
             </a:r>
@@ -1420,31 +1420,31 @@
                 <a:spcPct val="100000"/>
               </a:lnSpc>
               <a:buNone/>
-              <a:defRPr sz="1575" b="0" i="0">
-                <a:ln w="0">
-                  <a:noFill/>
-                  <a:prstDash val="solid"/>
-                </a:ln>
-                <a:solidFill>
-                  <a:srgbClr val="FFF1CF"/>
-                </a:solidFill>
-                <a:latin typeface="Arial"/>
-                <a:ea typeface="Arial"/>
-                <a:cs typeface="Arial"/>
+              <a:defRPr sz="1275" b="0" i="0">
+                <a:ln w="0">
+                  <a:noFill/>
+                  <a:prstDash val="solid"/>
+                </a:ln>
+                <a:solidFill>
+                  <a:srgbClr val="F5E7C3"/>
+                </a:solidFill>
+                <a:latin typeface="Calibri"/>
+                <a:ea typeface="Calibri"/>
+                <a:cs typeface="Calibri"/>
               </a:defRPr>
             </a:pPr>
             <a:r>
-              <a:rPr sz="1575" b="0" i="0">
-                <a:ln w="0">
-                  <a:noFill/>
-                  <a:prstDash val="solid"/>
-                </a:ln>
-                <a:solidFill>
-                  <a:srgbClr val="FFF1CF"/>
-                </a:solidFill>
-                <a:latin typeface="Arial"/>
-                <a:ea typeface="Arial"/>
-                <a:cs typeface="Arial"/>
+              <a:rPr sz="1275" b="0" i="0">
+                <a:ln w="0">
+                  <a:noFill/>
+                  <a:prstDash val="solid"/>
+                </a:ln>
+                <a:solidFill>
+                  <a:srgbClr val="F5E7C3"/>
+                </a:solidFill>
+                <a:latin typeface="Calibri"/>
+                <a:ea typeface="Calibri"/>
+                <a:cs typeface="Calibri"/>
               </a:rPr>
               <a:t>Descubrir el Reino que ya estaba cerca</a:t>
             </a:r>
@@ -1467,7 +1467,7 @@
         </p:nvSpPr>
         <p:spPr>
           <a:xfrm xmlns:a="http://schemas.openxmlformats.org/drawingml/2006/main">
-            <a:off x="628650" y="1562100"/>
+            <a:off x="762000" y="1562100"/>
             <a:ext cx="4857750" cy="1809750"/>
           </a:xfrm>
           <a:prstGeom xmlns:a="http://schemas.openxmlformats.org/drawingml/2006/main" prst="roundRect">
@@ -1500,7 +1500,7 @@
         </p:nvSpPr>
         <p:spPr>
           <a:xfrm xmlns:a="http://schemas.openxmlformats.org/drawingml/2006/main">
-            <a:off x="895350" y="1752600"/>
+            <a:off x="1028700" y="1752600"/>
             <a:ext cx="4324350" cy="800100"/>
           </a:xfrm>
           <a:prstGeom xmlns:a="http://schemas.openxmlformats.org/drawingml/2006/main" prst="rect">
@@ -1518,71 +1518,71 @@
           </a:bodyPr>
           <a:lstStyle xmlns:a="http://schemas.openxmlformats.org/drawingml/2006/main"/>
           <a:p xmlns:a="http://schemas.openxmlformats.org/drawingml/2006/main">
-            <a:pPr algn="l">
+            <a:pPr algn="ctr">
               <a:lnSpc>
                 <a:spcPct val="92000"/>
               </a:lnSpc>
               <a:buNone/>
-              <a:defRPr sz="2325" b="1" i="0">
-                <a:ln w="0">
-                  <a:noFill/>
-                  <a:prstDash val="solid"/>
-                </a:ln>
-                <a:solidFill>
-                  <a:srgbClr val="FFF1CF"/>
-                </a:solidFill>
-                <a:latin typeface="Arial"/>
-                <a:ea typeface="Arial"/>
-                <a:cs typeface="Arial"/>
+              <a:defRPr sz="1875" b="0" i="0">
+                <a:ln w="0">
+                  <a:noFill/>
+                  <a:prstDash val="solid"/>
+                </a:ln>
+                <a:solidFill>
+                  <a:srgbClr val="F5E7C3"/>
+                </a:solidFill>
+                <a:latin typeface="Calibri"/>
+                <a:ea typeface="Calibri"/>
+                <a:cs typeface="Calibri"/>
               </a:defRPr>
             </a:pPr>
             <a:r>
-              <a:rPr sz="2325" b="1" i="0">
-                <a:ln w="0">
-                  <a:noFill/>
-                  <a:prstDash val="solid"/>
-                </a:ln>
-                <a:solidFill>
-                  <a:srgbClr val="FFF1CF"/>
-                </a:solidFill>
-                <a:latin typeface="Arial"/>
-                <a:ea typeface="Arial"/>
-                <a:cs typeface="Arial"/>
+              <a:rPr sz="1875" b="0" i="0">
+                <a:ln w="0">
+                  <a:noFill/>
+                  <a:prstDash val="solid"/>
+                </a:ln>
+                <a:solidFill>
+                  <a:srgbClr val="F5E7C3"/>
+                </a:solidFill>
+                <a:latin typeface="Calibri"/>
+                <a:ea typeface="Calibri"/>
+                <a:cs typeface="Calibri"/>
               </a:rPr>
               <a:t>EL TESORO CAMBIA</a:t>
             </a:r>
           </a:p>
           <a:p xmlns:a="http://schemas.openxmlformats.org/drawingml/2006/main">
-            <a:pPr algn="l">
+            <a:pPr algn="ctr">
               <a:lnSpc>
                 <a:spcPct val="92000"/>
               </a:lnSpc>
               <a:buNone/>
-              <a:defRPr sz="2325" b="1" i="0">
-                <a:ln w="0">
-                  <a:noFill/>
-                  <a:prstDash val="solid"/>
-                </a:ln>
-                <a:solidFill>
-                  <a:srgbClr val="FFF1CF"/>
-                </a:solidFill>
-                <a:latin typeface="Arial"/>
-                <a:ea typeface="Arial"/>
-                <a:cs typeface="Arial"/>
+              <a:defRPr sz="1875" b="0" i="0">
+                <a:ln w="0">
+                  <a:noFill/>
+                  <a:prstDash val="solid"/>
+                </a:ln>
+                <a:solidFill>
+                  <a:srgbClr val="F5E7C3"/>
+                </a:solidFill>
+                <a:latin typeface="Calibri"/>
+                <a:ea typeface="Calibri"/>
+                <a:cs typeface="Calibri"/>
               </a:defRPr>
             </a:pPr>
             <a:r>
-              <a:rPr sz="2325" b="1" i="0">
-                <a:ln w="0">
-                  <a:noFill/>
-                  <a:prstDash val="solid"/>
-                </a:ln>
-                <a:solidFill>
-                  <a:srgbClr val="FFF1CF"/>
-                </a:solidFill>
-                <a:latin typeface="Arial"/>
-                <a:ea typeface="Arial"/>
-                <a:cs typeface="Arial"/>
+              <a:rPr sz="1875" b="0" i="0">
+                <a:ln w="0">
+                  <a:noFill/>
+                  <a:prstDash val="solid"/>
+                </a:ln>
+                <a:solidFill>
+                  <a:srgbClr val="F5E7C3"/>
+                </a:solidFill>
+                <a:latin typeface="Calibri"/>
+                <a:ea typeface="Calibri"/>
+                <a:cs typeface="Calibri"/>
               </a:rPr>
               <a:t>LA MANERA DE MIRAR</a:t>
             </a:r>
@@ -1605,7 +1605,7 @@
         </p:nvSpPr>
         <p:spPr>
           <a:xfrm xmlns:a="http://schemas.openxmlformats.org/drawingml/2006/main">
-            <a:off x="895350" y="2609850"/>
+            <a:off x="1028700" y="2609850"/>
             <a:ext cx="4286250" cy="552450"/>
           </a:xfrm>
           <a:prstGeom xmlns:a="http://schemas.openxmlformats.org/drawingml/2006/main" prst="rect">
@@ -1628,7 +1628,7 @@
                 <a:spcPct val="108000"/>
               </a:lnSpc>
               <a:buNone/>
-              <a:defRPr sz="1425" b="0" i="0">
+              <a:defRPr sz="1200" b="0" i="0">
                 <a:ln w="0">
                   <a:noFill/>
                   <a:prstDash val="solid"/>
@@ -1636,13 +1636,13 @@
                 <a:solidFill>
                   <a:srgbClr val="FFFFFF"/>
                 </a:solidFill>
-                <a:latin typeface="Arial"/>
-                <a:ea typeface="Arial"/>
-                <a:cs typeface="Arial"/>
+                <a:latin typeface="Calibri"/>
+                <a:ea typeface="Calibri"/>
+                <a:cs typeface="Calibri"/>
               </a:defRPr>
             </a:pPr>
             <a:r>
-              <a:rPr sz="1425" b="0" i="0">
+              <a:rPr sz="1200" b="0" i="0">
                 <a:ln w="0">
                   <a:noFill/>
                   <a:prstDash val="solid"/>
@@ -1650,9 +1650,9 @@
                 <a:solidFill>
                   <a:srgbClr val="FFFFFF"/>
                 </a:solidFill>
-                <a:latin typeface="Arial"/>
-                <a:ea typeface="Arial"/>
-                <a:cs typeface="Arial"/>
+                <a:latin typeface="Calibri"/>
+                <a:ea typeface="Calibri"/>
+                <a:cs typeface="Calibri"/>
               </a:rPr>
               <a:t>El Reino no borra el camino recorrido: abre los ojos para reconocer, discernir y elegir con alegría.</a:t>
             </a:r>
@@ -1698,31 +1698,31 @@
                 <a:spcPct val="100000"/>
               </a:lnSpc>
               <a:buNone/>
-              <a:defRPr sz="1425" b="0" i="1">
-                <a:ln w="0">
-                  <a:noFill/>
-                  <a:prstDash val="solid"/>
-                </a:ln>
-                <a:solidFill>
-                  <a:srgbClr val="FFF1CF"/>
-                </a:solidFill>
-                <a:latin typeface="Arial"/>
-                <a:ea typeface="Arial"/>
-                <a:cs typeface="Arial"/>
+              <a:defRPr sz="1350" b="1" i="1">
+                <a:ln w="0">
+                  <a:noFill/>
+                  <a:prstDash val="solid"/>
+                </a:ln>
+                <a:solidFill>
+                  <a:srgbClr val="F5E7C3"/>
+                </a:solidFill>
+                <a:latin typeface="Calibri"/>
+                <a:ea typeface="Calibri"/>
+                <a:cs typeface="Calibri"/>
               </a:defRPr>
             </a:pPr>
             <a:r>
-              <a:rPr sz="1425" b="0" i="1">
-                <a:ln w="0">
-                  <a:noFill/>
-                  <a:prstDash val="solid"/>
-                </a:ln>
-                <a:solidFill>
-                  <a:srgbClr val="FFF1CF"/>
-                </a:solidFill>
-                <a:latin typeface="Arial"/>
-                <a:ea typeface="Arial"/>
-                <a:cs typeface="Arial"/>
+              <a:rPr sz="1350" b="1" i="1">
+                <a:ln w="0">
+                  <a:noFill/>
+                  <a:prstDash val="solid"/>
+                </a:ln>
+                <a:solidFill>
+                  <a:srgbClr val="F5E7C3"/>
+                </a:solidFill>
+                <a:latin typeface="Calibri"/>
+                <a:ea typeface="Calibri"/>
+                <a:cs typeface="Calibri"/>
               </a:rPr>
               <a:t>«No cambiaste mi historia; cambiaste mi manera de leer.»</a:t>
             </a:r>
@@ -1832,31 +1832,31 @@
                 <a:spcPct val="100000"/>
               </a:lnSpc>
               <a:buNone/>
-              <a:defRPr sz="975" b="0" i="0">
-                <a:ln w="0">
-                  <a:noFill/>
-                  <a:prstDash val="solid"/>
-                </a:ln>
-                <a:solidFill>
-                  <a:srgbClr val="FFFFFF"/>
-                </a:solidFill>
-                <a:latin typeface="Arial"/>
-                <a:ea typeface="Arial"/>
-                <a:cs typeface="Arial"/>
+              <a:defRPr sz="750" b="1" i="0">
+                <a:ln w="0">
+                  <a:noFill/>
+                  <a:prstDash val="solid"/>
+                </a:ln>
+                <a:solidFill>
+                  <a:srgbClr val="07151F"/>
+                </a:solidFill>
+                <a:latin typeface="Calibri"/>
+                <a:ea typeface="Calibri"/>
+                <a:cs typeface="Calibri"/>
               </a:defRPr>
             </a:pPr>
             <a:r>
-              <a:rPr sz="975" b="0" i="0">
-                <a:ln w="0">
-                  <a:noFill/>
-                  <a:prstDash val="solid"/>
-                </a:ln>
-                <a:solidFill>
-                  <a:srgbClr val="FFFFFF"/>
-                </a:solidFill>
-                <a:latin typeface="Arial"/>
-                <a:ea typeface="Arial"/>
-                <a:cs typeface="Arial"/>
+              <a:rPr sz="750" b="1" i="0">
+                <a:ln w="0">
+                  <a:noFill/>
+                  <a:prstDash val="solid"/>
+                </a:ln>
+                <a:solidFill>
+                  <a:srgbClr val="07151F"/>
+                </a:solidFill>
+                <a:latin typeface="Calibri"/>
+                <a:ea typeface="Calibri"/>
+                <a:cs typeface="Calibri"/>
               </a:rPr>
               <a:t>1</a:t>
             </a:r>
@@ -1902,31 +1902,31 @@
                 <a:spcPct val="100000"/>
               </a:lnSpc>
               <a:buNone/>
-              <a:defRPr sz="1350" b="0" i="0">
-                <a:ln w="0">
-                  <a:noFill/>
-                  <a:prstDash val="solid"/>
-                </a:ln>
-                <a:solidFill>
-                  <a:srgbClr val="F0C766"/>
-                </a:solidFill>
-                <a:latin typeface="Arial"/>
-                <a:ea typeface="Arial"/>
-                <a:cs typeface="Arial"/>
+              <a:defRPr sz="1200" b="1" i="0">
+                <a:ln w="0">
+                  <a:noFill/>
+                  <a:prstDash val="solid"/>
+                </a:ln>
+                <a:solidFill>
+                  <a:srgbClr val="D9A441"/>
+                </a:solidFill>
+                <a:latin typeface="Calibri"/>
+                <a:ea typeface="Calibri"/>
+                <a:cs typeface="Calibri"/>
               </a:defRPr>
             </a:pPr>
             <a:r>
-              <a:rPr sz="1350" b="0" i="0">
-                <a:ln w="0">
-                  <a:noFill/>
-                  <a:prstDash val="solid"/>
-                </a:ln>
-                <a:solidFill>
-                  <a:srgbClr val="F0C766"/>
-                </a:solidFill>
-                <a:latin typeface="Arial"/>
-                <a:ea typeface="Arial"/>
-                <a:cs typeface="Arial"/>
+              <a:rPr sz="1200" b="1" i="0">
+                <a:ln w="0">
+                  <a:noFill/>
+                  <a:prstDash val="solid"/>
+                </a:ln>
+                <a:solidFill>
+                  <a:srgbClr val="D9A441"/>
+                </a:solidFill>
+                <a:latin typeface="Calibri"/>
+                <a:ea typeface="Calibri"/>
+                <a:cs typeface="Calibri"/>
               </a:rPr>
               <a:t>BUSCAR</a:t>
             </a:r>
@@ -1972,7 +1972,7 @@
                 <a:spcPct val="104000"/>
               </a:lnSpc>
               <a:buNone/>
-              <a:defRPr sz="1200" b="0" i="0">
+              <a:defRPr sz="1125" b="1" i="0">
                 <a:ln w="0">
                   <a:noFill/>
                   <a:prstDash val="solid"/>
@@ -1980,13 +1980,13 @@
                 <a:solidFill>
                   <a:srgbClr val="FFFFFF"/>
                 </a:solidFill>
-                <a:latin typeface="Arial"/>
-                <a:ea typeface="Arial"/>
-                <a:cs typeface="Arial"/>
+                <a:latin typeface="Calibri"/>
+                <a:ea typeface="Calibri"/>
+                <a:cs typeface="Calibri"/>
               </a:defRPr>
             </a:pPr>
             <a:r>
-              <a:rPr sz="1200" b="0" i="0">
+              <a:rPr sz="1125" b="1" i="0">
                 <a:ln w="0">
                   <a:noFill/>
                   <a:prstDash val="solid"/>
@@ -1994,9 +1994,9 @@
                 <a:solidFill>
                   <a:srgbClr val="FFFFFF"/>
                 </a:solidFill>
-                <a:latin typeface="Arial"/>
-                <a:ea typeface="Arial"/>
-                <a:cs typeface="Arial"/>
+                <a:latin typeface="Calibri"/>
+                <a:ea typeface="Calibri"/>
+                <a:cs typeface="Calibri"/>
               </a:rPr>
               <a:t>Preguntas, deseo, camino.</a:t>
             </a:r>
@@ -2073,31 +2073,31 @@
                 <a:spcPct val="104000"/>
               </a:lnSpc>
               <a:buNone/>
-              <a:defRPr sz="1125" b="0" i="0">
-                <a:ln w="0">
-                  <a:noFill/>
-                  <a:prstDash val="solid"/>
-                </a:ln>
-                <a:solidFill>
-                  <a:srgbClr val="F5F0E7"/>
-                </a:solidFill>
-                <a:latin typeface="Arial"/>
-                <a:ea typeface="Arial"/>
-                <a:cs typeface="Arial"/>
+              <a:defRPr sz="1050" b="0" i="0">
+                <a:ln w="0">
+                  <a:noFill/>
+                  <a:prstDash val="solid"/>
+                </a:ln>
+                <a:solidFill>
+                  <a:srgbClr val="DCE3E3"/>
+                </a:solidFill>
+                <a:latin typeface="Calibri"/>
+                <a:ea typeface="Calibri"/>
+                <a:cs typeface="Calibri"/>
               </a:defRPr>
             </a:pPr>
             <a:r>
-              <a:rPr sz="1125" b="0" i="0">
-                <a:ln w="0">
-                  <a:noFill/>
-                  <a:prstDash val="solid"/>
-                </a:ln>
-                <a:solidFill>
-                  <a:srgbClr val="F5F0E7"/>
-                </a:solidFill>
-                <a:latin typeface="Arial"/>
-                <a:ea typeface="Arial"/>
-                <a:cs typeface="Arial"/>
+              <a:rPr sz="1050" b="0" i="0">
+                <a:ln w="0">
+                  <a:noFill/>
+                  <a:prstDash val="solid"/>
+                </a:ln>
+                <a:solidFill>
+                  <a:srgbClr val="DCE3E3"/>
+                </a:solidFill>
+                <a:latin typeface="Calibri"/>
+                <a:ea typeface="Calibri"/>
+                <a:cs typeface="Calibri"/>
               </a:rPr>
               <a:t>Buscar con honestidad mantiene abierto el corazón.</a:t>
             </a:r>
@@ -2176,31 +2176,31 @@
                 <a:spcPct val="100000"/>
               </a:lnSpc>
               <a:buNone/>
-              <a:defRPr sz="975" b="0" i="0">
-                <a:ln w="0">
-                  <a:noFill/>
-                  <a:prstDash val="solid"/>
-                </a:ln>
-                <a:solidFill>
-                  <a:srgbClr val="FFFFFF"/>
-                </a:solidFill>
-                <a:latin typeface="Arial"/>
-                <a:ea typeface="Arial"/>
-                <a:cs typeface="Arial"/>
+              <a:defRPr sz="750" b="1" i="0">
+                <a:ln w="0">
+                  <a:noFill/>
+                  <a:prstDash val="solid"/>
+                </a:ln>
+                <a:solidFill>
+                  <a:srgbClr val="07151F"/>
+                </a:solidFill>
+                <a:latin typeface="Calibri"/>
+                <a:ea typeface="Calibri"/>
+                <a:cs typeface="Calibri"/>
               </a:defRPr>
             </a:pPr>
             <a:r>
-              <a:rPr sz="975" b="0" i="0">
-                <a:ln w="0">
-                  <a:noFill/>
-                  <a:prstDash val="solid"/>
-                </a:ln>
-                <a:solidFill>
-                  <a:srgbClr val="FFFFFF"/>
-                </a:solidFill>
-                <a:latin typeface="Arial"/>
-                <a:ea typeface="Arial"/>
-                <a:cs typeface="Arial"/>
+              <a:rPr sz="750" b="1" i="0">
+                <a:ln w="0">
+                  <a:noFill/>
+                  <a:prstDash val="solid"/>
+                </a:ln>
+                <a:solidFill>
+                  <a:srgbClr val="07151F"/>
+                </a:solidFill>
+                <a:latin typeface="Calibri"/>
+                <a:ea typeface="Calibri"/>
+                <a:cs typeface="Calibri"/>
               </a:rPr>
               <a:t>2</a:t>
             </a:r>
@@ -2246,31 +2246,31 @@
                 <a:spcPct val="100000"/>
               </a:lnSpc>
               <a:buNone/>
-              <a:defRPr sz="1350" b="0" i="0">
-                <a:ln w="0">
-                  <a:noFill/>
-                  <a:prstDash val="solid"/>
-                </a:ln>
-                <a:solidFill>
-                  <a:srgbClr val="F0C766"/>
-                </a:solidFill>
-                <a:latin typeface="Arial"/>
-                <a:ea typeface="Arial"/>
-                <a:cs typeface="Arial"/>
+              <a:defRPr sz="1200" b="1" i="0">
+                <a:ln w="0">
+                  <a:noFill/>
+                  <a:prstDash val="solid"/>
+                </a:ln>
+                <a:solidFill>
+                  <a:srgbClr val="D9A441"/>
+                </a:solidFill>
+                <a:latin typeface="Calibri"/>
+                <a:ea typeface="Calibri"/>
+                <a:cs typeface="Calibri"/>
               </a:defRPr>
             </a:pPr>
             <a:r>
-              <a:rPr sz="1350" b="0" i="0">
-                <a:ln w="0">
-                  <a:noFill/>
-                  <a:prstDash val="solid"/>
-                </a:ln>
-                <a:solidFill>
-                  <a:srgbClr val="F0C766"/>
-                </a:solidFill>
-                <a:latin typeface="Arial"/>
-                <a:ea typeface="Arial"/>
-                <a:cs typeface="Arial"/>
+              <a:rPr sz="1200" b="1" i="0">
+                <a:ln w="0">
+                  <a:noFill/>
+                  <a:prstDash val="solid"/>
+                </a:ln>
+                <a:solidFill>
+                  <a:srgbClr val="D9A441"/>
+                </a:solidFill>
+                <a:latin typeface="Calibri"/>
+                <a:ea typeface="Calibri"/>
+                <a:cs typeface="Calibri"/>
               </a:rPr>
               <a:t>DESCUBRIR</a:t>
             </a:r>
@@ -2316,7 +2316,7 @@
                 <a:spcPct val="104000"/>
               </a:lnSpc>
               <a:buNone/>
-              <a:defRPr sz="1200" b="0" i="0">
+              <a:defRPr sz="1125" b="1" i="0">
                 <a:ln w="0">
                   <a:noFill/>
                   <a:prstDash val="solid"/>
@@ -2324,13 +2324,13 @@
                 <a:solidFill>
                   <a:srgbClr val="FFFFFF"/>
                 </a:solidFill>
-                <a:latin typeface="Arial"/>
-                <a:ea typeface="Arial"/>
-                <a:cs typeface="Arial"/>
+                <a:latin typeface="Calibri"/>
+                <a:ea typeface="Calibri"/>
+                <a:cs typeface="Calibri"/>
               </a:defRPr>
             </a:pPr>
             <a:r>
-              <a:rPr sz="1200" b="0" i="0">
+              <a:rPr sz="1125" b="1" i="0">
                 <a:ln w="0">
                   <a:noFill/>
                   <a:prstDash val="solid"/>
@@ -2338,9 +2338,9 @@
                 <a:solidFill>
                   <a:srgbClr val="FFFFFF"/>
                 </a:solidFill>
-                <a:latin typeface="Arial"/>
-                <a:ea typeface="Arial"/>
-                <a:cs typeface="Arial"/>
+                <a:latin typeface="Calibri"/>
+                <a:ea typeface="Calibri"/>
+                <a:cs typeface="Calibri"/>
               </a:rPr>
               <a:t>El tesoro aparece en un campo conocido.</a:t>
             </a:r>
@@ -2417,31 +2417,31 @@
                 <a:spcPct val="104000"/>
               </a:lnSpc>
               <a:buNone/>
-              <a:defRPr sz="1125" b="0" i="0">
-                <a:ln w="0">
-                  <a:noFill/>
-                  <a:prstDash val="solid"/>
-                </a:ln>
-                <a:solidFill>
-                  <a:srgbClr val="F5F0E7"/>
-                </a:solidFill>
-                <a:latin typeface="Arial"/>
-                <a:ea typeface="Arial"/>
-                <a:cs typeface="Arial"/>
+              <a:defRPr sz="1050" b="0" i="0">
+                <a:ln w="0">
+                  <a:noFill/>
+                  <a:prstDash val="solid"/>
+                </a:ln>
+                <a:solidFill>
+                  <a:srgbClr val="DCE3E3"/>
+                </a:solidFill>
+                <a:latin typeface="Calibri"/>
+                <a:ea typeface="Calibri"/>
+                <a:cs typeface="Calibri"/>
               </a:defRPr>
             </a:pPr>
             <a:r>
-              <a:rPr sz="1125" b="0" i="0">
-                <a:ln w="0">
-                  <a:noFill/>
-                  <a:prstDash val="solid"/>
-                </a:ln>
-                <a:solidFill>
-                  <a:srgbClr val="F5F0E7"/>
-                </a:solidFill>
-                <a:latin typeface="Arial"/>
-                <a:ea typeface="Arial"/>
-                <a:cs typeface="Arial"/>
+              <a:rPr sz="1050" b="0" i="0">
+                <a:ln w="0">
+                  <a:noFill/>
+                  <a:prstDash val="solid"/>
+                </a:ln>
+                <a:solidFill>
+                  <a:srgbClr val="DCE3E3"/>
+                </a:solidFill>
+                <a:latin typeface="Calibri"/>
+                <a:ea typeface="Calibri"/>
+                <a:cs typeface="Calibri"/>
               </a:rPr>
               <a:t>Dios puede estar más cerca de lo que parecía.</a:t>
             </a:r>
@@ -2520,31 +2520,31 @@
                 <a:spcPct val="100000"/>
               </a:lnSpc>
               <a:buNone/>
-              <a:defRPr sz="975" b="0" i="0">
-                <a:ln w="0">
-                  <a:noFill/>
-                  <a:prstDash val="solid"/>
-                </a:ln>
-                <a:solidFill>
-                  <a:srgbClr val="FFFFFF"/>
-                </a:solidFill>
-                <a:latin typeface="Arial"/>
-                <a:ea typeface="Arial"/>
-                <a:cs typeface="Arial"/>
+              <a:defRPr sz="750" b="1" i="0">
+                <a:ln w="0">
+                  <a:noFill/>
+                  <a:prstDash val="solid"/>
+                </a:ln>
+                <a:solidFill>
+                  <a:srgbClr val="07151F"/>
+                </a:solidFill>
+                <a:latin typeface="Calibri"/>
+                <a:ea typeface="Calibri"/>
+                <a:cs typeface="Calibri"/>
               </a:defRPr>
             </a:pPr>
             <a:r>
-              <a:rPr sz="975" b="0" i="0">
-                <a:ln w="0">
-                  <a:noFill/>
-                  <a:prstDash val="solid"/>
-                </a:ln>
-                <a:solidFill>
-                  <a:srgbClr val="FFFFFF"/>
-                </a:solidFill>
-                <a:latin typeface="Arial"/>
-                <a:ea typeface="Arial"/>
-                <a:cs typeface="Arial"/>
+              <a:rPr sz="750" b="1" i="0">
+                <a:ln w="0">
+                  <a:noFill/>
+                  <a:prstDash val="solid"/>
+                </a:ln>
+                <a:solidFill>
+                  <a:srgbClr val="07151F"/>
+                </a:solidFill>
+                <a:latin typeface="Calibri"/>
+                <a:ea typeface="Calibri"/>
+                <a:cs typeface="Calibri"/>
               </a:rPr>
               <a:t>3</a:t>
             </a:r>
@@ -2590,31 +2590,31 @@
                 <a:spcPct val="100000"/>
               </a:lnSpc>
               <a:buNone/>
-              <a:defRPr sz="1350" b="0" i="0">
-                <a:ln w="0">
-                  <a:noFill/>
-                  <a:prstDash val="solid"/>
-                </a:ln>
-                <a:solidFill>
-                  <a:srgbClr val="F0C766"/>
-                </a:solidFill>
-                <a:latin typeface="Arial"/>
-                <a:ea typeface="Arial"/>
-                <a:cs typeface="Arial"/>
+              <a:defRPr sz="1200" b="1" i="0">
+                <a:ln w="0">
+                  <a:noFill/>
+                  <a:prstDash val="solid"/>
+                </a:ln>
+                <a:solidFill>
+                  <a:srgbClr val="D9A441"/>
+                </a:solidFill>
+                <a:latin typeface="Calibri"/>
+                <a:ea typeface="Calibri"/>
+                <a:cs typeface="Calibri"/>
               </a:defRPr>
             </a:pPr>
             <a:r>
-              <a:rPr sz="1350" b="0" i="0">
-                <a:ln w="0">
-                  <a:noFill/>
-                  <a:prstDash val="solid"/>
-                </a:ln>
-                <a:solidFill>
-                  <a:srgbClr val="F0C766"/>
-                </a:solidFill>
-                <a:latin typeface="Arial"/>
-                <a:ea typeface="Arial"/>
-                <a:cs typeface="Arial"/>
+              <a:rPr sz="1200" b="1" i="0">
+                <a:ln w="0">
+                  <a:noFill/>
+                  <a:prstDash val="solid"/>
+                </a:ln>
+                <a:solidFill>
+                  <a:srgbClr val="D9A441"/>
+                </a:solidFill>
+                <a:latin typeface="Calibri"/>
+                <a:ea typeface="Calibri"/>
+                <a:cs typeface="Calibri"/>
               </a:rPr>
               <a:t>RELEER</a:t>
             </a:r>
@@ -2660,7 +2660,7 @@
                 <a:spcPct val="104000"/>
               </a:lnSpc>
               <a:buNone/>
-              <a:defRPr sz="1200" b="0" i="0">
+              <a:defRPr sz="1125" b="1" i="0">
                 <a:ln w="0">
                   <a:noFill/>
                   <a:prstDash val="solid"/>
@@ -2668,13 +2668,13 @@
                 <a:solidFill>
                   <a:srgbClr val="FFFFFF"/>
                 </a:solidFill>
-                <a:latin typeface="Arial"/>
-                <a:ea typeface="Arial"/>
-                <a:cs typeface="Arial"/>
+                <a:latin typeface="Calibri"/>
+                <a:ea typeface="Calibri"/>
+                <a:cs typeface="Calibri"/>
               </a:defRPr>
             </a:pPr>
             <a:r>
-              <a:rPr sz="1200" b="0" i="0">
+              <a:rPr sz="1125" b="1" i="0">
                 <a:ln w="0">
                   <a:noFill/>
                   <a:prstDash val="solid"/>
@@ -2682,9 +2682,9 @@
                 <a:solidFill>
                   <a:srgbClr val="FFFFFF"/>
                 </a:solidFill>
-                <a:latin typeface="Arial"/>
-                <a:ea typeface="Arial"/>
-                <a:cs typeface="Arial"/>
+                <a:latin typeface="Calibri"/>
+                <a:ea typeface="Calibri"/>
+                <a:cs typeface="Calibri"/>
               </a:rPr>
               <a:t>Cambian los ojos, no las calles.</a:t>
             </a:r>
@@ -2761,31 +2761,31 @@
                 <a:spcPct val="104000"/>
               </a:lnSpc>
               <a:buNone/>
-              <a:defRPr sz="1125" b="0" i="0">
-                <a:ln w="0">
-                  <a:noFill/>
-                  <a:prstDash val="solid"/>
-                </a:ln>
-                <a:solidFill>
-                  <a:srgbClr val="F5F0E7"/>
-                </a:solidFill>
-                <a:latin typeface="Arial"/>
-                <a:ea typeface="Arial"/>
-                <a:cs typeface="Arial"/>
+              <a:defRPr sz="1050" b="0" i="0">
+                <a:ln w="0">
+                  <a:noFill/>
+                  <a:prstDash val="solid"/>
+                </a:ln>
+                <a:solidFill>
+                  <a:srgbClr val="DCE3E3"/>
+                </a:solidFill>
+                <a:latin typeface="Calibri"/>
+                <a:ea typeface="Calibri"/>
+                <a:cs typeface="Calibri"/>
               </a:defRPr>
             </a:pPr>
             <a:r>
-              <a:rPr sz="1125" b="0" i="0">
-                <a:ln w="0">
-                  <a:noFill/>
-                  <a:prstDash val="solid"/>
-                </a:ln>
-                <a:solidFill>
-                  <a:srgbClr val="F5F0E7"/>
-                </a:solidFill>
-                <a:latin typeface="Arial"/>
-                <a:ea typeface="Arial"/>
-                <a:cs typeface="Arial"/>
+              <a:rPr sz="1050" b="0" i="0">
+                <a:ln w="0">
+                  <a:noFill/>
+                  <a:prstDash val="solid"/>
+                </a:ln>
+                <a:solidFill>
+                  <a:srgbClr val="DCE3E3"/>
+                </a:solidFill>
+                <a:latin typeface="Calibri"/>
+                <a:ea typeface="Calibri"/>
+                <a:cs typeface="Calibri"/>
               </a:rPr>
               <a:t>La fe reconoce compañía sin negar las heridas.</a:t>
             </a:r>
@@ -2864,31 +2864,31 @@
                 <a:spcPct val="100000"/>
               </a:lnSpc>
               <a:buNone/>
-              <a:defRPr sz="975" b="0" i="0">
-                <a:ln w="0">
-                  <a:noFill/>
-                  <a:prstDash val="solid"/>
-                </a:ln>
-                <a:solidFill>
-                  <a:srgbClr val="FFFFFF"/>
-                </a:solidFill>
-                <a:latin typeface="Arial"/>
-                <a:ea typeface="Arial"/>
-                <a:cs typeface="Arial"/>
+              <a:defRPr sz="750" b="1" i="0">
+                <a:ln w="0">
+                  <a:noFill/>
+                  <a:prstDash val="solid"/>
+                </a:ln>
+                <a:solidFill>
+                  <a:srgbClr val="07151F"/>
+                </a:solidFill>
+                <a:latin typeface="Calibri"/>
+                <a:ea typeface="Calibri"/>
+                <a:cs typeface="Calibri"/>
               </a:defRPr>
             </a:pPr>
             <a:r>
-              <a:rPr sz="975" b="0" i="0">
-                <a:ln w="0">
-                  <a:noFill/>
-                  <a:prstDash val="solid"/>
-                </a:ln>
-                <a:solidFill>
-                  <a:srgbClr val="FFFFFF"/>
-                </a:solidFill>
-                <a:latin typeface="Arial"/>
-                <a:ea typeface="Arial"/>
-                <a:cs typeface="Arial"/>
+              <a:rPr sz="750" b="1" i="0">
+                <a:ln w="0">
+                  <a:noFill/>
+                  <a:prstDash val="solid"/>
+                </a:ln>
+                <a:solidFill>
+                  <a:srgbClr val="07151F"/>
+                </a:solidFill>
+                <a:latin typeface="Calibri"/>
+                <a:ea typeface="Calibri"/>
+                <a:cs typeface="Calibri"/>
               </a:rPr>
               <a:t>4</a:t>
             </a:r>
@@ -2934,31 +2934,31 @@
                 <a:spcPct val="100000"/>
               </a:lnSpc>
               <a:buNone/>
-              <a:defRPr sz="1350" b="0" i="0">
-                <a:ln w="0">
-                  <a:noFill/>
-                  <a:prstDash val="solid"/>
-                </a:ln>
-                <a:solidFill>
-                  <a:srgbClr val="F0C766"/>
-                </a:solidFill>
-                <a:latin typeface="Arial"/>
-                <a:ea typeface="Arial"/>
-                <a:cs typeface="Arial"/>
+              <a:defRPr sz="1200" b="1" i="0">
+                <a:ln w="0">
+                  <a:noFill/>
+                  <a:prstDash val="solid"/>
+                </a:ln>
+                <a:solidFill>
+                  <a:srgbClr val="D9A441"/>
+                </a:solidFill>
+                <a:latin typeface="Calibri"/>
+                <a:ea typeface="Calibri"/>
+                <a:cs typeface="Calibri"/>
               </a:defRPr>
             </a:pPr>
             <a:r>
-              <a:rPr sz="1350" b="0" i="0">
-                <a:ln w="0">
-                  <a:noFill/>
-                  <a:prstDash val="solid"/>
-                </a:ln>
-                <a:solidFill>
-                  <a:srgbClr val="F0C766"/>
-                </a:solidFill>
-                <a:latin typeface="Arial"/>
-                <a:ea typeface="Arial"/>
-                <a:cs typeface="Arial"/>
+              <a:rPr sz="1200" b="1" i="0">
+                <a:ln w="0">
+                  <a:noFill/>
+                  <a:prstDash val="solid"/>
+                </a:ln>
+                <a:solidFill>
+                  <a:srgbClr val="D9A441"/>
+                </a:solidFill>
+                <a:latin typeface="Calibri"/>
+                <a:ea typeface="Calibri"/>
+                <a:cs typeface="Calibri"/>
               </a:rPr>
               <a:t>VALORAR</a:t>
             </a:r>
@@ -3004,7 +3004,7 @@
                 <a:spcPct val="104000"/>
               </a:lnSpc>
               <a:buNone/>
-              <a:defRPr sz="1200" b="0" i="0">
+              <a:defRPr sz="1125" b="1" i="0">
                 <a:ln w="0">
                   <a:noFill/>
                   <a:prstDash val="solid"/>
@@ -3012,13 +3012,13 @@
                 <a:solidFill>
                   <a:srgbClr val="FFFFFF"/>
                 </a:solidFill>
-                <a:latin typeface="Arial"/>
-                <a:ea typeface="Arial"/>
-                <a:cs typeface="Arial"/>
+                <a:latin typeface="Calibri"/>
+                <a:ea typeface="Calibri"/>
+                <a:cs typeface="Calibri"/>
               </a:defRPr>
             </a:pPr>
             <a:r>
-              <a:rPr sz="1200" b="0" i="0">
+              <a:rPr sz="1125" b="1" i="0">
                 <a:ln w="0">
                   <a:noFill/>
                   <a:prstDash val="solid"/>
@@ -3026,9 +3026,9 @@
                 <a:solidFill>
                   <a:srgbClr val="FFFFFF"/>
                 </a:solidFill>
-                <a:latin typeface="Arial"/>
-                <a:ea typeface="Arial"/>
-                <a:cs typeface="Arial"/>
+                <a:latin typeface="Calibri"/>
+                <a:ea typeface="Calibri"/>
+                <a:cs typeface="Calibri"/>
               </a:rPr>
               <a:t>La perla educa el deseo.</a:t>
             </a:r>
@@ -3105,31 +3105,31 @@
                 <a:spcPct val="104000"/>
               </a:lnSpc>
               <a:buNone/>
-              <a:defRPr sz="1125" b="0" i="0">
-                <a:ln w="0">
-                  <a:noFill/>
-                  <a:prstDash val="solid"/>
-                </a:ln>
-                <a:solidFill>
-                  <a:srgbClr val="F5F0E7"/>
-                </a:solidFill>
-                <a:latin typeface="Arial"/>
-                <a:ea typeface="Arial"/>
-                <a:cs typeface="Arial"/>
+              <a:defRPr sz="1050" b="0" i="0">
+                <a:ln w="0">
+                  <a:noFill/>
+                  <a:prstDash val="solid"/>
+                </a:ln>
+                <a:solidFill>
+                  <a:srgbClr val="DCE3E3"/>
+                </a:solidFill>
+                <a:latin typeface="Calibri"/>
+                <a:ea typeface="Calibri"/>
+                <a:cs typeface="Calibri"/>
               </a:defRPr>
             </a:pPr>
             <a:r>
-              <a:rPr sz="1125" b="0" i="0">
-                <a:ln w="0">
-                  <a:noFill/>
-                  <a:prstDash val="solid"/>
-                </a:ln>
-                <a:solidFill>
-                  <a:srgbClr val="F5F0E7"/>
-                </a:solidFill>
-                <a:latin typeface="Arial"/>
-                <a:ea typeface="Arial"/>
-                <a:cs typeface="Arial"/>
+              <a:rPr sz="1050" b="0" i="0">
+                <a:ln w="0">
+                  <a:noFill/>
+                  <a:prstDash val="solid"/>
+                </a:ln>
+                <a:solidFill>
+                  <a:srgbClr val="DCE3E3"/>
+                </a:solidFill>
+                <a:latin typeface="Calibri"/>
+                <a:ea typeface="Calibri"/>
+                <a:cs typeface="Calibri"/>
               </a:rPr>
               <a:t>Lo esencial vale más que el brillo que dispersa.</a:t>
             </a:r>
@@ -3208,31 +3208,31 @@
                 <a:spcPct val="100000"/>
               </a:lnSpc>
               <a:buNone/>
-              <a:defRPr sz="975" b="0" i="0">
-                <a:ln w="0">
-                  <a:noFill/>
-                  <a:prstDash val="solid"/>
-                </a:ln>
-                <a:solidFill>
-                  <a:srgbClr val="FFFFFF"/>
-                </a:solidFill>
-                <a:latin typeface="Arial"/>
-                <a:ea typeface="Arial"/>
-                <a:cs typeface="Arial"/>
+              <a:defRPr sz="750" b="1" i="0">
+                <a:ln w="0">
+                  <a:noFill/>
+                  <a:prstDash val="solid"/>
+                </a:ln>
+                <a:solidFill>
+                  <a:srgbClr val="07151F"/>
+                </a:solidFill>
+                <a:latin typeface="Calibri"/>
+                <a:ea typeface="Calibri"/>
+                <a:cs typeface="Calibri"/>
               </a:defRPr>
             </a:pPr>
             <a:r>
-              <a:rPr sz="975" b="0" i="0">
-                <a:ln w="0">
-                  <a:noFill/>
-                  <a:prstDash val="solid"/>
-                </a:ln>
-                <a:solidFill>
-                  <a:srgbClr val="FFFFFF"/>
-                </a:solidFill>
-                <a:latin typeface="Arial"/>
-                <a:ea typeface="Arial"/>
-                <a:cs typeface="Arial"/>
+              <a:rPr sz="750" b="1" i="0">
+                <a:ln w="0">
+                  <a:noFill/>
+                  <a:prstDash val="solid"/>
+                </a:ln>
+                <a:solidFill>
+                  <a:srgbClr val="07151F"/>
+                </a:solidFill>
+                <a:latin typeface="Calibri"/>
+                <a:ea typeface="Calibri"/>
+                <a:cs typeface="Calibri"/>
               </a:rPr>
               <a:t>5</a:t>
             </a:r>
@@ -3278,31 +3278,31 @@
                 <a:spcPct val="100000"/>
               </a:lnSpc>
               <a:buNone/>
-              <a:defRPr sz="1350" b="0" i="0">
-                <a:ln w="0">
-                  <a:noFill/>
-                  <a:prstDash val="solid"/>
-                </a:ln>
-                <a:solidFill>
-                  <a:srgbClr val="F0C766"/>
-                </a:solidFill>
-                <a:latin typeface="Arial"/>
-                <a:ea typeface="Arial"/>
-                <a:cs typeface="Arial"/>
+              <a:defRPr sz="1200" b="1" i="0">
+                <a:ln w="0">
+                  <a:noFill/>
+                  <a:prstDash val="solid"/>
+                </a:ln>
+                <a:solidFill>
+                  <a:srgbClr val="D9A441"/>
+                </a:solidFill>
+                <a:latin typeface="Calibri"/>
+                <a:ea typeface="Calibri"/>
+                <a:cs typeface="Calibri"/>
               </a:defRPr>
             </a:pPr>
             <a:r>
-              <a:rPr sz="1350" b="0" i="0">
-                <a:ln w="0">
-                  <a:noFill/>
-                  <a:prstDash val="solid"/>
-                </a:ln>
-                <a:solidFill>
-                  <a:srgbClr val="F0C766"/>
-                </a:solidFill>
-                <a:latin typeface="Arial"/>
-                <a:ea typeface="Arial"/>
-                <a:cs typeface="Arial"/>
+              <a:rPr sz="1200" b="1" i="0">
+                <a:ln w="0">
+                  <a:noFill/>
+                  <a:prstDash val="solid"/>
+                </a:ln>
+                <a:solidFill>
+                  <a:srgbClr val="D9A441"/>
+                </a:solidFill>
+                <a:latin typeface="Calibri"/>
+                <a:ea typeface="Calibri"/>
+                <a:cs typeface="Calibri"/>
               </a:rPr>
               <a:t>ELEGIR</a:t>
             </a:r>
@@ -3348,7 +3348,7 @@
                 <a:spcPct val="104000"/>
               </a:lnSpc>
               <a:buNone/>
-              <a:defRPr sz="1200" b="0" i="0">
+              <a:defRPr sz="1125" b="1" i="0">
                 <a:ln w="0">
                   <a:noFill/>
                   <a:prstDash val="solid"/>
@@ -3356,13 +3356,13 @@
                 <a:solidFill>
                   <a:srgbClr val="FFFFFF"/>
                 </a:solidFill>
-                <a:latin typeface="Arial"/>
-                <a:ea typeface="Arial"/>
-                <a:cs typeface="Arial"/>
+                <a:latin typeface="Calibri"/>
+                <a:ea typeface="Calibri"/>
+                <a:cs typeface="Calibri"/>
               </a:defRPr>
             </a:pPr>
             <a:r>
-              <a:rPr sz="1200" b="0" i="0">
+              <a:rPr sz="1125" b="1" i="0">
                 <a:ln w="0">
                   <a:noFill/>
                   <a:prstDash val="solid"/>
@@ -3370,9 +3370,9 @@
                 <a:solidFill>
                   <a:srgbClr val="FFFFFF"/>
                 </a:solidFill>
-                <a:latin typeface="Arial"/>
-                <a:ea typeface="Arial"/>
-                <a:cs typeface="Arial"/>
+                <a:latin typeface="Calibri"/>
+                <a:ea typeface="Calibri"/>
+                <a:cs typeface="Calibri"/>
               </a:rPr>
               <a:t>La alegría reordena prioridades.</a:t>
             </a:r>
@@ -3449,31 +3449,31 @@
                 <a:spcPct val="104000"/>
               </a:lnSpc>
               <a:buNone/>
-              <a:defRPr sz="1125" b="0" i="0">
-                <a:ln w="0">
-                  <a:noFill/>
-                  <a:prstDash val="solid"/>
-                </a:ln>
-                <a:solidFill>
-                  <a:srgbClr val="F5F0E7"/>
-                </a:solidFill>
-                <a:latin typeface="Arial"/>
-                <a:ea typeface="Arial"/>
-                <a:cs typeface="Arial"/>
+              <a:defRPr sz="1050" b="0" i="0">
+                <a:ln w="0">
+                  <a:noFill/>
+                  <a:prstDash val="solid"/>
+                </a:ln>
+                <a:solidFill>
+                  <a:srgbClr val="DCE3E3"/>
+                </a:solidFill>
+                <a:latin typeface="Calibri"/>
+                <a:ea typeface="Calibri"/>
+                <a:cs typeface="Calibri"/>
               </a:defRPr>
             </a:pPr>
             <a:r>
-              <a:rPr sz="1125" b="0" i="0">
-                <a:ln w="0">
-                  <a:noFill/>
-                  <a:prstDash val="solid"/>
-                </a:ln>
-                <a:solidFill>
-                  <a:srgbClr val="F5F0E7"/>
-                </a:solidFill>
-                <a:latin typeface="Arial"/>
-                <a:ea typeface="Arial"/>
-                <a:cs typeface="Arial"/>
+              <a:rPr sz="1050" b="0" i="0">
+                <a:ln w="0">
+                  <a:noFill/>
+                  <a:prstDash val="solid"/>
+                </a:ln>
+                <a:solidFill>
+                  <a:srgbClr val="DCE3E3"/>
+                </a:solidFill>
+                <a:latin typeface="Calibri"/>
+                <a:ea typeface="Calibri"/>
+                <a:cs typeface="Calibri"/>
               </a:rPr>
               <a:t>La red ayuda a conservar lo que da vida.</a:t>
             </a:r>
@@ -3519,31 +3519,31 @@
                 <a:spcPct val="100000"/>
               </a:lnSpc>
               <a:buNone/>
-              <a:defRPr sz="900" b="0" i="0">
-                <a:ln w="0">
-                  <a:noFill/>
-                  <a:prstDash val="solid"/>
-                </a:ln>
-                <a:solidFill>
-                  <a:srgbClr val="F5F0E7"/>
-                </a:solidFill>
-                <a:latin typeface="Arial"/>
-                <a:ea typeface="Arial"/>
-                <a:cs typeface="Arial"/>
+              <a:defRPr sz="825" b="0" i="0">
+                <a:ln w="0">
+                  <a:noFill/>
+                  <a:prstDash val="solid"/>
+                </a:ln>
+                <a:solidFill>
+                  <a:srgbClr val="B8C3C7"/>
+                </a:solidFill>
+                <a:latin typeface="Calibri"/>
+                <a:ea typeface="Calibri"/>
+                <a:cs typeface="Calibri"/>
               </a:defRPr>
             </a:pPr>
             <a:r>
-              <a:rPr sz="900" b="0" i="0">
-                <a:ln w="0">
-                  <a:noFill/>
-                  <a:prstDash val="solid"/>
-                </a:ln>
-                <a:solidFill>
-                  <a:srgbClr val="F5F0E7"/>
-                </a:solidFill>
-                <a:latin typeface="Arial"/>
-                <a:ea typeface="Arial"/>
-                <a:cs typeface="Arial"/>
+              <a:rPr sz="825" b="0" i="0">
+                <a:ln w="0">
+                  <a:noFill/>
+                  <a:prstDash val="solid"/>
+                </a:ln>
+                <a:solidFill>
+                  <a:srgbClr val="B8C3C7"/>
+                </a:solidFill>
+                <a:latin typeface="Calibri"/>
+                <a:ea typeface="Calibri"/>
+                <a:cs typeface="Calibri"/>
               </a:rPr>
               <a:t>01</a:t>
             </a:r>
@@ -3618,23 +3618,31 @@
                 <a:spcPct val="100000"/>
               </a:lnSpc>
               <a:buNone/>
-              <a:defRPr sz="2625" b="0" i="0">
-                <a:solidFill>
-                  <a:srgbClr val="0B1A24"/>
-                </a:solidFill>
-                <a:latin typeface="Arial"/>
-                <a:ea typeface="Arial"/>
-                <a:cs typeface="Arial"/>
+              <a:defRPr sz="2250" b="1" i="0">
+                <a:ln w="0">
+                  <a:noFill/>
+                  <a:prstDash val="solid"/>
+                </a:ln>
+                <a:solidFill>
+                  <a:srgbClr val="07151F"/>
+                </a:solidFill>
+                <a:latin typeface="Calibri"/>
+                <a:ea typeface="Calibri"/>
+                <a:cs typeface="Calibri"/>
               </a:defRPr>
             </a:pPr>
             <a:r>
-              <a:rPr sz="2625" b="0" i="0">
-                <a:solidFill>
-                  <a:srgbClr val="0B1A24"/>
-                </a:solidFill>
-                <a:latin typeface="Arial"/>
-                <a:ea typeface="Arial"/>
-                <a:cs typeface="Arial"/>
+              <a:rPr sz="2250" b="1" i="0">
+                <a:ln w="0">
+                  <a:noFill/>
+                  <a:prstDash val="solid"/>
+                </a:ln>
+                <a:solidFill>
+                  <a:srgbClr val="07151F"/>
+                </a:solidFill>
+                <a:latin typeface="Calibri"/>
+                <a:ea typeface="Calibri"/>
+                <a:cs typeface="Calibri"/>
               </a:rPr>
               <a:t>CUATRO RESONANCIAS BÍBLICAS</a:t>
             </a:r>
@@ -3680,23 +3688,31 @@
                 <a:spcPct val="100000"/>
               </a:lnSpc>
               <a:buNone/>
-              <a:defRPr sz="1500" b="0" i="0">
-                <a:solidFill>
-                  <a:srgbClr val="47616D"/>
-                </a:solidFill>
-                <a:latin typeface="Arial"/>
-                <a:ea typeface="Arial"/>
-                <a:cs typeface="Arial"/>
+              <a:defRPr sz="1200" b="0" i="0">
+                <a:ln w="0">
+                  <a:noFill/>
+                  <a:prstDash val="solid"/>
+                </a:ln>
+                <a:solidFill>
+                  <a:srgbClr val="4D646B"/>
+                </a:solidFill>
+                <a:latin typeface="Calibri"/>
+                <a:ea typeface="Calibri"/>
+                <a:cs typeface="Calibri"/>
               </a:defRPr>
             </a:pPr>
             <a:r>
-              <a:rPr sz="1500" b="0" i="0">
-                <a:solidFill>
-                  <a:srgbClr val="47616D"/>
-                </a:solidFill>
-                <a:latin typeface="Arial"/>
-                <a:ea typeface="Arial"/>
-                <a:cs typeface="Arial"/>
+              <a:rPr sz="1200" b="0" i="0">
+                <a:ln w="0">
+                  <a:noFill/>
+                  <a:prstDash val="solid"/>
+                </a:ln>
+                <a:solidFill>
+                  <a:srgbClr val="4D646B"/>
+                </a:solidFill>
+                <a:latin typeface="Calibri"/>
+                <a:ea typeface="Calibri"/>
+                <a:cs typeface="Calibri"/>
               </a:rPr>
               <a:t>La canción relee el tesoro, la perla y la red desde cuatro ángulos</a:t>
             </a:r>
@@ -3808,23 +3824,31 @@
                 <a:spcPct val="100000"/>
               </a:lnSpc>
               <a:buNone/>
-              <a:defRPr sz="1050" b="0" i="0">
-                <a:solidFill>
-                  <a:srgbClr val="F0C766"/>
-                </a:solidFill>
-                <a:latin typeface="Arial"/>
-                <a:ea typeface="Arial"/>
-                <a:cs typeface="Arial"/>
+              <a:defRPr sz="975" b="1" i="0">
+                <a:ln w="0">
+                  <a:noFill/>
+                  <a:prstDash val="solid"/>
+                </a:ln>
+                <a:solidFill>
+                  <a:srgbClr val="D9A441"/>
+                </a:solidFill>
+                <a:latin typeface="Calibri"/>
+                <a:ea typeface="Calibri"/>
+                <a:cs typeface="Calibri"/>
               </a:defRPr>
             </a:pPr>
             <a:r>
-              <a:rPr sz="1050" b="0" i="0">
-                <a:solidFill>
-                  <a:srgbClr val="F0C766"/>
-                </a:solidFill>
-                <a:latin typeface="Arial"/>
-                <a:ea typeface="Arial"/>
-                <a:cs typeface="Arial"/>
+              <a:rPr sz="975" b="1" i="0">
+                <a:ln w="0">
+                  <a:noFill/>
+                  <a:prstDash val="solid"/>
+                </a:ln>
+                <a:solidFill>
+                  <a:srgbClr val="D9A441"/>
+                </a:solidFill>
+                <a:latin typeface="Calibri"/>
+                <a:ea typeface="Calibri"/>
+                <a:cs typeface="Calibri"/>
               </a:rPr>
               <a:t>01</a:t>
             </a:r>
@@ -3849,6 +3873,1837 @@
           <a:xfrm xmlns:a="http://schemas.openxmlformats.org/drawingml/2006/main">
             <a:off x="1219200" y="1552575"/>
             <a:ext cx="1619250" cy="285750"/>
+          </a:xfrm>
+          <a:prstGeom xmlns:a="http://schemas.openxmlformats.org/drawingml/2006/main" prst="rect">
+            <a:avLst/>
+          </a:prstGeom>
+          <a:noFill xmlns:a="http://schemas.openxmlformats.org/drawingml/2006/main"/>
+          <a:ln xmlns:a="http://schemas.openxmlformats.org/drawingml/2006/main" w="0">
+            <a:noFill/>
+            <a:prstDash val="solid"/>
+          </a:ln>
+        </p:spPr>
+        <p:txBody>
+          <a:bodyPr xmlns:a="http://schemas.openxmlformats.org/drawingml/2006/main" wrap="square" lIns="0" tIns="0" rIns="0" bIns="0" anchor="ctr">
+            <a:normAutofit fontScale="100000"/>
+          </a:bodyPr>
+          <a:lstStyle xmlns:a="http://schemas.openxmlformats.org/drawingml/2006/main"/>
+          <a:p xmlns:a="http://schemas.openxmlformats.org/drawingml/2006/main">
+            <a:pPr algn="l">
+              <a:lnSpc>
+                <a:spcPct val="100000"/>
+              </a:lnSpc>
+              <a:buNone/>
+              <a:defRPr sz="1200" b="1" i="0">
+                <a:ln w="0">
+                  <a:noFill/>
+                  <a:prstDash val="solid"/>
+                </a:ln>
+                <a:solidFill>
+                  <a:srgbClr val="F5E7C3"/>
+                </a:solidFill>
+                <a:latin typeface="Calibri"/>
+                <a:ea typeface="Calibri"/>
+                <a:cs typeface="Calibri"/>
+              </a:defRPr>
+            </a:pPr>
+            <a:r>
+              <a:rPr sz="1200" b="1" i="0">
+                <a:ln w="0">
+                  <a:noFill/>
+                  <a:prstDash val="solid"/>
+                </a:ln>
+                <a:solidFill>
+                  <a:srgbClr val="F5E7C3"/>
+                </a:solidFill>
+                <a:latin typeface="Calibri"/>
+                <a:ea typeface="Calibri"/>
+                <a:cs typeface="Calibri"/>
+              </a:rPr>
+              <a:t>Gen 28,16</a:t>
+            </a:r>
+          </a:p>
+        </p:txBody>
+      </p:sp>
+      <p:sp>
+        <p:nvSpPr>
+          <p:cNvPr id="7" name="card-top-rule-1">
+            <a:extLst xmlns:a="http://schemas.openxmlformats.org/drawingml/2006/main">
+              <a:ext uri="{FF2B5EF4-FFF2-40B4-BE49-F238E27FC236}">
+                <a16:creationId xmlns:a16="http://schemas.microsoft.com/office/drawing/2014/main" id="{AC709B0E-9261-4DE2-9D36-AC08D03C2809}"/>
+              </a:ext>
+            </a:extLst>
+          </p:cNvPr>
+          <p:cNvSpPr>
+            <a:spLocks xmlns:a="http://schemas.openxmlformats.org/drawingml/2006/main" noGrp="1"/>
+          </p:cNvSpPr>
+          <p:nvPr/>
+        </p:nvSpPr>
+        <p:spPr>
+          <a:xfrm xmlns:a="http://schemas.openxmlformats.org/drawingml/2006/main">
+            <a:off x="723900" y="1971675"/>
+            <a:ext cx="2152650" cy="9525"/>
+          </a:xfrm>
+          <a:prstGeom xmlns:a="http://schemas.openxmlformats.org/drawingml/2006/main" prst="rect">
+            <a:avLst/>
+          </a:prstGeom>
+          <a:solidFill xmlns:a="http://schemas.openxmlformats.org/drawingml/2006/main">
+            <a:srgbClr val="F5F0E7">
+              <a:alpha val="55000"/>
+            </a:srgbClr>
+          </a:solidFill>
+          <a:ln xmlns:a="http://schemas.openxmlformats.org/drawingml/2006/main" w="0">
+            <a:noFill/>
+            <a:prstDash val="solid"/>
+          </a:ln>
+        </p:spPr>
+      </p:sp>
+      <p:sp>
+        <p:nvSpPr>
+          <p:cNvPr id="8" name="card-title-1">
+            <a:extLst xmlns:a="http://schemas.openxmlformats.org/drawingml/2006/main">
+              <a:ext uri="{FF2B5EF4-FFF2-40B4-BE49-F238E27FC236}">
+                <a16:creationId xmlns:a16="http://schemas.microsoft.com/office/drawing/2014/main" id="{00C484C0-1A9F-47EF-90BE-2961BBBEE2F8}"/>
+              </a:ext>
+            </a:extLst>
+          </p:cNvPr>
+          <p:cNvSpPr>
+            <a:spLocks xmlns:a="http://schemas.openxmlformats.org/drawingml/2006/main" noGrp="1"/>
+          </p:cNvSpPr>
+          <p:nvPr/>
+        </p:nvSpPr>
+        <p:spPr>
+          <a:xfrm xmlns:a="http://schemas.openxmlformats.org/drawingml/2006/main">
+            <a:off x="723900" y="2133600"/>
+            <a:ext cx="2152650" cy="552450"/>
+          </a:xfrm>
+          <a:prstGeom xmlns:a="http://schemas.openxmlformats.org/drawingml/2006/main" prst="rect">
+            <a:avLst/>
+          </a:prstGeom>
+          <a:noFill xmlns:a="http://schemas.openxmlformats.org/drawingml/2006/main"/>
+          <a:ln xmlns:a="http://schemas.openxmlformats.org/drawingml/2006/main" w="0">
+            <a:noFill/>
+            <a:prstDash val="solid"/>
+          </a:ln>
+        </p:spPr>
+        <p:txBody>
+          <a:bodyPr xmlns:a="http://schemas.openxmlformats.org/drawingml/2006/main" wrap="square" lIns="0" tIns="0" rIns="0" bIns="0" anchor="ctr">
+            <a:normAutofit fontScale="100000"/>
+          </a:bodyPr>
+          <a:lstStyle xmlns:a="http://schemas.openxmlformats.org/drawingml/2006/main"/>
+          <a:p xmlns:a="http://schemas.openxmlformats.org/drawingml/2006/main">
+            <a:pPr algn="l">
+              <a:lnSpc>
+                <a:spcPct val="95000"/>
+              </a:lnSpc>
+              <a:buNone/>
+              <a:defRPr sz="1425" b="1" i="0">
+                <a:ln w="0">
+                  <a:noFill/>
+                  <a:prstDash val="solid"/>
+                </a:ln>
+                <a:solidFill>
+                  <a:srgbClr val="FFFFFF"/>
+                </a:solidFill>
+                <a:latin typeface="Calibri"/>
+                <a:ea typeface="Calibri"/>
+                <a:cs typeface="Calibri"/>
+              </a:defRPr>
+            </a:pPr>
+            <a:r>
+              <a:rPr sz="1425" b="1" i="0">
+                <a:ln w="0">
+                  <a:noFill/>
+                  <a:prstDash val="solid"/>
+                </a:ln>
+                <a:solidFill>
+                  <a:srgbClr val="FFFFFF"/>
+                </a:solidFill>
+                <a:latin typeface="Calibri"/>
+                <a:ea typeface="Calibri"/>
+                <a:cs typeface="Calibri"/>
+              </a:rPr>
+              <a:t>DIOS YA ESTABA AQUÍ</a:t>
+            </a:r>
+          </a:p>
+        </p:txBody>
+      </p:sp>
+      <p:sp>
+        <p:nvSpPr>
+          <p:cNvPr id="9" name="card-quote-1">
+            <a:extLst xmlns:a="http://schemas.openxmlformats.org/drawingml/2006/main">
+              <a:ext uri="{FF2B5EF4-FFF2-40B4-BE49-F238E27FC236}">
+                <a16:creationId xmlns:a16="http://schemas.microsoft.com/office/drawing/2014/main" id="{7FE1879D-45B3-47BA-A4D6-200C2E1952C1}"/>
+              </a:ext>
+            </a:extLst>
+          </p:cNvPr>
+          <p:cNvSpPr>
+            <a:spLocks xmlns:a="http://schemas.openxmlformats.org/drawingml/2006/main" noGrp="1"/>
+          </p:cNvSpPr>
+          <p:nvPr/>
+        </p:nvSpPr>
+        <p:spPr>
+          <a:xfrm xmlns:a="http://schemas.openxmlformats.org/drawingml/2006/main">
+            <a:off x="723900" y="2781300"/>
+            <a:ext cx="2152650" cy="914400"/>
+          </a:xfrm>
+          <a:prstGeom xmlns:a="http://schemas.openxmlformats.org/drawingml/2006/main" prst="rect">
+            <a:avLst/>
+          </a:prstGeom>
+          <a:noFill xmlns:a="http://schemas.openxmlformats.org/drawingml/2006/main"/>
+          <a:ln xmlns:a="http://schemas.openxmlformats.org/drawingml/2006/main" w="0">
+            <a:noFill/>
+            <a:prstDash val="solid"/>
+          </a:ln>
+        </p:spPr>
+        <p:txBody>
+          <a:bodyPr xmlns:a="http://schemas.openxmlformats.org/drawingml/2006/main" wrap="square" lIns="0" tIns="0" rIns="0" bIns="0" anchor="ctr">
+            <a:normAutofit fontScale="100000"/>
+          </a:bodyPr>
+          <a:lstStyle xmlns:a="http://schemas.openxmlformats.org/drawingml/2006/main"/>
+          <a:p xmlns:a="http://schemas.openxmlformats.org/drawingml/2006/main">
+            <a:pPr algn="l">
+              <a:lnSpc>
+                <a:spcPct val="106000"/>
+              </a:lnSpc>
+              <a:buNone/>
+              <a:defRPr sz="1350" b="1" i="0">
+                <a:ln w="0">
+                  <a:noFill/>
+                  <a:prstDash val="solid"/>
+                </a:ln>
+                <a:solidFill>
+                  <a:srgbClr val="F5E7C3"/>
+                </a:solidFill>
+                <a:latin typeface="Calibri"/>
+                <a:ea typeface="Calibri"/>
+                <a:cs typeface="Calibri"/>
+              </a:defRPr>
+            </a:pPr>
+            <a:r>
+              <a:rPr sz="1350" b="1" i="0">
+                <a:ln w="0">
+                  <a:noFill/>
+                  <a:prstDash val="solid"/>
+                </a:ln>
+                <a:solidFill>
+                  <a:srgbClr val="F5E7C3"/>
+                </a:solidFill>
+                <a:latin typeface="Calibri"/>
+                <a:ea typeface="Calibri"/>
+                <a:cs typeface="Calibri"/>
+              </a:rPr>
+              <a:t>«Realmente el Señor está en este lugar, y yo no lo sabía.»</a:t>
+            </a:r>
+          </a:p>
+        </p:txBody>
+      </p:sp>
+      <p:sp>
+        <p:nvSpPr>
+          <p:cNvPr id="10" name="card-accent-1">
+            <a:extLst xmlns:a="http://schemas.openxmlformats.org/drawingml/2006/main">
+              <a:ext uri="{FF2B5EF4-FFF2-40B4-BE49-F238E27FC236}">
+                <a16:creationId xmlns:a16="http://schemas.microsoft.com/office/drawing/2014/main" id="{7B21789F-EA51-402B-8D1F-0037D2C960C0}"/>
+              </a:ext>
+            </a:extLst>
+          </p:cNvPr>
+          <p:cNvSpPr>
+            <a:spLocks xmlns:a="http://schemas.openxmlformats.org/drawingml/2006/main" noGrp="1"/>
+          </p:cNvSpPr>
+          <p:nvPr/>
+        </p:nvSpPr>
+        <p:spPr>
+          <a:xfrm xmlns:a="http://schemas.openxmlformats.org/drawingml/2006/main">
+            <a:off x="723900" y="3838575"/>
+            <a:ext cx="552450" cy="28575"/>
+          </a:xfrm>
+          <a:prstGeom xmlns:a="http://schemas.openxmlformats.org/drawingml/2006/main" prst="rect">
+            <a:avLst/>
+          </a:prstGeom>
+          <a:solidFill xmlns:a="http://schemas.openxmlformats.org/drawingml/2006/main">
+            <a:srgbClr val="D9A43B"/>
+          </a:solidFill>
+          <a:ln xmlns:a="http://schemas.openxmlformats.org/drawingml/2006/main" w="0">
+            <a:noFill/>
+            <a:prstDash val="solid"/>
+          </a:ln>
+        </p:spPr>
+      </p:sp>
+      <p:sp>
+        <p:nvSpPr>
+          <p:cNvPr id="11" name="card-body-1">
+            <a:extLst xmlns:a="http://schemas.openxmlformats.org/drawingml/2006/main">
+              <a:ext uri="{FF2B5EF4-FFF2-40B4-BE49-F238E27FC236}">
+                <a16:creationId xmlns:a16="http://schemas.microsoft.com/office/drawing/2014/main" id="{8D077AAA-4F8D-4406-A3C3-E893634BE6A7}"/>
+              </a:ext>
+            </a:extLst>
+          </p:cNvPr>
+          <p:cNvSpPr>
+            <a:spLocks xmlns:a="http://schemas.openxmlformats.org/drawingml/2006/main" noGrp="1"/>
+          </p:cNvSpPr>
+          <p:nvPr/>
+        </p:nvSpPr>
+        <p:spPr>
+          <a:xfrm xmlns:a="http://schemas.openxmlformats.org/drawingml/2006/main">
+            <a:off x="723900" y="4038600"/>
+            <a:ext cx="2152650" cy="990600"/>
+          </a:xfrm>
+          <a:prstGeom xmlns:a="http://schemas.openxmlformats.org/drawingml/2006/main" prst="rect">
+            <a:avLst/>
+          </a:prstGeom>
+          <a:noFill xmlns:a="http://schemas.openxmlformats.org/drawingml/2006/main"/>
+          <a:ln xmlns:a="http://schemas.openxmlformats.org/drawingml/2006/main" w="0">
+            <a:noFill/>
+            <a:prstDash val="solid"/>
+          </a:ln>
+        </p:spPr>
+        <p:txBody>
+          <a:bodyPr xmlns:a="http://schemas.openxmlformats.org/drawingml/2006/main" wrap="square" lIns="0" tIns="0" rIns="0" bIns="0" anchor="ctr">
+            <a:normAutofit fontScale="100000"/>
+          </a:bodyPr>
+          <a:lstStyle xmlns:a="http://schemas.openxmlformats.org/drawingml/2006/main"/>
+          <a:p xmlns:a="http://schemas.openxmlformats.org/drawingml/2006/main">
+            <a:pPr algn="l">
+              <a:lnSpc>
+                <a:spcPct val="108000"/>
+              </a:lnSpc>
+              <a:buNone/>
+              <a:defRPr sz="1125" b="0" i="0">
+                <a:ln w="0">
+                  <a:noFill/>
+                  <a:prstDash val="solid"/>
+                </a:ln>
+                <a:solidFill>
+                  <a:srgbClr val="FFFFFF"/>
+                </a:solidFill>
+                <a:latin typeface="Calibri"/>
+                <a:ea typeface="Calibri"/>
+                <a:cs typeface="Calibri"/>
+              </a:defRPr>
+            </a:pPr>
+            <a:r>
+              <a:rPr sz="1125" b="0" i="0">
+                <a:ln w="0">
+                  <a:noFill/>
+                  <a:prstDash val="solid"/>
+                </a:ln>
+                <a:solidFill>
+                  <a:srgbClr val="FFFFFF"/>
+                </a:solidFill>
+                <a:latin typeface="Calibri"/>
+                <a:ea typeface="Calibri"/>
+                <a:cs typeface="Calibri"/>
+              </a:rPr>
+              <a:t>Jacob despierta a una presencia anterior a su comprensión. El lugar ordinario se vuelve casa de Dios.</a:t>
+            </a:r>
+          </a:p>
+        </p:txBody>
+      </p:sp>
+      <p:sp>
+        <p:nvSpPr>
+          <p:cNvPr id="12" name="card-2">
+            <a:extLst xmlns:a="http://schemas.openxmlformats.org/drawingml/2006/main">
+              <a:ext uri="{FF2B5EF4-FFF2-40B4-BE49-F238E27FC236}">
+                <a16:creationId xmlns:a16="http://schemas.microsoft.com/office/drawing/2014/main" id="{87EACBE5-66BE-4D3A-A3F6-C3C9B9B081CA}"/>
+              </a:ext>
+            </a:extLst>
+          </p:cNvPr>
+          <p:cNvSpPr>
+            <a:spLocks xmlns:a="http://schemas.openxmlformats.org/drawingml/2006/main" noGrp="1"/>
+          </p:cNvSpPr>
+          <p:nvPr/>
+        </p:nvSpPr>
+        <p:spPr>
+          <a:xfrm xmlns:a="http://schemas.openxmlformats.org/drawingml/2006/main">
+            <a:off x="3333750" y="1381125"/>
+            <a:ext cx="2533650" cy="3867150"/>
+          </a:xfrm>
+          <a:prstGeom xmlns:a="http://schemas.openxmlformats.org/drawingml/2006/main" prst="roundRect">
+            <a:avLst>
+              <a:gd name="adj" fmla="val 4511"/>
+            </a:avLst>
+          </a:prstGeom>
+          <a:solidFill xmlns:a="http://schemas.openxmlformats.org/drawingml/2006/main">
+            <a:srgbClr val="4E6B51"/>
+          </a:solidFill>
+          <a:ln xmlns:a="http://schemas.openxmlformats.org/drawingml/2006/main" w="9525">
+            <a:solidFill>
+              <a:srgbClr val="D9A43B"/>
+            </a:solidFill>
+            <a:prstDash val="solid"/>
+          </a:ln>
+        </p:spPr>
+      </p:sp>
+      <p:sp>
+        <p:nvSpPr>
+          <p:cNvPr id="13" name="card-index-2">
+            <a:extLst xmlns:a="http://schemas.openxmlformats.org/drawingml/2006/main">
+              <a:ext uri="{FF2B5EF4-FFF2-40B4-BE49-F238E27FC236}">
+                <a16:creationId xmlns:a16="http://schemas.microsoft.com/office/drawing/2014/main" id="{A9830822-7C0C-4A74-8926-9AD02A691C47}"/>
+              </a:ext>
+            </a:extLst>
+          </p:cNvPr>
+          <p:cNvSpPr>
+            <a:spLocks xmlns:a="http://schemas.openxmlformats.org/drawingml/2006/main" noGrp="1"/>
+          </p:cNvSpPr>
+          <p:nvPr/>
+        </p:nvSpPr>
+        <p:spPr>
+          <a:xfrm xmlns:a="http://schemas.openxmlformats.org/drawingml/2006/main">
+            <a:off x="3524250" y="1571625"/>
+            <a:ext cx="400050" cy="266700"/>
+          </a:xfrm>
+          <a:prstGeom xmlns:a="http://schemas.openxmlformats.org/drawingml/2006/main" prst="rect">
+            <a:avLst/>
+          </a:prstGeom>
+          <a:noFill xmlns:a="http://schemas.openxmlformats.org/drawingml/2006/main"/>
+          <a:ln xmlns:a="http://schemas.openxmlformats.org/drawingml/2006/main" w="0">
+            <a:noFill/>
+            <a:prstDash val="solid"/>
+          </a:ln>
+        </p:spPr>
+        <p:txBody>
+          <a:bodyPr xmlns:a="http://schemas.openxmlformats.org/drawingml/2006/main" wrap="square" lIns="0" tIns="0" rIns="0" bIns="0" anchor="ctr">
+            <a:normAutofit fontScale="100000"/>
+          </a:bodyPr>
+          <a:lstStyle xmlns:a="http://schemas.openxmlformats.org/drawingml/2006/main"/>
+          <a:p xmlns:a="http://schemas.openxmlformats.org/drawingml/2006/main">
+            <a:pPr algn="l">
+              <a:lnSpc>
+                <a:spcPct val="100000"/>
+              </a:lnSpc>
+              <a:buNone/>
+              <a:defRPr sz="975" b="1" i="0">
+                <a:ln w="0">
+                  <a:noFill/>
+                  <a:prstDash val="solid"/>
+                </a:ln>
+                <a:solidFill>
+                  <a:srgbClr val="D9A441"/>
+                </a:solidFill>
+                <a:latin typeface="Calibri"/>
+                <a:ea typeface="Calibri"/>
+                <a:cs typeface="Calibri"/>
+              </a:defRPr>
+            </a:pPr>
+            <a:r>
+              <a:rPr sz="975" b="1" i="0">
+                <a:ln w="0">
+                  <a:noFill/>
+                  <a:prstDash val="solid"/>
+                </a:ln>
+                <a:solidFill>
+                  <a:srgbClr val="D9A441"/>
+                </a:solidFill>
+                <a:latin typeface="Calibri"/>
+                <a:ea typeface="Calibri"/>
+                <a:cs typeface="Calibri"/>
+              </a:rPr>
+              <a:t>02</a:t>
+            </a:r>
+          </a:p>
+        </p:txBody>
+      </p:sp>
+      <p:sp>
+        <p:nvSpPr>
+          <p:cNvPr id="14" name="card-ref-2">
+            <a:extLst xmlns:a="http://schemas.openxmlformats.org/drawingml/2006/main">
+              <a:ext uri="{FF2B5EF4-FFF2-40B4-BE49-F238E27FC236}">
+                <a16:creationId xmlns:a16="http://schemas.microsoft.com/office/drawing/2014/main" id="{D65846AA-D30F-410B-9EC6-56E8CDD34AA9}"/>
+              </a:ext>
+            </a:extLst>
+          </p:cNvPr>
+          <p:cNvSpPr>
+            <a:spLocks xmlns:a="http://schemas.openxmlformats.org/drawingml/2006/main" noGrp="1"/>
+          </p:cNvSpPr>
+          <p:nvPr/>
+        </p:nvSpPr>
+        <p:spPr>
+          <a:xfrm xmlns:a="http://schemas.openxmlformats.org/drawingml/2006/main">
+            <a:off x="4019550" y="1552575"/>
+            <a:ext cx="1619250" cy="285750"/>
+          </a:xfrm>
+          <a:prstGeom xmlns:a="http://schemas.openxmlformats.org/drawingml/2006/main" prst="rect">
+            <a:avLst/>
+          </a:prstGeom>
+          <a:noFill xmlns:a="http://schemas.openxmlformats.org/drawingml/2006/main"/>
+          <a:ln xmlns:a="http://schemas.openxmlformats.org/drawingml/2006/main" w="0">
+            <a:noFill/>
+            <a:prstDash val="solid"/>
+          </a:ln>
+        </p:spPr>
+        <p:txBody>
+          <a:bodyPr xmlns:a="http://schemas.openxmlformats.org/drawingml/2006/main" wrap="square" lIns="0" tIns="0" rIns="0" bIns="0" anchor="ctr">
+            <a:normAutofit fontScale="100000"/>
+          </a:bodyPr>
+          <a:lstStyle xmlns:a="http://schemas.openxmlformats.org/drawingml/2006/main"/>
+          <a:p xmlns:a="http://schemas.openxmlformats.org/drawingml/2006/main">
+            <a:pPr algn="l">
+              <a:lnSpc>
+                <a:spcPct val="100000"/>
+              </a:lnSpc>
+              <a:buNone/>
+              <a:defRPr sz="1200" b="1" i="0">
+                <a:ln w="0">
+                  <a:noFill/>
+                  <a:prstDash val="solid"/>
+                </a:ln>
+                <a:solidFill>
+                  <a:srgbClr val="F5E7C3"/>
+                </a:solidFill>
+                <a:latin typeface="Calibri"/>
+                <a:ea typeface="Calibri"/>
+                <a:cs typeface="Calibri"/>
+              </a:defRPr>
+            </a:pPr>
+            <a:r>
+              <a:rPr sz="1200" b="1" i="0">
+                <a:ln w="0">
+                  <a:noFill/>
+                  <a:prstDash val="solid"/>
+                </a:ln>
+                <a:solidFill>
+                  <a:srgbClr val="F5E7C3"/>
+                </a:solidFill>
+                <a:latin typeface="Calibri"/>
+                <a:ea typeface="Calibri"/>
+                <a:cs typeface="Calibri"/>
+              </a:rPr>
+              <a:t>Sab 7,8–9</a:t>
+            </a:r>
+          </a:p>
+        </p:txBody>
+      </p:sp>
+      <p:sp>
+        <p:nvSpPr>
+          <p:cNvPr id="15" name="card-top-rule-2">
+            <a:extLst xmlns:a="http://schemas.openxmlformats.org/drawingml/2006/main">
+              <a:ext uri="{FF2B5EF4-FFF2-40B4-BE49-F238E27FC236}">
+                <a16:creationId xmlns:a16="http://schemas.microsoft.com/office/drawing/2014/main" id="{E9E8B8FF-A149-491D-A936-E4A715C1CE28}"/>
+              </a:ext>
+            </a:extLst>
+          </p:cNvPr>
+          <p:cNvSpPr>
+            <a:spLocks xmlns:a="http://schemas.openxmlformats.org/drawingml/2006/main" noGrp="1"/>
+          </p:cNvSpPr>
+          <p:nvPr/>
+        </p:nvSpPr>
+        <p:spPr>
+          <a:xfrm xmlns:a="http://schemas.openxmlformats.org/drawingml/2006/main">
+            <a:off x="3524250" y="1971675"/>
+            <a:ext cx="2152650" cy="9525"/>
+          </a:xfrm>
+          <a:prstGeom xmlns:a="http://schemas.openxmlformats.org/drawingml/2006/main" prst="rect">
+            <a:avLst/>
+          </a:prstGeom>
+          <a:solidFill xmlns:a="http://schemas.openxmlformats.org/drawingml/2006/main">
+            <a:srgbClr val="F5F0E7">
+              <a:alpha val="55000"/>
+            </a:srgbClr>
+          </a:solidFill>
+          <a:ln xmlns:a="http://schemas.openxmlformats.org/drawingml/2006/main" w="0">
+            <a:noFill/>
+            <a:prstDash val="solid"/>
+          </a:ln>
+        </p:spPr>
+      </p:sp>
+      <p:sp>
+        <p:nvSpPr>
+          <p:cNvPr id="16" name="card-title-2">
+            <a:extLst xmlns:a="http://schemas.openxmlformats.org/drawingml/2006/main">
+              <a:ext uri="{FF2B5EF4-FFF2-40B4-BE49-F238E27FC236}">
+                <a16:creationId xmlns:a16="http://schemas.microsoft.com/office/drawing/2014/main" id="{81E24E46-89A1-4D21-8902-8C0B464B3C95}"/>
+              </a:ext>
+            </a:extLst>
+          </p:cNvPr>
+          <p:cNvSpPr>
+            <a:spLocks xmlns:a="http://schemas.openxmlformats.org/drawingml/2006/main" noGrp="1"/>
+          </p:cNvSpPr>
+          <p:nvPr/>
+        </p:nvSpPr>
+        <p:spPr>
+          <a:xfrm xmlns:a="http://schemas.openxmlformats.org/drawingml/2006/main">
+            <a:off x="3524250" y="2133600"/>
+            <a:ext cx="2152650" cy="552450"/>
+          </a:xfrm>
+          <a:prstGeom xmlns:a="http://schemas.openxmlformats.org/drawingml/2006/main" prst="rect">
+            <a:avLst/>
+          </a:prstGeom>
+          <a:noFill xmlns:a="http://schemas.openxmlformats.org/drawingml/2006/main"/>
+          <a:ln xmlns:a="http://schemas.openxmlformats.org/drawingml/2006/main" w="0">
+            <a:noFill/>
+            <a:prstDash val="solid"/>
+          </a:ln>
+        </p:spPr>
+        <p:txBody>
+          <a:bodyPr xmlns:a="http://schemas.openxmlformats.org/drawingml/2006/main" wrap="square" lIns="0" tIns="0" rIns="0" bIns="0" anchor="ctr">
+            <a:normAutofit fontScale="100000"/>
+          </a:bodyPr>
+          <a:lstStyle xmlns:a="http://schemas.openxmlformats.org/drawingml/2006/main"/>
+          <a:p xmlns:a="http://schemas.openxmlformats.org/drawingml/2006/main">
+            <a:pPr algn="l">
+              <a:lnSpc>
+                <a:spcPct val="95000"/>
+              </a:lnSpc>
+              <a:buNone/>
+              <a:defRPr sz="1425" b="1" i="0">
+                <a:ln w="0">
+                  <a:noFill/>
+                  <a:prstDash val="solid"/>
+                </a:ln>
+                <a:solidFill>
+                  <a:srgbClr val="FFFFFF"/>
+                </a:solidFill>
+                <a:latin typeface="Calibri"/>
+                <a:ea typeface="Calibri"/>
+                <a:cs typeface="Calibri"/>
+              </a:defRPr>
+            </a:pPr>
+            <a:r>
+              <a:rPr sz="1425" b="1" i="0">
+                <a:ln w="0">
+                  <a:noFill/>
+                  <a:prstDash val="solid"/>
+                </a:ln>
+                <a:solidFill>
+                  <a:srgbClr val="FFFFFF"/>
+                </a:solidFill>
+                <a:latin typeface="Calibri"/>
+                <a:ea typeface="Calibri"/>
+                <a:cs typeface="Calibri"/>
+              </a:rPr>
+              <a:t>VALE MÁS</a:t>
+            </a:r>
+          </a:p>
+        </p:txBody>
+      </p:sp>
+      <p:sp>
+        <p:nvSpPr>
+          <p:cNvPr id="17" name="card-quote-2">
+            <a:extLst xmlns:a="http://schemas.openxmlformats.org/drawingml/2006/main">
+              <a:ext uri="{FF2B5EF4-FFF2-40B4-BE49-F238E27FC236}">
+                <a16:creationId xmlns:a16="http://schemas.microsoft.com/office/drawing/2014/main" id="{49854250-C4AD-4B42-B0D7-0CEFD06C8144}"/>
+              </a:ext>
+            </a:extLst>
+          </p:cNvPr>
+          <p:cNvSpPr>
+            <a:spLocks xmlns:a="http://schemas.openxmlformats.org/drawingml/2006/main" noGrp="1"/>
+          </p:cNvSpPr>
+          <p:nvPr/>
+        </p:nvSpPr>
+        <p:spPr>
+          <a:xfrm xmlns:a="http://schemas.openxmlformats.org/drawingml/2006/main">
+            <a:off x="3524250" y="2781300"/>
+            <a:ext cx="2152650" cy="914400"/>
+          </a:xfrm>
+          <a:prstGeom xmlns:a="http://schemas.openxmlformats.org/drawingml/2006/main" prst="rect">
+            <a:avLst/>
+          </a:prstGeom>
+          <a:noFill xmlns:a="http://schemas.openxmlformats.org/drawingml/2006/main"/>
+          <a:ln xmlns:a="http://schemas.openxmlformats.org/drawingml/2006/main" w="0">
+            <a:noFill/>
+            <a:prstDash val="solid"/>
+          </a:ln>
+        </p:spPr>
+        <p:txBody>
+          <a:bodyPr xmlns:a="http://schemas.openxmlformats.org/drawingml/2006/main" wrap="square" lIns="0" tIns="0" rIns="0" bIns="0" anchor="ctr">
+            <a:normAutofit fontScale="100000"/>
+          </a:bodyPr>
+          <a:lstStyle xmlns:a="http://schemas.openxmlformats.org/drawingml/2006/main"/>
+          <a:p xmlns:a="http://schemas.openxmlformats.org/drawingml/2006/main">
+            <a:pPr algn="l">
+              <a:lnSpc>
+                <a:spcPct val="106000"/>
+              </a:lnSpc>
+              <a:buNone/>
+              <a:defRPr sz="1350" b="1" i="0">
+                <a:ln w="0">
+                  <a:noFill/>
+                  <a:prstDash val="solid"/>
+                </a:ln>
+                <a:solidFill>
+                  <a:srgbClr val="F5E7C3"/>
+                </a:solidFill>
+                <a:latin typeface="Calibri"/>
+                <a:ea typeface="Calibri"/>
+                <a:cs typeface="Calibri"/>
+              </a:defRPr>
+            </a:pPr>
+            <a:r>
+              <a:rPr sz="1350" b="1" i="0">
+                <a:ln w="0">
+                  <a:noFill/>
+                  <a:prstDash val="solid"/>
+                </a:ln>
+                <a:solidFill>
+                  <a:srgbClr val="F5E7C3"/>
+                </a:solidFill>
+                <a:latin typeface="Calibri"/>
+                <a:ea typeface="Calibri"/>
+                <a:cs typeface="Calibri"/>
+              </a:rPr>
+              <a:t>«No la comparé con la piedra más preciosa.»</a:t>
+            </a:r>
+          </a:p>
+        </p:txBody>
+      </p:sp>
+      <p:sp>
+        <p:nvSpPr>
+          <p:cNvPr id="18" name="card-accent-2">
+            <a:extLst xmlns:a="http://schemas.openxmlformats.org/drawingml/2006/main">
+              <a:ext uri="{FF2B5EF4-FFF2-40B4-BE49-F238E27FC236}">
+                <a16:creationId xmlns:a16="http://schemas.microsoft.com/office/drawing/2014/main" id="{76662847-F0F9-45E0-B373-25F04D868839}"/>
+              </a:ext>
+            </a:extLst>
+          </p:cNvPr>
+          <p:cNvSpPr>
+            <a:spLocks xmlns:a="http://schemas.openxmlformats.org/drawingml/2006/main" noGrp="1"/>
+          </p:cNvSpPr>
+          <p:nvPr/>
+        </p:nvSpPr>
+        <p:spPr>
+          <a:xfrm xmlns:a="http://schemas.openxmlformats.org/drawingml/2006/main">
+            <a:off x="3524250" y="3838575"/>
+            <a:ext cx="552450" cy="28575"/>
+          </a:xfrm>
+          <a:prstGeom xmlns:a="http://schemas.openxmlformats.org/drawingml/2006/main" prst="rect">
+            <a:avLst/>
+          </a:prstGeom>
+          <a:solidFill xmlns:a="http://schemas.openxmlformats.org/drawingml/2006/main">
+            <a:srgbClr val="D9A43B"/>
+          </a:solidFill>
+          <a:ln xmlns:a="http://schemas.openxmlformats.org/drawingml/2006/main" w="0">
+            <a:noFill/>
+            <a:prstDash val="solid"/>
+          </a:ln>
+        </p:spPr>
+      </p:sp>
+      <p:sp>
+        <p:nvSpPr>
+          <p:cNvPr id="19" name="card-body-2">
+            <a:extLst xmlns:a="http://schemas.openxmlformats.org/drawingml/2006/main">
+              <a:ext uri="{FF2B5EF4-FFF2-40B4-BE49-F238E27FC236}">
+                <a16:creationId xmlns:a16="http://schemas.microsoft.com/office/drawing/2014/main" id="{471DAA44-9198-4DA5-8F91-7CA857C5F2AC}"/>
+              </a:ext>
+            </a:extLst>
+          </p:cNvPr>
+          <p:cNvSpPr>
+            <a:spLocks xmlns:a="http://schemas.openxmlformats.org/drawingml/2006/main" noGrp="1"/>
+          </p:cNvSpPr>
+          <p:nvPr/>
+        </p:nvSpPr>
+        <p:spPr>
+          <a:xfrm xmlns:a="http://schemas.openxmlformats.org/drawingml/2006/main">
+            <a:off x="3524250" y="4038600"/>
+            <a:ext cx="2152650" cy="990600"/>
+          </a:xfrm>
+          <a:prstGeom xmlns:a="http://schemas.openxmlformats.org/drawingml/2006/main" prst="rect">
+            <a:avLst/>
+          </a:prstGeom>
+          <a:noFill xmlns:a="http://schemas.openxmlformats.org/drawingml/2006/main"/>
+          <a:ln xmlns:a="http://schemas.openxmlformats.org/drawingml/2006/main" w="0">
+            <a:noFill/>
+            <a:prstDash val="solid"/>
+          </a:ln>
+        </p:spPr>
+        <p:txBody>
+          <a:bodyPr xmlns:a="http://schemas.openxmlformats.org/drawingml/2006/main" wrap="square" lIns="0" tIns="0" rIns="0" bIns="0" anchor="ctr">
+            <a:normAutofit fontScale="100000"/>
+          </a:bodyPr>
+          <a:lstStyle xmlns:a="http://schemas.openxmlformats.org/drawingml/2006/main"/>
+          <a:p xmlns:a="http://schemas.openxmlformats.org/drawingml/2006/main">
+            <a:pPr algn="l">
+              <a:lnSpc>
+                <a:spcPct val="108000"/>
+              </a:lnSpc>
+              <a:buNone/>
+              <a:defRPr sz="1125" b="0" i="0">
+                <a:ln w="0">
+                  <a:noFill/>
+                  <a:prstDash val="solid"/>
+                </a:ln>
+                <a:solidFill>
+                  <a:srgbClr val="FFFFFF"/>
+                </a:solidFill>
+                <a:latin typeface="Calibri"/>
+                <a:ea typeface="Calibri"/>
+                <a:cs typeface="Calibri"/>
+              </a:defRPr>
+            </a:pPr>
+            <a:r>
+              <a:rPr sz="1125" b="0" i="0">
+                <a:ln w="0">
+                  <a:noFill/>
+                  <a:prstDash val="solid"/>
+                </a:ln>
+                <a:solidFill>
+                  <a:srgbClr val="FFFFFF"/>
+                </a:solidFill>
+                <a:latin typeface="Calibri"/>
+                <a:ea typeface="Calibri"/>
+                <a:cs typeface="Calibri"/>
+              </a:rPr>
+              <a:t>La sabiduría educa el deseo: lo valioso no siempre es lo más visible ni inmediato.</a:t>
+            </a:r>
+          </a:p>
+        </p:txBody>
+      </p:sp>
+      <p:sp>
+        <p:nvSpPr>
+          <p:cNvPr id="20" name="card-3">
+            <a:extLst xmlns:a="http://schemas.openxmlformats.org/drawingml/2006/main">
+              <a:ext uri="{FF2B5EF4-FFF2-40B4-BE49-F238E27FC236}">
+                <a16:creationId xmlns:a16="http://schemas.microsoft.com/office/drawing/2014/main" id="{EC908063-8997-448E-865B-DF7E86E64C50}"/>
+              </a:ext>
+            </a:extLst>
+          </p:cNvPr>
+          <p:cNvSpPr>
+            <a:spLocks xmlns:a="http://schemas.openxmlformats.org/drawingml/2006/main" noGrp="1"/>
+          </p:cNvSpPr>
+          <p:nvPr/>
+        </p:nvSpPr>
+        <p:spPr>
+          <a:xfrm xmlns:a="http://schemas.openxmlformats.org/drawingml/2006/main">
+            <a:off x="6134100" y="1381125"/>
+            <a:ext cx="2533650" cy="3867150"/>
+          </a:xfrm>
+          <a:prstGeom xmlns:a="http://schemas.openxmlformats.org/drawingml/2006/main" prst="roundRect">
+            <a:avLst>
+              <a:gd name="adj" fmla="val 4511"/>
+            </a:avLst>
+          </a:prstGeom>
+          <a:solidFill xmlns:a="http://schemas.openxmlformats.org/drawingml/2006/main">
+            <a:srgbClr val="8A6048"/>
+          </a:solidFill>
+          <a:ln xmlns:a="http://schemas.openxmlformats.org/drawingml/2006/main" w="9525">
+            <a:solidFill>
+              <a:srgbClr val="D9A43B"/>
+            </a:solidFill>
+            <a:prstDash val="solid"/>
+          </a:ln>
+        </p:spPr>
+      </p:sp>
+      <p:sp>
+        <p:nvSpPr>
+          <p:cNvPr id="21" name="card-index-3">
+            <a:extLst xmlns:a="http://schemas.openxmlformats.org/drawingml/2006/main">
+              <a:ext uri="{FF2B5EF4-FFF2-40B4-BE49-F238E27FC236}">
+                <a16:creationId xmlns:a16="http://schemas.microsoft.com/office/drawing/2014/main" id="{DA5E7A52-1E2D-4D8D-AF57-59364C35B285}"/>
+              </a:ext>
+            </a:extLst>
+          </p:cNvPr>
+          <p:cNvSpPr>
+            <a:spLocks xmlns:a="http://schemas.openxmlformats.org/drawingml/2006/main" noGrp="1"/>
+          </p:cNvSpPr>
+          <p:nvPr/>
+        </p:nvSpPr>
+        <p:spPr>
+          <a:xfrm xmlns:a="http://schemas.openxmlformats.org/drawingml/2006/main">
+            <a:off x="6324600" y="1571625"/>
+            <a:ext cx="400050" cy="266700"/>
+          </a:xfrm>
+          <a:prstGeom xmlns:a="http://schemas.openxmlformats.org/drawingml/2006/main" prst="rect">
+            <a:avLst/>
+          </a:prstGeom>
+          <a:noFill xmlns:a="http://schemas.openxmlformats.org/drawingml/2006/main"/>
+          <a:ln xmlns:a="http://schemas.openxmlformats.org/drawingml/2006/main" w="0">
+            <a:noFill/>
+            <a:prstDash val="solid"/>
+          </a:ln>
+        </p:spPr>
+        <p:txBody>
+          <a:bodyPr xmlns:a="http://schemas.openxmlformats.org/drawingml/2006/main" wrap="square" lIns="0" tIns="0" rIns="0" bIns="0" anchor="ctr">
+            <a:normAutofit fontScale="100000"/>
+          </a:bodyPr>
+          <a:lstStyle xmlns:a="http://schemas.openxmlformats.org/drawingml/2006/main"/>
+          <a:p xmlns:a="http://schemas.openxmlformats.org/drawingml/2006/main">
+            <a:pPr algn="l">
+              <a:lnSpc>
+                <a:spcPct val="100000"/>
+              </a:lnSpc>
+              <a:buNone/>
+              <a:defRPr sz="975" b="1" i="0">
+                <a:ln w="0">
+                  <a:noFill/>
+                  <a:prstDash val="solid"/>
+                </a:ln>
+                <a:solidFill>
+                  <a:srgbClr val="D9A441"/>
+                </a:solidFill>
+                <a:latin typeface="Calibri"/>
+                <a:ea typeface="Calibri"/>
+                <a:cs typeface="Calibri"/>
+              </a:defRPr>
+            </a:pPr>
+            <a:r>
+              <a:rPr sz="975" b="1" i="0">
+                <a:ln w="0">
+                  <a:noFill/>
+                  <a:prstDash val="solid"/>
+                </a:ln>
+                <a:solidFill>
+                  <a:srgbClr val="D9A441"/>
+                </a:solidFill>
+                <a:latin typeface="Calibri"/>
+                <a:ea typeface="Calibri"/>
+                <a:cs typeface="Calibri"/>
+              </a:rPr>
+              <a:t>03</a:t>
+            </a:r>
+          </a:p>
+        </p:txBody>
+      </p:sp>
+      <p:sp>
+        <p:nvSpPr>
+          <p:cNvPr id="22" name="card-ref-3">
+            <a:extLst xmlns:a="http://schemas.openxmlformats.org/drawingml/2006/main">
+              <a:ext uri="{FF2B5EF4-FFF2-40B4-BE49-F238E27FC236}">
+                <a16:creationId xmlns:a16="http://schemas.microsoft.com/office/drawing/2014/main" id="{3E620FCF-37E4-4D12-804B-76EBCE15FB31}"/>
+              </a:ext>
+            </a:extLst>
+          </p:cNvPr>
+          <p:cNvSpPr>
+            <a:spLocks xmlns:a="http://schemas.openxmlformats.org/drawingml/2006/main" noGrp="1"/>
+          </p:cNvSpPr>
+          <p:nvPr/>
+        </p:nvSpPr>
+        <p:spPr>
+          <a:xfrm xmlns:a="http://schemas.openxmlformats.org/drawingml/2006/main">
+            <a:off x="6819900" y="1552575"/>
+            <a:ext cx="1619250" cy="285750"/>
+          </a:xfrm>
+          <a:prstGeom xmlns:a="http://schemas.openxmlformats.org/drawingml/2006/main" prst="rect">
+            <a:avLst/>
+          </a:prstGeom>
+          <a:noFill xmlns:a="http://schemas.openxmlformats.org/drawingml/2006/main"/>
+          <a:ln xmlns:a="http://schemas.openxmlformats.org/drawingml/2006/main" w="0">
+            <a:noFill/>
+            <a:prstDash val="solid"/>
+          </a:ln>
+        </p:spPr>
+        <p:txBody>
+          <a:bodyPr xmlns:a="http://schemas.openxmlformats.org/drawingml/2006/main" wrap="square" lIns="0" tIns="0" rIns="0" bIns="0" anchor="ctr">
+            <a:normAutofit fontScale="100000"/>
+          </a:bodyPr>
+          <a:lstStyle xmlns:a="http://schemas.openxmlformats.org/drawingml/2006/main"/>
+          <a:p xmlns:a="http://schemas.openxmlformats.org/drawingml/2006/main">
+            <a:pPr algn="l">
+              <a:lnSpc>
+                <a:spcPct val="100000"/>
+              </a:lnSpc>
+              <a:buNone/>
+              <a:defRPr sz="1200" b="1" i="0">
+                <a:ln w="0">
+                  <a:noFill/>
+                  <a:prstDash val="solid"/>
+                </a:ln>
+                <a:solidFill>
+                  <a:srgbClr val="F5E7C3"/>
+                </a:solidFill>
+                <a:latin typeface="Calibri"/>
+                <a:ea typeface="Calibri"/>
+                <a:cs typeface="Calibri"/>
+              </a:defRPr>
+            </a:pPr>
+            <a:r>
+              <a:rPr sz="1200" b="1" i="0">
+                <a:ln w="0">
+                  <a:noFill/>
+                  <a:prstDash val="solid"/>
+                </a:ln>
+                <a:solidFill>
+                  <a:srgbClr val="F5E7C3"/>
+                </a:solidFill>
+                <a:latin typeface="Calibri"/>
+                <a:ea typeface="Calibri"/>
+                <a:cs typeface="Calibri"/>
+              </a:rPr>
+              <a:t>Lc 24,31–32</a:t>
+            </a:r>
+          </a:p>
+        </p:txBody>
+      </p:sp>
+      <p:sp>
+        <p:nvSpPr>
+          <p:cNvPr id="23" name="card-top-rule-3">
+            <a:extLst xmlns:a="http://schemas.openxmlformats.org/drawingml/2006/main">
+              <a:ext uri="{FF2B5EF4-FFF2-40B4-BE49-F238E27FC236}">
+                <a16:creationId xmlns:a16="http://schemas.microsoft.com/office/drawing/2014/main" id="{5BDABD18-DE7B-414E-866D-52681E2E9618}"/>
+              </a:ext>
+            </a:extLst>
+          </p:cNvPr>
+          <p:cNvSpPr>
+            <a:spLocks xmlns:a="http://schemas.openxmlformats.org/drawingml/2006/main" noGrp="1"/>
+          </p:cNvSpPr>
+          <p:nvPr/>
+        </p:nvSpPr>
+        <p:spPr>
+          <a:xfrm xmlns:a="http://schemas.openxmlformats.org/drawingml/2006/main">
+            <a:off x="6324600" y="1971675"/>
+            <a:ext cx="2152650" cy="9525"/>
+          </a:xfrm>
+          <a:prstGeom xmlns:a="http://schemas.openxmlformats.org/drawingml/2006/main" prst="rect">
+            <a:avLst/>
+          </a:prstGeom>
+          <a:solidFill xmlns:a="http://schemas.openxmlformats.org/drawingml/2006/main">
+            <a:srgbClr val="F5F0E7">
+              <a:alpha val="55000"/>
+            </a:srgbClr>
+          </a:solidFill>
+          <a:ln xmlns:a="http://schemas.openxmlformats.org/drawingml/2006/main" w="0">
+            <a:noFill/>
+            <a:prstDash val="solid"/>
+          </a:ln>
+        </p:spPr>
+      </p:sp>
+      <p:sp>
+        <p:nvSpPr>
+          <p:cNvPr id="24" name="card-title-3">
+            <a:extLst xmlns:a="http://schemas.openxmlformats.org/drawingml/2006/main">
+              <a:ext uri="{FF2B5EF4-FFF2-40B4-BE49-F238E27FC236}">
+                <a16:creationId xmlns:a16="http://schemas.microsoft.com/office/drawing/2014/main" id="{9FB0E149-AE58-4BDE-AC38-FF3C7BA95835}"/>
+              </a:ext>
+            </a:extLst>
+          </p:cNvPr>
+          <p:cNvSpPr>
+            <a:spLocks xmlns:a="http://schemas.openxmlformats.org/drawingml/2006/main" noGrp="1"/>
+          </p:cNvSpPr>
+          <p:nvPr/>
+        </p:nvSpPr>
+        <p:spPr>
+          <a:xfrm xmlns:a="http://schemas.openxmlformats.org/drawingml/2006/main">
+            <a:off x="6324600" y="2133600"/>
+            <a:ext cx="2152650" cy="552450"/>
+          </a:xfrm>
+          <a:prstGeom xmlns:a="http://schemas.openxmlformats.org/drawingml/2006/main" prst="rect">
+            <a:avLst/>
+          </a:prstGeom>
+          <a:noFill xmlns:a="http://schemas.openxmlformats.org/drawingml/2006/main"/>
+          <a:ln xmlns:a="http://schemas.openxmlformats.org/drawingml/2006/main" w="0">
+            <a:noFill/>
+            <a:prstDash val="solid"/>
+          </a:ln>
+        </p:spPr>
+        <p:txBody>
+          <a:bodyPr xmlns:a="http://schemas.openxmlformats.org/drawingml/2006/main" wrap="square" lIns="0" tIns="0" rIns="0" bIns="0" anchor="ctr">
+            <a:normAutofit fontScale="100000"/>
+          </a:bodyPr>
+          <a:lstStyle xmlns:a="http://schemas.openxmlformats.org/drawingml/2006/main"/>
+          <a:p xmlns:a="http://schemas.openxmlformats.org/drawingml/2006/main">
+            <a:pPr algn="l">
+              <a:lnSpc>
+                <a:spcPct val="95000"/>
+              </a:lnSpc>
+              <a:buNone/>
+              <a:defRPr sz="1425" b="1" i="0">
+                <a:ln w="0">
+                  <a:noFill/>
+                  <a:prstDash val="solid"/>
+                </a:ln>
+                <a:solidFill>
+                  <a:srgbClr val="FFFFFF"/>
+                </a:solidFill>
+                <a:latin typeface="Calibri"/>
+                <a:ea typeface="Calibri"/>
+                <a:cs typeface="Calibri"/>
+              </a:defRPr>
+            </a:pPr>
+            <a:r>
+              <a:rPr sz="1425" b="1" i="0">
+                <a:ln w="0">
+                  <a:noFill/>
+                  <a:prstDash val="solid"/>
+                </a:ln>
+                <a:solidFill>
+                  <a:srgbClr val="FFFFFF"/>
+                </a:solidFill>
+                <a:latin typeface="Calibri"/>
+                <a:ea typeface="Calibri"/>
+                <a:cs typeface="Calibri"/>
+              </a:rPr>
+              <a:t>SE ABREN LOS OJOS</a:t>
+            </a:r>
+          </a:p>
+        </p:txBody>
+      </p:sp>
+      <p:sp>
+        <p:nvSpPr>
+          <p:cNvPr id="25" name="card-quote-3">
+            <a:extLst xmlns:a="http://schemas.openxmlformats.org/drawingml/2006/main">
+              <a:ext uri="{FF2B5EF4-FFF2-40B4-BE49-F238E27FC236}">
+                <a16:creationId xmlns:a16="http://schemas.microsoft.com/office/drawing/2014/main" id="{D70A724B-E0B1-4613-9BA6-928283F316A6}"/>
+              </a:ext>
+            </a:extLst>
+          </p:cNvPr>
+          <p:cNvSpPr>
+            <a:spLocks xmlns:a="http://schemas.openxmlformats.org/drawingml/2006/main" noGrp="1"/>
+          </p:cNvSpPr>
+          <p:nvPr/>
+        </p:nvSpPr>
+        <p:spPr>
+          <a:xfrm xmlns:a="http://schemas.openxmlformats.org/drawingml/2006/main">
+            <a:off x="6324600" y="2781300"/>
+            <a:ext cx="2152650" cy="914400"/>
+          </a:xfrm>
+          <a:prstGeom xmlns:a="http://schemas.openxmlformats.org/drawingml/2006/main" prst="rect">
+            <a:avLst/>
+          </a:prstGeom>
+          <a:noFill xmlns:a="http://schemas.openxmlformats.org/drawingml/2006/main"/>
+          <a:ln xmlns:a="http://schemas.openxmlformats.org/drawingml/2006/main" w="0">
+            <a:noFill/>
+            <a:prstDash val="solid"/>
+          </a:ln>
+        </p:spPr>
+        <p:txBody>
+          <a:bodyPr xmlns:a="http://schemas.openxmlformats.org/drawingml/2006/main" wrap="square" lIns="0" tIns="0" rIns="0" bIns="0" anchor="ctr">
+            <a:normAutofit fontScale="100000"/>
+          </a:bodyPr>
+          <a:lstStyle xmlns:a="http://schemas.openxmlformats.org/drawingml/2006/main"/>
+          <a:p xmlns:a="http://schemas.openxmlformats.org/drawingml/2006/main">
+            <a:pPr algn="l">
+              <a:lnSpc>
+                <a:spcPct val="106000"/>
+              </a:lnSpc>
+              <a:buNone/>
+              <a:defRPr sz="1350" b="1" i="0">
+                <a:ln w="0">
+                  <a:noFill/>
+                  <a:prstDash val="solid"/>
+                </a:ln>
+                <a:solidFill>
+                  <a:srgbClr val="F5E7C3"/>
+                </a:solidFill>
+                <a:latin typeface="Calibri"/>
+                <a:ea typeface="Calibri"/>
+                <a:cs typeface="Calibri"/>
+              </a:defRPr>
+            </a:pPr>
+            <a:r>
+              <a:rPr sz="1350" b="1" i="0">
+                <a:ln w="0">
+                  <a:noFill/>
+                  <a:prstDash val="solid"/>
+                </a:ln>
+                <a:solidFill>
+                  <a:srgbClr val="F5E7C3"/>
+                </a:solidFill>
+                <a:latin typeface="Calibri"/>
+                <a:ea typeface="Calibri"/>
+                <a:cs typeface="Calibri"/>
+              </a:rPr>
+              <a:t>«Se les abrieron los ojos y lo reconocieron.»</a:t>
+            </a:r>
+          </a:p>
+        </p:txBody>
+      </p:sp>
+      <p:sp>
+        <p:nvSpPr>
+          <p:cNvPr id="26" name="card-accent-3">
+            <a:extLst xmlns:a="http://schemas.openxmlformats.org/drawingml/2006/main">
+              <a:ext uri="{FF2B5EF4-FFF2-40B4-BE49-F238E27FC236}">
+                <a16:creationId xmlns:a16="http://schemas.microsoft.com/office/drawing/2014/main" id="{1263E266-22F0-4CF9-9820-7D60EDEF73E5}"/>
+              </a:ext>
+            </a:extLst>
+          </p:cNvPr>
+          <p:cNvSpPr>
+            <a:spLocks xmlns:a="http://schemas.openxmlformats.org/drawingml/2006/main" noGrp="1"/>
+          </p:cNvSpPr>
+          <p:nvPr/>
+        </p:nvSpPr>
+        <p:spPr>
+          <a:xfrm xmlns:a="http://schemas.openxmlformats.org/drawingml/2006/main">
+            <a:off x="6324600" y="3838575"/>
+            <a:ext cx="552450" cy="28575"/>
+          </a:xfrm>
+          <a:prstGeom xmlns:a="http://schemas.openxmlformats.org/drawingml/2006/main" prst="rect">
+            <a:avLst/>
+          </a:prstGeom>
+          <a:solidFill xmlns:a="http://schemas.openxmlformats.org/drawingml/2006/main">
+            <a:srgbClr val="D9A43B"/>
+          </a:solidFill>
+          <a:ln xmlns:a="http://schemas.openxmlformats.org/drawingml/2006/main" w="0">
+            <a:noFill/>
+            <a:prstDash val="solid"/>
+          </a:ln>
+        </p:spPr>
+      </p:sp>
+      <p:sp>
+        <p:nvSpPr>
+          <p:cNvPr id="27" name="card-body-3">
+            <a:extLst xmlns:a="http://schemas.openxmlformats.org/drawingml/2006/main">
+              <a:ext uri="{FF2B5EF4-FFF2-40B4-BE49-F238E27FC236}">
+                <a16:creationId xmlns:a16="http://schemas.microsoft.com/office/drawing/2014/main" id="{0F0A3425-60AC-4F25-8C2A-30AE571C4CFD}"/>
+              </a:ext>
+            </a:extLst>
+          </p:cNvPr>
+          <p:cNvSpPr>
+            <a:spLocks xmlns:a="http://schemas.openxmlformats.org/drawingml/2006/main" noGrp="1"/>
+          </p:cNvSpPr>
+          <p:nvPr/>
+        </p:nvSpPr>
+        <p:spPr>
+          <a:xfrm xmlns:a="http://schemas.openxmlformats.org/drawingml/2006/main">
+            <a:off x="6324600" y="4038600"/>
+            <a:ext cx="2152650" cy="990600"/>
+          </a:xfrm>
+          <a:prstGeom xmlns:a="http://schemas.openxmlformats.org/drawingml/2006/main" prst="rect">
+            <a:avLst/>
+          </a:prstGeom>
+          <a:noFill xmlns:a="http://schemas.openxmlformats.org/drawingml/2006/main"/>
+          <a:ln xmlns:a="http://schemas.openxmlformats.org/drawingml/2006/main" w="0">
+            <a:noFill/>
+            <a:prstDash val="solid"/>
+          </a:ln>
+        </p:spPr>
+        <p:txBody>
+          <a:bodyPr xmlns:a="http://schemas.openxmlformats.org/drawingml/2006/main" wrap="square" lIns="0" tIns="0" rIns="0" bIns="0" anchor="ctr">
+            <a:normAutofit fontScale="100000"/>
+          </a:bodyPr>
+          <a:lstStyle xmlns:a="http://schemas.openxmlformats.org/drawingml/2006/main"/>
+          <a:p xmlns:a="http://schemas.openxmlformats.org/drawingml/2006/main">
+            <a:pPr algn="l">
+              <a:lnSpc>
+                <a:spcPct val="108000"/>
+              </a:lnSpc>
+              <a:buNone/>
+              <a:defRPr sz="1125" b="0" i="0">
+                <a:ln w="0">
+                  <a:noFill/>
+                  <a:prstDash val="solid"/>
+                </a:ln>
+                <a:solidFill>
+                  <a:srgbClr val="FFFFFF"/>
+                </a:solidFill>
+                <a:latin typeface="Calibri"/>
+                <a:ea typeface="Calibri"/>
+                <a:cs typeface="Calibri"/>
+              </a:defRPr>
+            </a:pPr>
+            <a:r>
+              <a:rPr sz="1125" b="0" i="0">
+                <a:ln w="0">
+                  <a:noFill/>
+                  <a:prstDash val="solid"/>
+                </a:ln>
+                <a:solidFill>
+                  <a:srgbClr val="FFFFFF"/>
+                </a:solidFill>
+                <a:latin typeface="Calibri"/>
+                <a:ea typeface="Calibri"/>
+                <a:cs typeface="Calibri"/>
+              </a:rPr>
+              <a:t>En Emaús comprenden después que Jesús ya caminaba con ellos. La memoria se vuelve reconocimiento.</a:t>
+            </a:r>
+          </a:p>
+        </p:txBody>
+      </p:sp>
+      <p:sp>
+        <p:nvSpPr>
+          <p:cNvPr id="28" name="card-4">
+            <a:extLst xmlns:a="http://schemas.openxmlformats.org/drawingml/2006/main">
+              <a:ext uri="{FF2B5EF4-FFF2-40B4-BE49-F238E27FC236}">
+                <a16:creationId xmlns:a16="http://schemas.microsoft.com/office/drawing/2014/main" id="{AA19174D-A4BB-4D65-9649-BDA0672A7B72}"/>
+              </a:ext>
+            </a:extLst>
+          </p:cNvPr>
+          <p:cNvSpPr>
+            <a:spLocks xmlns:a="http://schemas.openxmlformats.org/drawingml/2006/main" noGrp="1"/>
+          </p:cNvSpPr>
+          <p:nvPr/>
+        </p:nvSpPr>
+        <p:spPr>
+          <a:xfrm xmlns:a="http://schemas.openxmlformats.org/drawingml/2006/main">
+            <a:off x="8934450" y="1381125"/>
+            <a:ext cx="2533650" cy="3867150"/>
+          </a:xfrm>
+          <a:prstGeom xmlns:a="http://schemas.openxmlformats.org/drawingml/2006/main" prst="roundRect">
+            <a:avLst>
+              <a:gd name="adj" fmla="val 4511"/>
+            </a:avLst>
+          </a:prstGeom>
+          <a:solidFill xmlns:a="http://schemas.openxmlformats.org/drawingml/2006/main">
+            <a:srgbClr val="5C5538"/>
+          </a:solidFill>
+          <a:ln xmlns:a="http://schemas.openxmlformats.org/drawingml/2006/main" w="9525">
+            <a:solidFill>
+              <a:srgbClr val="D9A43B"/>
+            </a:solidFill>
+            <a:prstDash val="solid"/>
+          </a:ln>
+        </p:spPr>
+      </p:sp>
+      <p:sp>
+        <p:nvSpPr>
+          <p:cNvPr id="29" name="card-index-4">
+            <a:extLst xmlns:a="http://schemas.openxmlformats.org/drawingml/2006/main">
+              <a:ext uri="{FF2B5EF4-FFF2-40B4-BE49-F238E27FC236}">
+                <a16:creationId xmlns:a16="http://schemas.microsoft.com/office/drawing/2014/main" id="{751407A3-A342-48F5-AA53-952A614B8EA7}"/>
+              </a:ext>
+            </a:extLst>
+          </p:cNvPr>
+          <p:cNvSpPr>
+            <a:spLocks xmlns:a="http://schemas.openxmlformats.org/drawingml/2006/main" noGrp="1"/>
+          </p:cNvSpPr>
+          <p:nvPr/>
+        </p:nvSpPr>
+        <p:spPr>
+          <a:xfrm xmlns:a="http://schemas.openxmlformats.org/drawingml/2006/main">
+            <a:off x="9124950" y="1571625"/>
+            <a:ext cx="400050" cy="266700"/>
+          </a:xfrm>
+          <a:prstGeom xmlns:a="http://schemas.openxmlformats.org/drawingml/2006/main" prst="rect">
+            <a:avLst/>
+          </a:prstGeom>
+          <a:noFill xmlns:a="http://schemas.openxmlformats.org/drawingml/2006/main"/>
+          <a:ln xmlns:a="http://schemas.openxmlformats.org/drawingml/2006/main" w="0">
+            <a:noFill/>
+            <a:prstDash val="solid"/>
+          </a:ln>
+        </p:spPr>
+        <p:txBody>
+          <a:bodyPr xmlns:a="http://schemas.openxmlformats.org/drawingml/2006/main" wrap="square" lIns="0" tIns="0" rIns="0" bIns="0" anchor="ctr">
+            <a:normAutofit fontScale="100000"/>
+          </a:bodyPr>
+          <a:lstStyle xmlns:a="http://schemas.openxmlformats.org/drawingml/2006/main"/>
+          <a:p xmlns:a="http://schemas.openxmlformats.org/drawingml/2006/main">
+            <a:pPr algn="l">
+              <a:lnSpc>
+                <a:spcPct val="100000"/>
+              </a:lnSpc>
+              <a:buNone/>
+              <a:defRPr sz="975" b="1" i="0">
+                <a:ln w="0">
+                  <a:noFill/>
+                  <a:prstDash val="solid"/>
+                </a:ln>
+                <a:solidFill>
+                  <a:srgbClr val="D9A441"/>
+                </a:solidFill>
+                <a:latin typeface="Calibri"/>
+                <a:ea typeface="Calibri"/>
+                <a:cs typeface="Calibri"/>
+              </a:defRPr>
+            </a:pPr>
+            <a:r>
+              <a:rPr sz="975" b="1" i="0">
+                <a:ln w="0">
+                  <a:noFill/>
+                  <a:prstDash val="solid"/>
+                </a:ln>
+                <a:solidFill>
+                  <a:srgbClr val="D9A441"/>
+                </a:solidFill>
+                <a:latin typeface="Calibri"/>
+                <a:ea typeface="Calibri"/>
+                <a:cs typeface="Calibri"/>
+              </a:rPr>
+              <a:t>04</a:t>
+            </a:r>
+          </a:p>
+        </p:txBody>
+      </p:sp>
+      <p:sp>
+        <p:nvSpPr>
+          <p:cNvPr id="30" name="card-ref-4">
+            <a:extLst xmlns:a="http://schemas.openxmlformats.org/drawingml/2006/main">
+              <a:ext uri="{FF2B5EF4-FFF2-40B4-BE49-F238E27FC236}">
+                <a16:creationId xmlns:a16="http://schemas.microsoft.com/office/drawing/2014/main" id="{91A12B5C-9F29-4211-ADD7-248C00853CA1}"/>
+              </a:ext>
+            </a:extLst>
+          </p:cNvPr>
+          <p:cNvSpPr>
+            <a:spLocks xmlns:a="http://schemas.openxmlformats.org/drawingml/2006/main" noGrp="1"/>
+          </p:cNvSpPr>
+          <p:nvPr/>
+        </p:nvSpPr>
+        <p:spPr>
+          <a:xfrm xmlns:a="http://schemas.openxmlformats.org/drawingml/2006/main">
+            <a:off x="9620250" y="1552575"/>
+            <a:ext cx="1619250" cy="285750"/>
+          </a:xfrm>
+          <a:prstGeom xmlns:a="http://schemas.openxmlformats.org/drawingml/2006/main" prst="rect">
+            <a:avLst/>
+          </a:prstGeom>
+          <a:noFill xmlns:a="http://schemas.openxmlformats.org/drawingml/2006/main"/>
+          <a:ln xmlns:a="http://schemas.openxmlformats.org/drawingml/2006/main" w="0">
+            <a:noFill/>
+            <a:prstDash val="solid"/>
+          </a:ln>
+        </p:spPr>
+        <p:txBody>
+          <a:bodyPr xmlns:a="http://schemas.openxmlformats.org/drawingml/2006/main" wrap="square" lIns="0" tIns="0" rIns="0" bIns="0" anchor="ctr">
+            <a:normAutofit fontScale="100000"/>
+          </a:bodyPr>
+          <a:lstStyle xmlns:a="http://schemas.openxmlformats.org/drawingml/2006/main"/>
+          <a:p xmlns:a="http://schemas.openxmlformats.org/drawingml/2006/main">
+            <a:pPr algn="l">
+              <a:lnSpc>
+                <a:spcPct val="100000"/>
+              </a:lnSpc>
+              <a:buNone/>
+              <a:defRPr sz="1200" b="1" i="0">
+                <a:ln w="0">
+                  <a:noFill/>
+                  <a:prstDash val="solid"/>
+                </a:ln>
+                <a:solidFill>
+                  <a:srgbClr val="F5E7C3"/>
+                </a:solidFill>
+                <a:latin typeface="Calibri"/>
+                <a:ea typeface="Calibri"/>
+                <a:cs typeface="Calibri"/>
+              </a:defRPr>
+            </a:pPr>
+            <a:r>
+              <a:rPr sz="1200" b="1" i="0">
+                <a:ln w="0">
+                  <a:noFill/>
+                  <a:prstDash val="solid"/>
+                </a:ln>
+                <a:solidFill>
+                  <a:srgbClr val="F5E7C3"/>
+                </a:solidFill>
+                <a:latin typeface="Calibri"/>
+                <a:ea typeface="Calibri"/>
+                <a:cs typeface="Calibri"/>
+              </a:rPr>
+              <a:t>1 Tes 5,21</a:t>
+            </a:r>
+          </a:p>
+        </p:txBody>
+      </p:sp>
+      <p:sp>
+        <p:nvSpPr>
+          <p:cNvPr id="31" name="card-top-rule-4">
+            <a:extLst xmlns:a="http://schemas.openxmlformats.org/drawingml/2006/main">
+              <a:ext uri="{FF2B5EF4-FFF2-40B4-BE49-F238E27FC236}">
+                <a16:creationId xmlns:a16="http://schemas.microsoft.com/office/drawing/2014/main" id="{13523E80-8254-474D-958C-972E093D00C1}"/>
+              </a:ext>
+            </a:extLst>
+          </p:cNvPr>
+          <p:cNvSpPr>
+            <a:spLocks xmlns:a="http://schemas.openxmlformats.org/drawingml/2006/main" noGrp="1"/>
+          </p:cNvSpPr>
+          <p:nvPr/>
+        </p:nvSpPr>
+        <p:spPr>
+          <a:xfrm xmlns:a="http://schemas.openxmlformats.org/drawingml/2006/main">
+            <a:off x="9124950" y="1971675"/>
+            <a:ext cx="2152650" cy="9525"/>
+          </a:xfrm>
+          <a:prstGeom xmlns:a="http://schemas.openxmlformats.org/drawingml/2006/main" prst="rect">
+            <a:avLst/>
+          </a:prstGeom>
+          <a:solidFill xmlns:a="http://schemas.openxmlformats.org/drawingml/2006/main">
+            <a:srgbClr val="F5F0E7">
+              <a:alpha val="55000"/>
+            </a:srgbClr>
+          </a:solidFill>
+          <a:ln xmlns:a="http://schemas.openxmlformats.org/drawingml/2006/main" w="0">
+            <a:noFill/>
+            <a:prstDash val="solid"/>
+          </a:ln>
+        </p:spPr>
+      </p:sp>
+      <p:sp>
+        <p:nvSpPr>
+          <p:cNvPr id="32" name="card-title-4">
+            <a:extLst xmlns:a="http://schemas.openxmlformats.org/drawingml/2006/main">
+              <a:ext uri="{FF2B5EF4-FFF2-40B4-BE49-F238E27FC236}">
+                <a16:creationId xmlns:a16="http://schemas.microsoft.com/office/drawing/2014/main" id="{3EE7472C-02E1-4BE4-8714-7F1D970CD30E}"/>
+              </a:ext>
+            </a:extLst>
+          </p:cNvPr>
+          <p:cNvSpPr>
+            <a:spLocks xmlns:a="http://schemas.openxmlformats.org/drawingml/2006/main" noGrp="1"/>
+          </p:cNvSpPr>
+          <p:nvPr/>
+        </p:nvSpPr>
+        <p:spPr>
+          <a:xfrm xmlns:a="http://schemas.openxmlformats.org/drawingml/2006/main">
+            <a:off x="9124950" y="2133600"/>
+            <a:ext cx="2152650" cy="552450"/>
+          </a:xfrm>
+          <a:prstGeom xmlns:a="http://schemas.openxmlformats.org/drawingml/2006/main" prst="rect">
+            <a:avLst/>
+          </a:prstGeom>
+          <a:noFill xmlns:a="http://schemas.openxmlformats.org/drawingml/2006/main"/>
+          <a:ln xmlns:a="http://schemas.openxmlformats.org/drawingml/2006/main" w="0">
+            <a:noFill/>
+            <a:prstDash val="solid"/>
+          </a:ln>
+        </p:spPr>
+        <p:txBody>
+          <a:bodyPr xmlns:a="http://schemas.openxmlformats.org/drawingml/2006/main" wrap="square" lIns="0" tIns="0" rIns="0" bIns="0" anchor="ctr">
+            <a:normAutofit fontScale="100000"/>
+          </a:bodyPr>
+          <a:lstStyle xmlns:a="http://schemas.openxmlformats.org/drawingml/2006/main"/>
+          <a:p xmlns:a="http://schemas.openxmlformats.org/drawingml/2006/main">
+            <a:pPr algn="l">
+              <a:lnSpc>
+                <a:spcPct val="95000"/>
+              </a:lnSpc>
+              <a:buNone/>
+              <a:defRPr sz="1425" b="1" i="0">
+                <a:ln w="0">
+                  <a:noFill/>
+                  <a:prstDash val="solid"/>
+                </a:ln>
+                <a:solidFill>
+                  <a:srgbClr val="FFFFFF"/>
+                </a:solidFill>
+                <a:latin typeface="Calibri"/>
+                <a:ea typeface="Calibri"/>
+                <a:cs typeface="Calibri"/>
+              </a:defRPr>
+            </a:pPr>
+            <a:r>
+              <a:rPr sz="1425" b="1" i="0">
+                <a:ln w="0">
+                  <a:noFill/>
+                  <a:prstDash val="solid"/>
+                </a:ln>
+                <a:solidFill>
+                  <a:srgbClr val="FFFFFF"/>
+                </a:solidFill>
+                <a:latin typeface="Calibri"/>
+                <a:ea typeface="Calibri"/>
+                <a:cs typeface="Calibri"/>
+              </a:rPr>
+              <a:t>DISCERNIR LA RED</a:t>
+            </a:r>
+          </a:p>
+        </p:txBody>
+      </p:sp>
+      <p:sp>
+        <p:nvSpPr>
+          <p:cNvPr id="33" name="card-quote-4">
+            <a:extLst xmlns:a="http://schemas.openxmlformats.org/drawingml/2006/main">
+              <a:ext uri="{FF2B5EF4-FFF2-40B4-BE49-F238E27FC236}">
+                <a16:creationId xmlns:a16="http://schemas.microsoft.com/office/drawing/2014/main" id="{993D5F3A-D1CE-4641-8577-573A914F1275}"/>
+              </a:ext>
+            </a:extLst>
+          </p:cNvPr>
+          <p:cNvSpPr>
+            <a:spLocks xmlns:a="http://schemas.openxmlformats.org/drawingml/2006/main" noGrp="1"/>
+          </p:cNvSpPr>
+          <p:nvPr/>
+        </p:nvSpPr>
+        <p:spPr>
+          <a:xfrm xmlns:a="http://schemas.openxmlformats.org/drawingml/2006/main">
+            <a:off x="9124950" y="2781300"/>
+            <a:ext cx="2152650" cy="914400"/>
+          </a:xfrm>
+          <a:prstGeom xmlns:a="http://schemas.openxmlformats.org/drawingml/2006/main" prst="rect">
+            <a:avLst/>
+          </a:prstGeom>
+          <a:noFill xmlns:a="http://schemas.openxmlformats.org/drawingml/2006/main"/>
+          <a:ln xmlns:a="http://schemas.openxmlformats.org/drawingml/2006/main" w="0">
+            <a:noFill/>
+            <a:prstDash val="solid"/>
+          </a:ln>
+        </p:spPr>
+        <p:txBody>
+          <a:bodyPr xmlns:a="http://schemas.openxmlformats.org/drawingml/2006/main" wrap="square" lIns="0" tIns="0" rIns="0" bIns="0" anchor="ctr">
+            <a:normAutofit fontScale="100000"/>
+          </a:bodyPr>
+          <a:lstStyle xmlns:a="http://schemas.openxmlformats.org/drawingml/2006/main"/>
+          <a:p xmlns:a="http://schemas.openxmlformats.org/drawingml/2006/main">
+            <a:pPr algn="l">
+              <a:lnSpc>
+                <a:spcPct val="106000"/>
+              </a:lnSpc>
+              <a:buNone/>
+              <a:defRPr sz="1350" b="1" i="0">
+                <a:ln w="0">
+                  <a:noFill/>
+                  <a:prstDash val="solid"/>
+                </a:ln>
+                <a:solidFill>
+                  <a:srgbClr val="F5E7C3"/>
+                </a:solidFill>
+                <a:latin typeface="Calibri"/>
+                <a:ea typeface="Calibri"/>
+                <a:cs typeface="Calibri"/>
+              </a:defRPr>
+            </a:pPr>
+            <a:r>
+              <a:rPr sz="1350" b="1" i="0">
+                <a:ln w="0">
+                  <a:noFill/>
+                  <a:prstDash val="solid"/>
+                </a:ln>
+                <a:solidFill>
+                  <a:srgbClr val="F5E7C3"/>
+                </a:solidFill>
+                <a:latin typeface="Calibri"/>
+                <a:ea typeface="Calibri"/>
+                <a:cs typeface="Calibri"/>
+              </a:rPr>
+              <a:t>«Examinadlo todo; quedaos con lo bueno.»</a:t>
+            </a:r>
+          </a:p>
+        </p:txBody>
+      </p:sp>
+      <p:sp>
+        <p:nvSpPr>
+          <p:cNvPr id="34" name="card-accent-4">
+            <a:extLst xmlns:a="http://schemas.openxmlformats.org/drawingml/2006/main">
+              <a:ext uri="{FF2B5EF4-FFF2-40B4-BE49-F238E27FC236}">
+                <a16:creationId xmlns:a16="http://schemas.microsoft.com/office/drawing/2014/main" id="{522E8673-F1EF-4ED6-ACE1-AEC1C6F0F330}"/>
+              </a:ext>
+            </a:extLst>
+          </p:cNvPr>
+          <p:cNvSpPr>
+            <a:spLocks xmlns:a="http://schemas.openxmlformats.org/drawingml/2006/main" noGrp="1"/>
+          </p:cNvSpPr>
+          <p:nvPr/>
+        </p:nvSpPr>
+        <p:spPr>
+          <a:xfrm xmlns:a="http://schemas.openxmlformats.org/drawingml/2006/main">
+            <a:off x="9124950" y="3838575"/>
+            <a:ext cx="552450" cy="28575"/>
+          </a:xfrm>
+          <a:prstGeom xmlns:a="http://schemas.openxmlformats.org/drawingml/2006/main" prst="rect">
+            <a:avLst/>
+          </a:prstGeom>
+          <a:solidFill xmlns:a="http://schemas.openxmlformats.org/drawingml/2006/main">
+            <a:srgbClr val="D9A43B"/>
+          </a:solidFill>
+          <a:ln xmlns:a="http://schemas.openxmlformats.org/drawingml/2006/main" w="0">
+            <a:noFill/>
+            <a:prstDash val="solid"/>
+          </a:ln>
+        </p:spPr>
+      </p:sp>
+      <p:sp>
+        <p:nvSpPr>
+          <p:cNvPr id="35" name="card-body-4">
+            <a:extLst xmlns:a="http://schemas.openxmlformats.org/drawingml/2006/main">
+              <a:ext uri="{FF2B5EF4-FFF2-40B4-BE49-F238E27FC236}">
+                <a16:creationId xmlns:a16="http://schemas.microsoft.com/office/drawing/2014/main" id="{9F34A10C-DDD7-4038-A23E-C91DA258CC06}"/>
+              </a:ext>
+            </a:extLst>
+          </p:cNvPr>
+          <p:cNvSpPr>
+            <a:spLocks xmlns:a="http://schemas.openxmlformats.org/drawingml/2006/main" noGrp="1"/>
+          </p:cNvSpPr>
+          <p:nvPr/>
+        </p:nvSpPr>
+        <p:spPr>
+          <a:xfrm xmlns:a="http://schemas.openxmlformats.org/drawingml/2006/main">
+            <a:off x="9124950" y="4038600"/>
+            <a:ext cx="2152650" cy="990600"/>
+          </a:xfrm>
+          <a:prstGeom xmlns:a="http://schemas.openxmlformats.org/drawingml/2006/main" prst="rect">
+            <a:avLst/>
+          </a:prstGeom>
+          <a:noFill xmlns:a="http://schemas.openxmlformats.org/drawingml/2006/main"/>
+          <a:ln xmlns:a="http://schemas.openxmlformats.org/drawingml/2006/main" w="0">
+            <a:noFill/>
+            <a:prstDash val="solid"/>
+          </a:ln>
+        </p:spPr>
+        <p:txBody>
+          <a:bodyPr xmlns:a="http://schemas.openxmlformats.org/drawingml/2006/main" wrap="square" lIns="0" tIns="0" rIns="0" bIns="0" anchor="ctr">
+            <a:normAutofit fontScale="100000"/>
+          </a:bodyPr>
+          <a:lstStyle xmlns:a="http://schemas.openxmlformats.org/drawingml/2006/main"/>
+          <a:p xmlns:a="http://schemas.openxmlformats.org/drawingml/2006/main">
+            <a:pPr algn="l">
+              <a:lnSpc>
+                <a:spcPct val="108000"/>
+              </a:lnSpc>
+              <a:buNone/>
+              <a:defRPr sz="1125" b="0" i="0">
+                <a:ln w="0">
+                  <a:noFill/>
+                  <a:prstDash val="solid"/>
+                </a:ln>
+                <a:solidFill>
+                  <a:srgbClr val="FFFFFF"/>
+                </a:solidFill>
+                <a:latin typeface="Calibri"/>
+                <a:ea typeface="Calibri"/>
+                <a:cs typeface="Calibri"/>
+              </a:defRPr>
+            </a:pPr>
+            <a:r>
+              <a:rPr sz="1125" b="0" i="0">
+                <a:ln w="0">
+                  <a:noFill/>
+                  <a:prstDash val="solid"/>
+                </a:ln>
+                <a:solidFill>
+                  <a:srgbClr val="FFFFFF"/>
+                </a:solidFill>
+                <a:latin typeface="Calibri"/>
+                <a:ea typeface="Calibri"/>
+                <a:cs typeface="Calibri"/>
+              </a:rPr>
+              <a:t>La fe no llama tesoro a cualquier cosa. Conserva lo que da vida y deja ir lo que desvía.</a:t>
+            </a:r>
+          </a:p>
+        </p:txBody>
+      </p:sp>
+      <p:sp>
+        <p:nvSpPr>
+          <p:cNvPr id="36" name="synthesis-label">
+            <a:extLst xmlns:a="http://schemas.openxmlformats.org/drawingml/2006/main">
+              <a:ext uri="{FF2B5EF4-FFF2-40B4-BE49-F238E27FC236}">
+                <a16:creationId xmlns:a16="http://schemas.microsoft.com/office/drawing/2014/main" id="{80431634-2786-44A6-926F-0EA55FF2997F}"/>
+              </a:ext>
+            </a:extLst>
+          </p:cNvPr>
+          <p:cNvSpPr>
+            <a:spLocks xmlns:a="http://schemas.openxmlformats.org/drawingml/2006/main" noGrp="1"/>
+          </p:cNvSpPr>
+          <p:nvPr/>
+        </p:nvSpPr>
+        <p:spPr>
+          <a:xfrm xmlns:a="http://schemas.openxmlformats.org/drawingml/2006/main">
+            <a:off x="628650" y="5524500"/>
+            <a:ext cx="1047750" cy="247650"/>
+          </a:xfrm>
+          <a:prstGeom xmlns:a="http://schemas.openxmlformats.org/drawingml/2006/main" prst="rect">
+            <a:avLst/>
+          </a:prstGeom>
+          <a:noFill xmlns:a="http://schemas.openxmlformats.org/drawingml/2006/main"/>
+          <a:ln xmlns:a="http://schemas.openxmlformats.org/drawingml/2006/main" w="0">
+            <a:noFill/>
+            <a:prstDash val="solid"/>
+          </a:ln>
+        </p:spPr>
+        <p:txBody>
+          <a:bodyPr xmlns:a="http://schemas.openxmlformats.org/drawingml/2006/main" wrap="square" lIns="0" tIns="0" rIns="0" bIns="0" anchor="ctr">
+            <a:normAutofit fontScale="100000"/>
+          </a:bodyPr>
+          <a:lstStyle xmlns:a="http://schemas.openxmlformats.org/drawingml/2006/main"/>
+          <a:p xmlns:a="http://schemas.openxmlformats.org/drawingml/2006/main">
+            <a:pPr algn="l">
+              <a:lnSpc>
+                <a:spcPct val="100000"/>
+              </a:lnSpc>
+              <a:buNone/>
+              <a:defRPr sz="1050" b="1" i="0">
+                <a:ln w="0">
+                  <a:noFill/>
+                  <a:prstDash val="solid"/>
+                </a:ln>
+                <a:solidFill>
+                  <a:srgbClr val="D9A441"/>
+                </a:solidFill>
+                <a:latin typeface="Calibri"/>
+                <a:ea typeface="Calibri"/>
+                <a:cs typeface="Calibri"/>
+              </a:defRPr>
+            </a:pPr>
+            <a:r>
+              <a:rPr sz="1050" b="1" i="0">
+                <a:ln w="0">
+                  <a:noFill/>
+                  <a:prstDash val="solid"/>
+                </a:ln>
+                <a:solidFill>
+                  <a:srgbClr val="D9A441"/>
+                </a:solidFill>
+                <a:latin typeface="Calibri"/>
+                <a:ea typeface="Calibri"/>
+                <a:cs typeface="Calibri"/>
+              </a:rPr>
+              <a:t>SÍNTESIS</a:t>
+            </a:r>
+          </a:p>
+        </p:txBody>
+      </p:sp>
+      <p:sp>
+        <p:nvSpPr>
+          <p:cNvPr id="37" name="synthesis">
+            <a:extLst xmlns:a="http://schemas.openxmlformats.org/drawingml/2006/main">
+              <a:ext uri="{FF2B5EF4-FFF2-40B4-BE49-F238E27FC236}">
+                <a16:creationId xmlns:a16="http://schemas.microsoft.com/office/drawing/2014/main" id="{1116CA16-FF0E-490C-B764-80551F006C38}"/>
+              </a:ext>
+            </a:extLst>
+          </p:cNvPr>
+          <p:cNvSpPr>
+            <a:spLocks xmlns:a="http://schemas.openxmlformats.org/drawingml/2006/main" noGrp="1"/>
+          </p:cNvSpPr>
+          <p:nvPr/>
+        </p:nvSpPr>
+        <p:spPr>
+          <a:xfrm xmlns:a="http://schemas.openxmlformats.org/drawingml/2006/main">
+            <a:off x="1771650" y="5467350"/>
+            <a:ext cx="9886950" cy="381000"/>
+          </a:xfrm>
+          <a:prstGeom xmlns:a="http://schemas.openxmlformats.org/drawingml/2006/main" prst="rect">
+            <a:avLst/>
+          </a:prstGeom>
+          <a:noFill xmlns:a="http://schemas.openxmlformats.org/drawingml/2006/main"/>
+          <a:ln xmlns:a="http://schemas.openxmlformats.org/drawingml/2006/main" w="0">
+            <a:noFill/>
+            <a:prstDash val="solid"/>
+          </a:ln>
+        </p:spPr>
+        <p:txBody>
+          <a:bodyPr xmlns:a="http://schemas.openxmlformats.org/drawingml/2006/main" wrap="square" lIns="0" tIns="0" rIns="0" bIns="0" anchor="ctr">
+            <a:normAutofit fontScale="100000"/>
+          </a:bodyPr>
+          <a:lstStyle xmlns:a="http://schemas.openxmlformats.org/drawingml/2006/main"/>
+          <a:p xmlns:a="http://schemas.openxmlformats.org/drawingml/2006/main">
+            <a:pPr algn="l">
+              <a:lnSpc>
+                <a:spcPct val="100000"/>
+              </a:lnSpc>
+              <a:buNone/>
+              <a:defRPr sz="1425" b="1" i="0">
+                <a:ln w="0">
+                  <a:noFill/>
+                  <a:prstDash val="solid"/>
+                </a:ln>
+                <a:solidFill>
+                  <a:srgbClr val="07151F"/>
+                </a:solidFill>
+                <a:latin typeface="Calibri"/>
+                <a:ea typeface="Calibri"/>
+                <a:cs typeface="Calibri"/>
+              </a:defRPr>
+            </a:pPr>
+            <a:r>
+              <a:rPr sz="1425" b="1" i="0">
+                <a:ln w="0">
+                  <a:noFill/>
+                  <a:prstDash val="solid"/>
+                </a:ln>
+                <a:solidFill>
+                  <a:srgbClr val="07151F"/>
+                </a:solidFill>
+                <a:latin typeface="Calibri"/>
+                <a:ea typeface="Calibri"/>
+                <a:cs typeface="Calibri"/>
+              </a:rPr>
+              <a:t>Presencia ya cercana  ·  deseo purificado  ·  historia releída  ·  elección con alegría</a:t>
+            </a:r>
+          </a:p>
+        </p:txBody>
+      </p:sp>
+      <p:sp>
+        <p:nvSpPr>
+          <p:cNvPr id="38" name="resonance-question">
+            <a:extLst xmlns:a="http://schemas.openxmlformats.org/drawingml/2006/main">
+              <a:ext uri="{FF2B5EF4-FFF2-40B4-BE49-F238E27FC236}">
+                <a16:creationId xmlns:a16="http://schemas.microsoft.com/office/drawing/2014/main" id="{0DB6426E-DE49-41DD-A9EF-CD701FFFE97C}"/>
+              </a:ext>
+            </a:extLst>
+          </p:cNvPr>
+          <p:cNvSpPr>
+            <a:spLocks xmlns:a="http://schemas.openxmlformats.org/drawingml/2006/main" noGrp="1"/>
+          </p:cNvSpPr>
+          <p:nvPr/>
+        </p:nvSpPr>
+        <p:spPr>
+          <a:xfrm xmlns:a="http://schemas.openxmlformats.org/drawingml/2006/main">
+            <a:off x="628650" y="5981700"/>
+            <a:ext cx="10668000" cy="361950"/>
           </a:xfrm>
           <a:prstGeom xmlns:a="http://schemas.openxmlformats.org/drawingml/2006/main" prst="rect">
             <a:avLst/>
@@ -3871,1685 +5726,30 @@
               </a:lnSpc>
               <a:buNone/>
               <a:defRPr sz="1350" b="0" i="0">
-                <a:solidFill>
-                  <a:srgbClr val="F5F0E7"/>
-                </a:solidFill>
-                <a:latin typeface="Arial"/>
-                <a:ea typeface="Arial"/>
-                <a:cs typeface="Arial"/>
+                <a:ln w="0">
+                  <a:noFill/>
+                  <a:prstDash val="solid"/>
+                </a:ln>
+                <a:solidFill>
+                  <a:srgbClr val="40565E"/>
+                </a:solidFill>
+                <a:latin typeface="Calibri"/>
+                <a:ea typeface="Calibri"/>
+                <a:cs typeface="Calibri"/>
               </a:defRPr>
             </a:pPr>
             <a:r>
               <a:rPr sz="1350" b="0" i="0">
-                <a:solidFill>
-                  <a:srgbClr val="F5F0E7"/>
-                </a:solidFill>
-                <a:latin typeface="Arial"/>
-                <a:ea typeface="Arial"/>
-                <a:cs typeface="Arial"/>
-              </a:rPr>
-              <a:t>Gen 28,16</a:t>
-            </a:r>
-          </a:p>
-        </p:txBody>
-      </p:sp>
-      <p:sp>
-        <p:nvSpPr>
-          <p:cNvPr id="7" name="card-top-rule-1">
-            <a:extLst xmlns:a="http://schemas.openxmlformats.org/drawingml/2006/main">
-              <a:ext uri="{FF2B5EF4-FFF2-40B4-BE49-F238E27FC236}">
-                <a16:creationId xmlns:a16="http://schemas.microsoft.com/office/drawing/2014/main" id="{AC709B0E-9261-4DE2-9D36-AC08D03C2809}"/>
-              </a:ext>
-            </a:extLst>
-          </p:cNvPr>
-          <p:cNvSpPr>
-            <a:spLocks xmlns:a="http://schemas.openxmlformats.org/drawingml/2006/main" noGrp="1"/>
-          </p:cNvSpPr>
-          <p:nvPr/>
-        </p:nvSpPr>
-        <p:spPr>
-          <a:xfrm xmlns:a="http://schemas.openxmlformats.org/drawingml/2006/main">
-            <a:off x="723900" y="1971675"/>
-            <a:ext cx="2152650" cy="9525"/>
-          </a:xfrm>
-          <a:prstGeom xmlns:a="http://schemas.openxmlformats.org/drawingml/2006/main" prst="rect">
-            <a:avLst/>
-          </a:prstGeom>
-          <a:solidFill xmlns:a="http://schemas.openxmlformats.org/drawingml/2006/main">
-            <a:srgbClr val="F5F0E7">
-              <a:alpha val="55000"/>
-            </a:srgbClr>
-          </a:solidFill>
-          <a:ln xmlns:a="http://schemas.openxmlformats.org/drawingml/2006/main" w="0">
-            <a:noFill/>
-            <a:prstDash val="solid"/>
-          </a:ln>
-        </p:spPr>
-      </p:sp>
-      <p:sp>
-        <p:nvSpPr>
-          <p:cNvPr id="8" name="card-title-1">
-            <a:extLst xmlns:a="http://schemas.openxmlformats.org/drawingml/2006/main">
-              <a:ext uri="{FF2B5EF4-FFF2-40B4-BE49-F238E27FC236}">
-                <a16:creationId xmlns:a16="http://schemas.microsoft.com/office/drawing/2014/main" id="{00C484C0-1A9F-47EF-90BE-2961BBBEE2F8}"/>
-              </a:ext>
-            </a:extLst>
-          </p:cNvPr>
-          <p:cNvSpPr>
-            <a:spLocks xmlns:a="http://schemas.openxmlformats.org/drawingml/2006/main" noGrp="1"/>
-          </p:cNvSpPr>
-          <p:nvPr/>
-        </p:nvSpPr>
-        <p:spPr>
-          <a:xfrm xmlns:a="http://schemas.openxmlformats.org/drawingml/2006/main">
-            <a:off x="723900" y="2133600"/>
-            <a:ext cx="2152650" cy="552450"/>
-          </a:xfrm>
-          <a:prstGeom xmlns:a="http://schemas.openxmlformats.org/drawingml/2006/main" prst="rect">
-            <a:avLst/>
-          </a:prstGeom>
-          <a:noFill xmlns:a="http://schemas.openxmlformats.org/drawingml/2006/main"/>
-          <a:ln xmlns:a="http://schemas.openxmlformats.org/drawingml/2006/main" w="0">
-            <a:noFill/>
-            <a:prstDash val="solid"/>
-          </a:ln>
-        </p:spPr>
-        <p:txBody>
-          <a:bodyPr xmlns:a="http://schemas.openxmlformats.org/drawingml/2006/main" wrap="square" lIns="0" tIns="0" rIns="0" bIns="0" anchor="ctr">
-            <a:normAutofit fontScale="100000"/>
-          </a:bodyPr>
-          <a:lstStyle xmlns:a="http://schemas.openxmlformats.org/drawingml/2006/main"/>
-          <a:p xmlns:a="http://schemas.openxmlformats.org/drawingml/2006/main">
-            <a:pPr algn="l">
-              <a:lnSpc>
-                <a:spcPct val="95000"/>
-              </a:lnSpc>
-              <a:buNone/>
-              <a:defRPr sz="1500" b="0" i="0">
-                <a:solidFill>
-                  <a:srgbClr val="FFFFFF"/>
-                </a:solidFill>
-                <a:latin typeface="Arial"/>
-                <a:ea typeface="Arial"/>
-                <a:cs typeface="Arial"/>
-              </a:defRPr>
-            </a:pPr>
-            <a:r>
-              <a:rPr sz="1500" b="0" i="0">
-                <a:solidFill>
-                  <a:srgbClr val="FFFFFF"/>
-                </a:solidFill>
-                <a:latin typeface="Arial"/>
-                <a:ea typeface="Arial"/>
-                <a:cs typeface="Arial"/>
-              </a:rPr>
-              <a:t>DIOS YA ESTABA AQUÍ</a:t>
-            </a:r>
-          </a:p>
-        </p:txBody>
-      </p:sp>
-      <p:sp>
-        <p:nvSpPr>
-          <p:cNvPr id="9" name="card-quote-1">
-            <a:extLst xmlns:a="http://schemas.openxmlformats.org/drawingml/2006/main">
-              <a:ext uri="{FF2B5EF4-FFF2-40B4-BE49-F238E27FC236}">
-                <a16:creationId xmlns:a16="http://schemas.microsoft.com/office/drawing/2014/main" id="{7FE1879D-45B3-47BA-A4D6-200C2E1952C1}"/>
-              </a:ext>
-            </a:extLst>
-          </p:cNvPr>
-          <p:cNvSpPr>
-            <a:spLocks xmlns:a="http://schemas.openxmlformats.org/drawingml/2006/main" noGrp="1"/>
-          </p:cNvSpPr>
-          <p:nvPr/>
-        </p:nvSpPr>
-        <p:spPr>
-          <a:xfrm xmlns:a="http://schemas.openxmlformats.org/drawingml/2006/main">
-            <a:off x="723900" y="2781300"/>
-            <a:ext cx="2152650" cy="914400"/>
-          </a:xfrm>
-          <a:prstGeom xmlns:a="http://schemas.openxmlformats.org/drawingml/2006/main" prst="rect">
-            <a:avLst/>
-          </a:prstGeom>
-          <a:noFill xmlns:a="http://schemas.openxmlformats.org/drawingml/2006/main"/>
-          <a:ln xmlns:a="http://schemas.openxmlformats.org/drawingml/2006/main" w="0">
-            <a:noFill/>
-            <a:prstDash val="solid"/>
-          </a:ln>
-        </p:spPr>
-        <p:txBody>
-          <a:bodyPr xmlns:a="http://schemas.openxmlformats.org/drawingml/2006/main" wrap="square" lIns="0" tIns="0" rIns="0" bIns="0" anchor="ctr">
-            <a:normAutofit fontScale="100000"/>
-          </a:bodyPr>
-          <a:lstStyle xmlns:a="http://schemas.openxmlformats.org/drawingml/2006/main"/>
-          <a:p xmlns:a="http://schemas.openxmlformats.org/drawingml/2006/main">
-            <a:pPr algn="l">
-              <a:lnSpc>
-                <a:spcPct val="106000"/>
-              </a:lnSpc>
-              <a:buNone/>
-              <a:defRPr sz="1350" b="0" i="0">
-                <a:solidFill>
-                  <a:srgbClr val="FFF1CF"/>
-                </a:solidFill>
-                <a:latin typeface="Arial"/>
-                <a:ea typeface="Arial"/>
-                <a:cs typeface="Arial"/>
-              </a:defRPr>
-            </a:pPr>
-            <a:r>
-              <a:rPr sz="1350" b="0" i="0">
-                <a:solidFill>
-                  <a:srgbClr val="FFF1CF"/>
-                </a:solidFill>
-                <a:latin typeface="Arial"/>
-                <a:ea typeface="Arial"/>
-                <a:cs typeface="Arial"/>
-              </a:rPr>
-              <a:t>«Realmente el Señor está en este lugar, y yo no lo sabía.»</a:t>
-            </a:r>
-          </a:p>
-        </p:txBody>
-      </p:sp>
-      <p:sp>
-        <p:nvSpPr>
-          <p:cNvPr id="10" name="card-accent-1">
-            <a:extLst xmlns:a="http://schemas.openxmlformats.org/drawingml/2006/main">
-              <a:ext uri="{FF2B5EF4-FFF2-40B4-BE49-F238E27FC236}">
-                <a16:creationId xmlns:a16="http://schemas.microsoft.com/office/drawing/2014/main" id="{7B21789F-EA51-402B-8D1F-0037D2C960C0}"/>
-              </a:ext>
-            </a:extLst>
-          </p:cNvPr>
-          <p:cNvSpPr>
-            <a:spLocks xmlns:a="http://schemas.openxmlformats.org/drawingml/2006/main" noGrp="1"/>
-          </p:cNvSpPr>
-          <p:nvPr/>
-        </p:nvSpPr>
-        <p:spPr>
-          <a:xfrm xmlns:a="http://schemas.openxmlformats.org/drawingml/2006/main">
-            <a:off x="723900" y="3838575"/>
-            <a:ext cx="552450" cy="28575"/>
-          </a:xfrm>
-          <a:prstGeom xmlns:a="http://schemas.openxmlformats.org/drawingml/2006/main" prst="rect">
-            <a:avLst/>
-          </a:prstGeom>
-          <a:solidFill xmlns:a="http://schemas.openxmlformats.org/drawingml/2006/main">
-            <a:srgbClr val="D9A43B"/>
-          </a:solidFill>
-          <a:ln xmlns:a="http://schemas.openxmlformats.org/drawingml/2006/main" w="0">
-            <a:noFill/>
-            <a:prstDash val="solid"/>
-          </a:ln>
-        </p:spPr>
-      </p:sp>
-      <p:sp>
-        <p:nvSpPr>
-          <p:cNvPr id="11" name="card-body-1">
-            <a:extLst xmlns:a="http://schemas.openxmlformats.org/drawingml/2006/main">
-              <a:ext uri="{FF2B5EF4-FFF2-40B4-BE49-F238E27FC236}">
-                <a16:creationId xmlns:a16="http://schemas.microsoft.com/office/drawing/2014/main" id="{8D077AAA-4F8D-4406-A3C3-E893634BE6A7}"/>
-              </a:ext>
-            </a:extLst>
-          </p:cNvPr>
-          <p:cNvSpPr>
-            <a:spLocks xmlns:a="http://schemas.openxmlformats.org/drawingml/2006/main" noGrp="1"/>
-          </p:cNvSpPr>
-          <p:nvPr/>
-        </p:nvSpPr>
-        <p:spPr>
-          <a:xfrm xmlns:a="http://schemas.openxmlformats.org/drawingml/2006/main">
-            <a:off x="723900" y="4038600"/>
-            <a:ext cx="2152650" cy="990600"/>
-          </a:xfrm>
-          <a:prstGeom xmlns:a="http://schemas.openxmlformats.org/drawingml/2006/main" prst="rect">
-            <a:avLst/>
-          </a:prstGeom>
-          <a:noFill xmlns:a="http://schemas.openxmlformats.org/drawingml/2006/main"/>
-          <a:ln xmlns:a="http://schemas.openxmlformats.org/drawingml/2006/main" w="0">
-            <a:noFill/>
-            <a:prstDash val="solid"/>
-          </a:ln>
-        </p:spPr>
-        <p:txBody>
-          <a:bodyPr xmlns:a="http://schemas.openxmlformats.org/drawingml/2006/main" wrap="square" lIns="0" tIns="0" rIns="0" bIns="0" anchor="ctr">
-            <a:normAutofit fontScale="100000"/>
-          </a:bodyPr>
-          <a:lstStyle xmlns:a="http://schemas.openxmlformats.org/drawingml/2006/main"/>
-          <a:p xmlns:a="http://schemas.openxmlformats.org/drawingml/2006/main">
-            <a:pPr algn="l">
-              <a:lnSpc>
-                <a:spcPct val="108000"/>
-              </a:lnSpc>
-              <a:buNone/>
-              <a:defRPr sz="1200" b="0" i="0">
-                <a:solidFill>
-                  <a:srgbClr val="F5F0E7"/>
-                </a:solidFill>
-                <a:latin typeface="Arial"/>
-                <a:ea typeface="Arial"/>
-                <a:cs typeface="Arial"/>
-              </a:defRPr>
-            </a:pPr>
-            <a:r>
-              <a:rPr sz="1200" b="0" i="0">
-                <a:solidFill>
-                  <a:srgbClr val="F5F0E7"/>
-                </a:solidFill>
-                <a:latin typeface="Arial"/>
-                <a:ea typeface="Arial"/>
-                <a:cs typeface="Arial"/>
-              </a:rPr>
-              <a:t>Jacob despierta a una presencia anterior a su comprensión. El lugar ordinario se vuelve casa de Dios.</a:t>
-            </a:r>
-          </a:p>
-        </p:txBody>
-      </p:sp>
-      <p:sp>
-        <p:nvSpPr>
-          <p:cNvPr id="12" name="card-2">
-            <a:extLst xmlns:a="http://schemas.openxmlformats.org/drawingml/2006/main">
-              <a:ext uri="{FF2B5EF4-FFF2-40B4-BE49-F238E27FC236}">
-                <a16:creationId xmlns:a16="http://schemas.microsoft.com/office/drawing/2014/main" id="{87EACBE5-66BE-4D3A-A3F6-C3C9B9B081CA}"/>
-              </a:ext>
-            </a:extLst>
-          </p:cNvPr>
-          <p:cNvSpPr>
-            <a:spLocks xmlns:a="http://schemas.openxmlformats.org/drawingml/2006/main" noGrp="1"/>
-          </p:cNvSpPr>
-          <p:nvPr/>
-        </p:nvSpPr>
-        <p:spPr>
-          <a:xfrm xmlns:a="http://schemas.openxmlformats.org/drawingml/2006/main">
-            <a:off x="3333750" y="1381125"/>
-            <a:ext cx="2533650" cy="3867150"/>
-          </a:xfrm>
-          <a:prstGeom xmlns:a="http://schemas.openxmlformats.org/drawingml/2006/main" prst="roundRect">
-            <a:avLst>
-              <a:gd name="adj" fmla="val 4511"/>
-            </a:avLst>
-          </a:prstGeom>
-          <a:solidFill xmlns:a="http://schemas.openxmlformats.org/drawingml/2006/main">
-            <a:srgbClr val="4E6B51"/>
-          </a:solidFill>
-          <a:ln xmlns:a="http://schemas.openxmlformats.org/drawingml/2006/main" w="9525">
-            <a:solidFill>
-              <a:srgbClr val="D9A43B"/>
-            </a:solidFill>
-            <a:prstDash val="solid"/>
-          </a:ln>
-        </p:spPr>
-      </p:sp>
-      <p:sp>
-        <p:nvSpPr>
-          <p:cNvPr id="13" name="card-index-2">
-            <a:extLst xmlns:a="http://schemas.openxmlformats.org/drawingml/2006/main">
-              <a:ext uri="{FF2B5EF4-FFF2-40B4-BE49-F238E27FC236}">
-                <a16:creationId xmlns:a16="http://schemas.microsoft.com/office/drawing/2014/main" id="{A9830822-7C0C-4A74-8926-9AD02A691C47}"/>
-              </a:ext>
-            </a:extLst>
-          </p:cNvPr>
-          <p:cNvSpPr>
-            <a:spLocks xmlns:a="http://schemas.openxmlformats.org/drawingml/2006/main" noGrp="1"/>
-          </p:cNvSpPr>
-          <p:nvPr/>
-        </p:nvSpPr>
-        <p:spPr>
-          <a:xfrm xmlns:a="http://schemas.openxmlformats.org/drawingml/2006/main">
-            <a:off x="3524250" y="1571625"/>
-            <a:ext cx="400050" cy="266700"/>
-          </a:xfrm>
-          <a:prstGeom xmlns:a="http://schemas.openxmlformats.org/drawingml/2006/main" prst="rect">
-            <a:avLst/>
-          </a:prstGeom>
-          <a:noFill xmlns:a="http://schemas.openxmlformats.org/drawingml/2006/main"/>
-          <a:ln xmlns:a="http://schemas.openxmlformats.org/drawingml/2006/main" w="0">
-            <a:noFill/>
-            <a:prstDash val="solid"/>
-          </a:ln>
-        </p:spPr>
-        <p:txBody>
-          <a:bodyPr xmlns:a="http://schemas.openxmlformats.org/drawingml/2006/main" wrap="square" lIns="0" tIns="0" rIns="0" bIns="0" anchor="ctr">
-            <a:normAutofit fontScale="100000"/>
-          </a:bodyPr>
-          <a:lstStyle xmlns:a="http://schemas.openxmlformats.org/drawingml/2006/main"/>
-          <a:p xmlns:a="http://schemas.openxmlformats.org/drawingml/2006/main">
-            <a:pPr algn="l">
-              <a:lnSpc>
-                <a:spcPct val="100000"/>
-              </a:lnSpc>
-              <a:buNone/>
-              <a:defRPr sz="1050" b="0" i="0">
-                <a:solidFill>
-                  <a:srgbClr val="F0C766"/>
-                </a:solidFill>
-                <a:latin typeface="Arial"/>
-                <a:ea typeface="Arial"/>
-                <a:cs typeface="Arial"/>
-              </a:defRPr>
-            </a:pPr>
-            <a:r>
-              <a:rPr sz="1050" b="0" i="0">
-                <a:solidFill>
-                  <a:srgbClr val="F0C766"/>
-                </a:solidFill>
-                <a:latin typeface="Arial"/>
-                <a:ea typeface="Arial"/>
-                <a:cs typeface="Arial"/>
-              </a:rPr>
-              <a:t>02</a:t>
-            </a:r>
-          </a:p>
-        </p:txBody>
-      </p:sp>
-      <p:sp>
-        <p:nvSpPr>
-          <p:cNvPr id="14" name="card-ref-2">
-            <a:extLst xmlns:a="http://schemas.openxmlformats.org/drawingml/2006/main">
-              <a:ext uri="{FF2B5EF4-FFF2-40B4-BE49-F238E27FC236}">
-                <a16:creationId xmlns:a16="http://schemas.microsoft.com/office/drawing/2014/main" id="{D65846AA-D30F-410B-9EC6-56E8CDD34AA9}"/>
-              </a:ext>
-            </a:extLst>
-          </p:cNvPr>
-          <p:cNvSpPr>
-            <a:spLocks xmlns:a="http://schemas.openxmlformats.org/drawingml/2006/main" noGrp="1"/>
-          </p:cNvSpPr>
-          <p:nvPr/>
-        </p:nvSpPr>
-        <p:spPr>
-          <a:xfrm xmlns:a="http://schemas.openxmlformats.org/drawingml/2006/main">
-            <a:off x="4019550" y="1552575"/>
-            <a:ext cx="1619250" cy="285750"/>
-          </a:xfrm>
-          <a:prstGeom xmlns:a="http://schemas.openxmlformats.org/drawingml/2006/main" prst="rect">
-            <a:avLst/>
-          </a:prstGeom>
-          <a:noFill xmlns:a="http://schemas.openxmlformats.org/drawingml/2006/main"/>
-          <a:ln xmlns:a="http://schemas.openxmlformats.org/drawingml/2006/main" w="0">
-            <a:noFill/>
-            <a:prstDash val="solid"/>
-          </a:ln>
-        </p:spPr>
-        <p:txBody>
-          <a:bodyPr xmlns:a="http://schemas.openxmlformats.org/drawingml/2006/main" wrap="square" lIns="0" tIns="0" rIns="0" bIns="0" anchor="ctr">
-            <a:normAutofit fontScale="100000"/>
-          </a:bodyPr>
-          <a:lstStyle xmlns:a="http://schemas.openxmlformats.org/drawingml/2006/main"/>
-          <a:p xmlns:a="http://schemas.openxmlformats.org/drawingml/2006/main">
-            <a:pPr algn="l">
-              <a:lnSpc>
-                <a:spcPct val="100000"/>
-              </a:lnSpc>
-              <a:buNone/>
-              <a:defRPr sz="1350" b="0" i="0">
-                <a:solidFill>
-                  <a:srgbClr val="F5F0E7"/>
-                </a:solidFill>
-                <a:latin typeface="Arial"/>
-                <a:ea typeface="Arial"/>
-                <a:cs typeface="Arial"/>
-              </a:defRPr>
-            </a:pPr>
-            <a:r>
-              <a:rPr sz="1350" b="0" i="0">
-                <a:solidFill>
-                  <a:srgbClr val="F5F0E7"/>
-                </a:solidFill>
-                <a:latin typeface="Arial"/>
-                <a:ea typeface="Arial"/>
-                <a:cs typeface="Arial"/>
-              </a:rPr>
-              <a:t>Sab 7,8–9</a:t>
-            </a:r>
-          </a:p>
-        </p:txBody>
-      </p:sp>
-      <p:sp>
-        <p:nvSpPr>
-          <p:cNvPr id="15" name="card-top-rule-2">
-            <a:extLst xmlns:a="http://schemas.openxmlformats.org/drawingml/2006/main">
-              <a:ext uri="{FF2B5EF4-FFF2-40B4-BE49-F238E27FC236}">
-                <a16:creationId xmlns:a16="http://schemas.microsoft.com/office/drawing/2014/main" id="{E9E8B8FF-A149-491D-A936-E4A715C1CE28}"/>
-              </a:ext>
-            </a:extLst>
-          </p:cNvPr>
-          <p:cNvSpPr>
-            <a:spLocks xmlns:a="http://schemas.openxmlformats.org/drawingml/2006/main" noGrp="1"/>
-          </p:cNvSpPr>
-          <p:nvPr/>
-        </p:nvSpPr>
-        <p:spPr>
-          <a:xfrm xmlns:a="http://schemas.openxmlformats.org/drawingml/2006/main">
-            <a:off x="3524250" y="1971675"/>
-            <a:ext cx="2152650" cy="9525"/>
-          </a:xfrm>
-          <a:prstGeom xmlns:a="http://schemas.openxmlformats.org/drawingml/2006/main" prst="rect">
-            <a:avLst/>
-          </a:prstGeom>
-          <a:solidFill xmlns:a="http://schemas.openxmlformats.org/drawingml/2006/main">
-            <a:srgbClr val="F5F0E7">
-              <a:alpha val="55000"/>
-            </a:srgbClr>
-          </a:solidFill>
-          <a:ln xmlns:a="http://schemas.openxmlformats.org/drawingml/2006/main" w="0">
-            <a:noFill/>
-            <a:prstDash val="solid"/>
-          </a:ln>
-        </p:spPr>
-      </p:sp>
-      <p:sp>
-        <p:nvSpPr>
-          <p:cNvPr id="16" name="card-title-2">
-            <a:extLst xmlns:a="http://schemas.openxmlformats.org/drawingml/2006/main">
-              <a:ext uri="{FF2B5EF4-FFF2-40B4-BE49-F238E27FC236}">
-                <a16:creationId xmlns:a16="http://schemas.microsoft.com/office/drawing/2014/main" id="{81E24E46-89A1-4D21-8902-8C0B464B3C95}"/>
-              </a:ext>
-            </a:extLst>
-          </p:cNvPr>
-          <p:cNvSpPr>
-            <a:spLocks xmlns:a="http://schemas.openxmlformats.org/drawingml/2006/main" noGrp="1"/>
-          </p:cNvSpPr>
-          <p:nvPr/>
-        </p:nvSpPr>
-        <p:spPr>
-          <a:xfrm xmlns:a="http://schemas.openxmlformats.org/drawingml/2006/main">
-            <a:off x="3524250" y="2133600"/>
-            <a:ext cx="2152650" cy="552450"/>
-          </a:xfrm>
-          <a:prstGeom xmlns:a="http://schemas.openxmlformats.org/drawingml/2006/main" prst="rect">
-            <a:avLst/>
-          </a:prstGeom>
-          <a:noFill xmlns:a="http://schemas.openxmlformats.org/drawingml/2006/main"/>
-          <a:ln xmlns:a="http://schemas.openxmlformats.org/drawingml/2006/main" w="0">
-            <a:noFill/>
-            <a:prstDash val="solid"/>
-          </a:ln>
-        </p:spPr>
-        <p:txBody>
-          <a:bodyPr xmlns:a="http://schemas.openxmlformats.org/drawingml/2006/main" wrap="square" lIns="0" tIns="0" rIns="0" bIns="0" anchor="ctr">
-            <a:normAutofit fontScale="100000"/>
-          </a:bodyPr>
-          <a:lstStyle xmlns:a="http://schemas.openxmlformats.org/drawingml/2006/main"/>
-          <a:p xmlns:a="http://schemas.openxmlformats.org/drawingml/2006/main">
-            <a:pPr algn="l">
-              <a:lnSpc>
-                <a:spcPct val="95000"/>
-              </a:lnSpc>
-              <a:buNone/>
-              <a:defRPr sz="1500" b="0" i="0">
-                <a:solidFill>
-                  <a:srgbClr val="FFFFFF"/>
-                </a:solidFill>
-                <a:latin typeface="Arial"/>
-                <a:ea typeface="Arial"/>
-                <a:cs typeface="Arial"/>
-              </a:defRPr>
-            </a:pPr>
-            <a:r>
-              <a:rPr sz="1500" b="0" i="0">
-                <a:solidFill>
-                  <a:srgbClr val="FFFFFF"/>
-                </a:solidFill>
-                <a:latin typeface="Arial"/>
-                <a:ea typeface="Arial"/>
-                <a:cs typeface="Arial"/>
-              </a:rPr>
-              <a:t>VALE MÁS</a:t>
-            </a:r>
-          </a:p>
-        </p:txBody>
-      </p:sp>
-      <p:sp>
-        <p:nvSpPr>
-          <p:cNvPr id="17" name="card-quote-2">
-            <a:extLst xmlns:a="http://schemas.openxmlformats.org/drawingml/2006/main">
-              <a:ext uri="{FF2B5EF4-FFF2-40B4-BE49-F238E27FC236}">
-                <a16:creationId xmlns:a16="http://schemas.microsoft.com/office/drawing/2014/main" id="{49854250-C4AD-4B42-B0D7-0CEFD06C8144}"/>
-              </a:ext>
-            </a:extLst>
-          </p:cNvPr>
-          <p:cNvSpPr>
-            <a:spLocks xmlns:a="http://schemas.openxmlformats.org/drawingml/2006/main" noGrp="1"/>
-          </p:cNvSpPr>
-          <p:nvPr/>
-        </p:nvSpPr>
-        <p:spPr>
-          <a:xfrm xmlns:a="http://schemas.openxmlformats.org/drawingml/2006/main">
-            <a:off x="3524250" y="2781300"/>
-            <a:ext cx="2152650" cy="914400"/>
-          </a:xfrm>
-          <a:prstGeom xmlns:a="http://schemas.openxmlformats.org/drawingml/2006/main" prst="rect">
-            <a:avLst/>
-          </a:prstGeom>
-          <a:noFill xmlns:a="http://schemas.openxmlformats.org/drawingml/2006/main"/>
-          <a:ln xmlns:a="http://schemas.openxmlformats.org/drawingml/2006/main" w="0">
-            <a:noFill/>
-            <a:prstDash val="solid"/>
-          </a:ln>
-        </p:spPr>
-        <p:txBody>
-          <a:bodyPr xmlns:a="http://schemas.openxmlformats.org/drawingml/2006/main" wrap="square" lIns="0" tIns="0" rIns="0" bIns="0" anchor="ctr">
-            <a:normAutofit fontScale="100000"/>
-          </a:bodyPr>
-          <a:lstStyle xmlns:a="http://schemas.openxmlformats.org/drawingml/2006/main"/>
-          <a:p xmlns:a="http://schemas.openxmlformats.org/drawingml/2006/main">
-            <a:pPr algn="l">
-              <a:lnSpc>
-                <a:spcPct val="106000"/>
-              </a:lnSpc>
-              <a:buNone/>
-              <a:defRPr sz="1350" b="0" i="0">
-                <a:solidFill>
-                  <a:srgbClr val="FFF1CF"/>
-                </a:solidFill>
-                <a:latin typeface="Arial"/>
-                <a:ea typeface="Arial"/>
-                <a:cs typeface="Arial"/>
-              </a:defRPr>
-            </a:pPr>
-            <a:r>
-              <a:rPr sz="1350" b="0" i="0">
-                <a:solidFill>
-                  <a:srgbClr val="FFF1CF"/>
-                </a:solidFill>
-                <a:latin typeface="Arial"/>
-                <a:ea typeface="Arial"/>
-                <a:cs typeface="Arial"/>
-              </a:rPr>
-              <a:t>«No la comparé con la piedra más preciosa.»</a:t>
-            </a:r>
-          </a:p>
-        </p:txBody>
-      </p:sp>
-      <p:sp>
-        <p:nvSpPr>
-          <p:cNvPr id="18" name="card-accent-2">
-            <a:extLst xmlns:a="http://schemas.openxmlformats.org/drawingml/2006/main">
-              <a:ext uri="{FF2B5EF4-FFF2-40B4-BE49-F238E27FC236}">
-                <a16:creationId xmlns:a16="http://schemas.microsoft.com/office/drawing/2014/main" id="{76662847-F0F9-45E0-B373-25F04D868839}"/>
-              </a:ext>
-            </a:extLst>
-          </p:cNvPr>
-          <p:cNvSpPr>
-            <a:spLocks xmlns:a="http://schemas.openxmlformats.org/drawingml/2006/main" noGrp="1"/>
-          </p:cNvSpPr>
-          <p:nvPr/>
-        </p:nvSpPr>
-        <p:spPr>
-          <a:xfrm xmlns:a="http://schemas.openxmlformats.org/drawingml/2006/main">
-            <a:off x="3524250" y="3838575"/>
-            <a:ext cx="552450" cy="28575"/>
-          </a:xfrm>
-          <a:prstGeom xmlns:a="http://schemas.openxmlformats.org/drawingml/2006/main" prst="rect">
-            <a:avLst/>
-          </a:prstGeom>
-          <a:solidFill xmlns:a="http://schemas.openxmlformats.org/drawingml/2006/main">
-            <a:srgbClr val="D9A43B"/>
-          </a:solidFill>
-          <a:ln xmlns:a="http://schemas.openxmlformats.org/drawingml/2006/main" w="0">
-            <a:noFill/>
-            <a:prstDash val="solid"/>
-          </a:ln>
-        </p:spPr>
-      </p:sp>
-      <p:sp>
-        <p:nvSpPr>
-          <p:cNvPr id="19" name="card-body-2">
-            <a:extLst xmlns:a="http://schemas.openxmlformats.org/drawingml/2006/main">
-              <a:ext uri="{FF2B5EF4-FFF2-40B4-BE49-F238E27FC236}">
-                <a16:creationId xmlns:a16="http://schemas.microsoft.com/office/drawing/2014/main" id="{471DAA44-9198-4DA5-8F91-7CA857C5F2AC}"/>
-              </a:ext>
-            </a:extLst>
-          </p:cNvPr>
-          <p:cNvSpPr>
-            <a:spLocks xmlns:a="http://schemas.openxmlformats.org/drawingml/2006/main" noGrp="1"/>
-          </p:cNvSpPr>
-          <p:nvPr/>
-        </p:nvSpPr>
-        <p:spPr>
-          <a:xfrm xmlns:a="http://schemas.openxmlformats.org/drawingml/2006/main">
-            <a:off x="3524250" y="4038600"/>
-            <a:ext cx="2152650" cy="990600"/>
-          </a:xfrm>
-          <a:prstGeom xmlns:a="http://schemas.openxmlformats.org/drawingml/2006/main" prst="rect">
-            <a:avLst/>
-          </a:prstGeom>
-          <a:noFill xmlns:a="http://schemas.openxmlformats.org/drawingml/2006/main"/>
-          <a:ln xmlns:a="http://schemas.openxmlformats.org/drawingml/2006/main" w="0">
-            <a:noFill/>
-            <a:prstDash val="solid"/>
-          </a:ln>
-        </p:spPr>
-        <p:txBody>
-          <a:bodyPr xmlns:a="http://schemas.openxmlformats.org/drawingml/2006/main" wrap="square" lIns="0" tIns="0" rIns="0" bIns="0" anchor="ctr">
-            <a:normAutofit fontScale="100000"/>
-          </a:bodyPr>
-          <a:lstStyle xmlns:a="http://schemas.openxmlformats.org/drawingml/2006/main"/>
-          <a:p xmlns:a="http://schemas.openxmlformats.org/drawingml/2006/main">
-            <a:pPr algn="l">
-              <a:lnSpc>
-                <a:spcPct val="108000"/>
-              </a:lnSpc>
-              <a:buNone/>
-              <a:defRPr sz="1200" b="0" i="0">
-                <a:solidFill>
-                  <a:srgbClr val="F5F0E7"/>
-                </a:solidFill>
-                <a:latin typeface="Arial"/>
-                <a:ea typeface="Arial"/>
-                <a:cs typeface="Arial"/>
-              </a:defRPr>
-            </a:pPr>
-            <a:r>
-              <a:rPr sz="1200" b="0" i="0">
-                <a:solidFill>
-                  <a:srgbClr val="F5F0E7"/>
-                </a:solidFill>
-                <a:latin typeface="Arial"/>
-                <a:ea typeface="Arial"/>
-                <a:cs typeface="Arial"/>
-              </a:rPr>
-              <a:t>La sabiduría educa el deseo: lo valioso no siempre es lo más visible ni inmediato.</a:t>
-            </a:r>
-          </a:p>
-        </p:txBody>
-      </p:sp>
-      <p:sp>
-        <p:nvSpPr>
-          <p:cNvPr id="20" name="card-3">
-            <a:extLst xmlns:a="http://schemas.openxmlformats.org/drawingml/2006/main">
-              <a:ext uri="{FF2B5EF4-FFF2-40B4-BE49-F238E27FC236}">
-                <a16:creationId xmlns:a16="http://schemas.microsoft.com/office/drawing/2014/main" id="{EC908063-8997-448E-865B-DF7E86E64C50}"/>
-              </a:ext>
-            </a:extLst>
-          </p:cNvPr>
-          <p:cNvSpPr>
-            <a:spLocks xmlns:a="http://schemas.openxmlformats.org/drawingml/2006/main" noGrp="1"/>
-          </p:cNvSpPr>
-          <p:nvPr/>
-        </p:nvSpPr>
-        <p:spPr>
-          <a:xfrm xmlns:a="http://schemas.openxmlformats.org/drawingml/2006/main">
-            <a:off x="6134100" y="1381125"/>
-            <a:ext cx="2533650" cy="3867150"/>
-          </a:xfrm>
-          <a:prstGeom xmlns:a="http://schemas.openxmlformats.org/drawingml/2006/main" prst="roundRect">
-            <a:avLst>
-              <a:gd name="adj" fmla="val 4511"/>
-            </a:avLst>
-          </a:prstGeom>
-          <a:solidFill xmlns:a="http://schemas.openxmlformats.org/drawingml/2006/main">
-            <a:srgbClr val="8A6048"/>
-          </a:solidFill>
-          <a:ln xmlns:a="http://schemas.openxmlformats.org/drawingml/2006/main" w="9525">
-            <a:solidFill>
-              <a:srgbClr val="D9A43B"/>
-            </a:solidFill>
-            <a:prstDash val="solid"/>
-          </a:ln>
-        </p:spPr>
-      </p:sp>
-      <p:sp>
-        <p:nvSpPr>
-          <p:cNvPr id="21" name="card-index-3">
-            <a:extLst xmlns:a="http://schemas.openxmlformats.org/drawingml/2006/main">
-              <a:ext uri="{FF2B5EF4-FFF2-40B4-BE49-F238E27FC236}">
-                <a16:creationId xmlns:a16="http://schemas.microsoft.com/office/drawing/2014/main" id="{DA5E7A52-1E2D-4D8D-AF57-59364C35B285}"/>
-              </a:ext>
-            </a:extLst>
-          </p:cNvPr>
-          <p:cNvSpPr>
-            <a:spLocks xmlns:a="http://schemas.openxmlformats.org/drawingml/2006/main" noGrp="1"/>
-          </p:cNvSpPr>
-          <p:nvPr/>
-        </p:nvSpPr>
-        <p:spPr>
-          <a:xfrm xmlns:a="http://schemas.openxmlformats.org/drawingml/2006/main">
-            <a:off x="6324600" y="1571625"/>
-            <a:ext cx="400050" cy="266700"/>
-          </a:xfrm>
-          <a:prstGeom xmlns:a="http://schemas.openxmlformats.org/drawingml/2006/main" prst="rect">
-            <a:avLst/>
-          </a:prstGeom>
-          <a:noFill xmlns:a="http://schemas.openxmlformats.org/drawingml/2006/main"/>
-          <a:ln xmlns:a="http://schemas.openxmlformats.org/drawingml/2006/main" w="0">
-            <a:noFill/>
-            <a:prstDash val="solid"/>
-          </a:ln>
-        </p:spPr>
-        <p:txBody>
-          <a:bodyPr xmlns:a="http://schemas.openxmlformats.org/drawingml/2006/main" wrap="square" lIns="0" tIns="0" rIns="0" bIns="0" anchor="ctr">
-            <a:normAutofit fontScale="100000"/>
-          </a:bodyPr>
-          <a:lstStyle xmlns:a="http://schemas.openxmlformats.org/drawingml/2006/main"/>
-          <a:p xmlns:a="http://schemas.openxmlformats.org/drawingml/2006/main">
-            <a:pPr algn="l">
-              <a:lnSpc>
-                <a:spcPct val="100000"/>
-              </a:lnSpc>
-              <a:buNone/>
-              <a:defRPr sz="1050" b="0" i="0">
-                <a:solidFill>
-                  <a:srgbClr val="F0C766"/>
-                </a:solidFill>
-                <a:latin typeface="Arial"/>
-                <a:ea typeface="Arial"/>
-                <a:cs typeface="Arial"/>
-              </a:defRPr>
-            </a:pPr>
-            <a:r>
-              <a:rPr sz="1050" b="0" i="0">
-                <a:solidFill>
-                  <a:srgbClr val="F0C766"/>
-                </a:solidFill>
-                <a:latin typeface="Arial"/>
-                <a:ea typeface="Arial"/>
-                <a:cs typeface="Arial"/>
-              </a:rPr>
-              <a:t>03</a:t>
-            </a:r>
-          </a:p>
-        </p:txBody>
-      </p:sp>
-      <p:sp>
-        <p:nvSpPr>
-          <p:cNvPr id="22" name="card-ref-3">
-            <a:extLst xmlns:a="http://schemas.openxmlformats.org/drawingml/2006/main">
-              <a:ext uri="{FF2B5EF4-FFF2-40B4-BE49-F238E27FC236}">
-                <a16:creationId xmlns:a16="http://schemas.microsoft.com/office/drawing/2014/main" id="{3E620FCF-37E4-4D12-804B-76EBCE15FB31}"/>
-              </a:ext>
-            </a:extLst>
-          </p:cNvPr>
-          <p:cNvSpPr>
-            <a:spLocks xmlns:a="http://schemas.openxmlformats.org/drawingml/2006/main" noGrp="1"/>
-          </p:cNvSpPr>
-          <p:nvPr/>
-        </p:nvSpPr>
-        <p:spPr>
-          <a:xfrm xmlns:a="http://schemas.openxmlformats.org/drawingml/2006/main">
-            <a:off x="6819900" y="1552575"/>
-            <a:ext cx="1619250" cy="285750"/>
-          </a:xfrm>
-          <a:prstGeom xmlns:a="http://schemas.openxmlformats.org/drawingml/2006/main" prst="rect">
-            <a:avLst/>
-          </a:prstGeom>
-          <a:noFill xmlns:a="http://schemas.openxmlformats.org/drawingml/2006/main"/>
-          <a:ln xmlns:a="http://schemas.openxmlformats.org/drawingml/2006/main" w="0">
-            <a:noFill/>
-            <a:prstDash val="solid"/>
-          </a:ln>
-        </p:spPr>
-        <p:txBody>
-          <a:bodyPr xmlns:a="http://schemas.openxmlformats.org/drawingml/2006/main" wrap="square" lIns="0" tIns="0" rIns="0" bIns="0" anchor="ctr">
-            <a:normAutofit fontScale="100000"/>
-          </a:bodyPr>
-          <a:lstStyle xmlns:a="http://schemas.openxmlformats.org/drawingml/2006/main"/>
-          <a:p xmlns:a="http://schemas.openxmlformats.org/drawingml/2006/main">
-            <a:pPr algn="l">
-              <a:lnSpc>
-                <a:spcPct val="100000"/>
-              </a:lnSpc>
-              <a:buNone/>
-              <a:defRPr sz="1350" b="0" i="0">
-                <a:solidFill>
-                  <a:srgbClr val="F5F0E7"/>
-                </a:solidFill>
-                <a:latin typeface="Arial"/>
-                <a:ea typeface="Arial"/>
-                <a:cs typeface="Arial"/>
-              </a:defRPr>
-            </a:pPr>
-            <a:r>
-              <a:rPr sz="1350" b="0" i="0">
-                <a:solidFill>
-                  <a:srgbClr val="F5F0E7"/>
-                </a:solidFill>
-                <a:latin typeface="Arial"/>
-                <a:ea typeface="Arial"/>
-                <a:cs typeface="Arial"/>
-              </a:rPr>
-              <a:t>Lc 24,31–32</a:t>
-            </a:r>
-          </a:p>
-        </p:txBody>
-      </p:sp>
-      <p:sp>
-        <p:nvSpPr>
-          <p:cNvPr id="23" name="card-top-rule-3">
-            <a:extLst xmlns:a="http://schemas.openxmlformats.org/drawingml/2006/main">
-              <a:ext uri="{FF2B5EF4-FFF2-40B4-BE49-F238E27FC236}">
-                <a16:creationId xmlns:a16="http://schemas.microsoft.com/office/drawing/2014/main" id="{5BDABD18-DE7B-414E-866D-52681E2E9618}"/>
-              </a:ext>
-            </a:extLst>
-          </p:cNvPr>
-          <p:cNvSpPr>
-            <a:spLocks xmlns:a="http://schemas.openxmlformats.org/drawingml/2006/main" noGrp="1"/>
-          </p:cNvSpPr>
-          <p:nvPr/>
-        </p:nvSpPr>
-        <p:spPr>
-          <a:xfrm xmlns:a="http://schemas.openxmlformats.org/drawingml/2006/main">
-            <a:off x="6324600" y="1971675"/>
-            <a:ext cx="2152650" cy="9525"/>
-          </a:xfrm>
-          <a:prstGeom xmlns:a="http://schemas.openxmlformats.org/drawingml/2006/main" prst="rect">
-            <a:avLst/>
-          </a:prstGeom>
-          <a:solidFill xmlns:a="http://schemas.openxmlformats.org/drawingml/2006/main">
-            <a:srgbClr val="F5F0E7">
-              <a:alpha val="55000"/>
-            </a:srgbClr>
-          </a:solidFill>
-          <a:ln xmlns:a="http://schemas.openxmlformats.org/drawingml/2006/main" w="0">
-            <a:noFill/>
-            <a:prstDash val="solid"/>
-          </a:ln>
-        </p:spPr>
-      </p:sp>
-      <p:sp>
-        <p:nvSpPr>
-          <p:cNvPr id="24" name="card-title-3">
-            <a:extLst xmlns:a="http://schemas.openxmlformats.org/drawingml/2006/main">
-              <a:ext uri="{FF2B5EF4-FFF2-40B4-BE49-F238E27FC236}">
-                <a16:creationId xmlns:a16="http://schemas.microsoft.com/office/drawing/2014/main" id="{9FB0E149-AE58-4BDE-AC38-FF3C7BA95835}"/>
-              </a:ext>
-            </a:extLst>
-          </p:cNvPr>
-          <p:cNvSpPr>
-            <a:spLocks xmlns:a="http://schemas.openxmlformats.org/drawingml/2006/main" noGrp="1"/>
-          </p:cNvSpPr>
-          <p:nvPr/>
-        </p:nvSpPr>
-        <p:spPr>
-          <a:xfrm xmlns:a="http://schemas.openxmlformats.org/drawingml/2006/main">
-            <a:off x="6324600" y="2133600"/>
-            <a:ext cx="2152650" cy="552450"/>
-          </a:xfrm>
-          <a:prstGeom xmlns:a="http://schemas.openxmlformats.org/drawingml/2006/main" prst="rect">
-            <a:avLst/>
-          </a:prstGeom>
-          <a:noFill xmlns:a="http://schemas.openxmlformats.org/drawingml/2006/main"/>
-          <a:ln xmlns:a="http://schemas.openxmlformats.org/drawingml/2006/main" w="0">
-            <a:noFill/>
-            <a:prstDash val="solid"/>
-          </a:ln>
-        </p:spPr>
-        <p:txBody>
-          <a:bodyPr xmlns:a="http://schemas.openxmlformats.org/drawingml/2006/main" wrap="square" lIns="0" tIns="0" rIns="0" bIns="0" anchor="ctr">
-            <a:normAutofit fontScale="100000"/>
-          </a:bodyPr>
-          <a:lstStyle xmlns:a="http://schemas.openxmlformats.org/drawingml/2006/main"/>
-          <a:p xmlns:a="http://schemas.openxmlformats.org/drawingml/2006/main">
-            <a:pPr algn="l">
-              <a:lnSpc>
-                <a:spcPct val="95000"/>
-              </a:lnSpc>
-              <a:buNone/>
-              <a:defRPr sz="1500" b="0" i="0">
-                <a:solidFill>
-                  <a:srgbClr val="FFFFFF"/>
-                </a:solidFill>
-                <a:latin typeface="Arial"/>
-                <a:ea typeface="Arial"/>
-                <a:cs typeface="Arial"/>
-              </a:defRPr>
-            </a:pPr>
-            <a:r>
-              <a:rPr sz="1500" b="0" i="0">
-                <a:solidFill>
-                  <a:srgbClr val="FFFFFF"/>
-                </a:solidFill>
-                <a:latin typeface="Arial"/>
-                <a:ea typeface="Arial"/>
-                <a:cs typeface="Arial"/>
-              </a:rPr>
-              <a:t>SE ABREN LOS OJOS</a:t>
-            </a:r>
-          </a:p>
-        </p:txBody>
-      </p:sp>
-      <p:sp>
-        <p:nvSpPr>
-          <p:cNvPr id="25" name="card-quote-3">
-            <a:extLst xmlns:a="http://schemas.openxmlformats.org/drawingml/2006/main">
-              <a:ext uri="{FF2B5EF4-FFF2-40B4-BE49-F238E27FC236}">
-                <a16:creationId xmlns:a16="http://schemas.microsoft.com/office/drawing/2014/main" id="{D70A724B-E0B1-4613-9BA6-928283F316A6}"/>
-              </a:ext>
-            </a:extLst>
-          </p:cNvPr>
-          <p:cNvSpPr>
-            <a:spLocks xmlns:a="http://schemas.openxmlformats.org/drawingml/2006/main" noGrp="1"/>
-          </p:cNvSpPr>
-          <p:nvPr/>
-        </p:nvSpPr>
-        <p:spPr>
-          <a:xfrm xmlns:a="http://schemas.openxmlformats.org/drawingml/2006/main">
-            <a:off x="6324600" y="2781300"/>
-            <a:ext cx="2152650" cy="914400"/>
-          </a:xfrm>
-          <a:prstGeom xmlns:a="http://schemas.openxmlformats.org/drawingml/2006/main" prst="rect">
-            <a:avLst/>
-          </a:prstGeom>
-          <a:noFill xmlns:a="http://schemas.openxmlformats.org/drawingml/2006/main"/>
-          <a:ln xmlns:a="http://schemas.openxmlformats.org/drawingml/2006/main" w="0">
-            <a:noFill/>
-            <a:prstDash val="solid"/>
-          </a:ln>
-        </p:spPr>
-        <p:txBody>
-          <a:bodyPr xmlns:a="http://schemas.openxmlformats.org/drawingml/2006/main" wrap="square" lIns="0" tIns="0" rIns="0" bIns="0" anchor="ctr">
-            <a:normAutofit fontScale="100000"/>
-          </a:bodyPr>
-          <a:lstStyle xmlns:a="http://schemas.openxmlformats.org/drawingml/2006/main"/>
-          <a:p xmlns:a="http://schemas.openxmlformats.org/drawingml/2006/main">
-            <a:pPr algn="l">
-              <a:lnSpc>
-                <a:spcPct val="106000"/>
-              </a:lnSpc>
-              <a:buNone/>
-              <a:defRPr sz="1350" b="0" i="0">
-                <a:solidFill>
-                  <a:srgbClr val="FFF1CF"/>
-                </a:solidFill>
-                <a:latin typeface="Arial"/>
-                <a:ea typeface="Arial"/>
-                <a:cs typeface="Arial"/>
-              </a:defRPr>
-            </a:pPr>
-            <a:r>
-              <a:rPr sz="1350" b="0" i="0">
-                <a:solidFill>
-                  <a:srgbClr val="FFF1CF"/>
-                </a:solidFill>
-                <a:latin typeface="Arial"/>
-                <a:ea typeface="Arial"/>
-                <a:cs typeface="Arial"/>
-              </a:rPr>
-              <a:t>«Se les abrieron los ojos y lo reconocieron.»</a:t>
-            </a:r>
-          </a:p>
-        </p:txBody>
-      </p:sp>
-      <p:sp>
-        <p:nvSpPr>
-          <p:cNvPr id="26" name="card-accent-3">
-            <a:extLst xmlns:a="http://schemas.openxmlformats.org/drawingml/2006/main">
-              <a:ext uri="{FF2B5EF4-FFF2-40B4-BE49-F238E27FC236}">
-                <a16:creationId xmlns:a16="http://schemas.microsoft.com/office/drawing/2014/main" id="{1263E266-22F0-4CF9-9820-7D60EDEF73E5}"/>
-              </a:ext>
-            </a:extLst>
-          </p:cNvPr>
-          <p:cNvSpPr>
-            <a:spLocks xmlns:a="http://schemas.openxmlformats.org/drawingml/2006/main" noGrp="1"/>
-          </p:cNvSpPr>
-          <p:nvPr/>
-        </p:nvSpPr>
-        <p:spPr>
-          <a:xfrm xmlns:a="http://schemas.openxmlformats.org/drawingml/2006/main">
-            <a:off x="6324600" y="3838575"/>
-            <a:ext cx="552450" cy="28575"/>
-          </a:xfrm>
-          <a:prstGeom xmlns:a="http://schemas.openxmlformats.org/drawingml/2006/main" prst="rect">
-            <a:avLst/>
-          </a:prstGeom>
-          <a:solidFill xmlns:a="http://schemas.openxmlformats.org/drawingml/2006/main">
-            <a:srgbClr val="D9A43B"/>
-          </a:solidFill>
-          <a:ln xmlns:a="http://schemas.openxmlformats.org/drawingml/2006/main" w="0">
-            <a:noFill/>
-            <a:prstDash val="solid"/>
-          </a:ln>
-        </p:spPr>
-      </p:sp>
-      <p:sp>
-        <p:nvSpPr>
-          <p:cNvPr id="27" name="card-body-3">
-            <a:extLst xmlns:a="http://schemas.openxmlformats.org/drawingml/2006/main">
-              <a:ext uri="{FF2B5EF4-FFF2-40B4-BE49-F238E27FC236}">
-                <a16:creationId xmlns:a16="http://schemas.microsoft.com/office/drawing/2014/main" id="{0F0A3425-60AC-4F25-8C2A-30AE571C4CFD}"/>
-              </a:ext>
-            </a:extLst>
-          </p:cNvPr>
-          <p:cNvSpPr>
-            <a:spLocks xmlns:a="http://schemas.openxmlformats.org/drawingml/2006/main" noGrp="1"/>
-          </p:cNvSpPr>
-          <p:nvPr/>
-        </p:nvSpPr>
-        <p:spPr>
-          <a:xfrm xmlns:a="http://schemas.openxmlformats.org/drawingml/2006/main">
-            <a:off x="6324600" y="4038600"/>
-            <a:ext cx="2152650" cy="990600"/>
-          </a:xfrm>
-          <a:prstGeom xmlns:a="http://schemas.openxmlformats.org/drawingml/2006/main" prst="rect">
-            <a:avLst/>
-          </a:prstGeom>
-          <a:noFill xmlns:a="http://schemas.openxmlformats.org/drawingml/2006/main"/>
-          <a:ln xmlns:a="http://schemas.openxmlformats.org/drawingml/2006/main" w="0">
-            <a:noFill/>
-            <a:prstDash val="solid"/>
-          </a:ln>
-        </p:spPr>
-        <p:txBody>
-          <a:bodyPr xmlns:a="http://schemas.openxmlformats.org/drawingml/2006/main" wrap="square" lIns="0" tIns="0" rIns="0" bIns="0" anchor="ctr">
-            <a:normAutofit fontScale="100000"/>
-          </a:bodyPr>
-          <a:lstStyle xmlns:a="http://schemas.openxmlformats.org/drawingml/2006/main"/>
-          <a:p xmlns:a="http://schemas.openxmlformats.org/drawingml/2006/main">
-            <a:pPr algn="l">
-              <a:lnSpc>
-                <a:spcPct val="108000"/>
-              </a:lnSpc>
-              <a:buNone/>
-              <a:defRPr sz="1200" b="0" i="0">
-                <a:solidFill>
-                  <a:srgbClr val="F5F0E7"/>
-                </a:solidFill>
-                <a:latin typeface="Arial"/>
-                <a:ea typeface="Arial"/>
-                <a:cs typeface="Arial"/>
-              </a:defRPr>
-            </a:pPr>
-            <a:r>
-              <a:rPr sz="1200" b="0" i="0">
-                <a:solidFill>
-                  <a:srgbClr val="F5F0E7"/>
-                </a:solidFill>
-                <a:latin typeface="Arial"/>
-                <a:ea typeface="Arial"/>
-                <a:cs typeface="Arial"/>
-              </a:rPr>
-              <a:t>En Emaús comprenden después que Jesús ya caminaba con ellos. La memoria se vuelve reconocimiento.</a:t>
-            </a:r>
-          </a:p>
-        </p:txBody>
-      </p:sp>
-      <p:sp>
-        <p:nvSpPr>
-          <p:cNvPr id="28" name="card-4">
-            <a:extLst xmlns:a="http://schemas.openxmlformats.org/drawingml/2006/main">
-              <a:ext uri="{FF2B5EF4-FFF2-40B4-BE49-F238E27FC236}">
-                <a16:creationId xmlns:a16="http://schemas.microsoft.com/office/drawing/2014/main" id="{AA19174D-A4BB-4D65-9649-BDA0672A7B72}"/>
-              </a:ext>
-            </a:extLst>
-          </p:cNvPr>
-          <p:cNvSpPr>
-            <a:spLocks xmlns:a="http://schemas.openxmlformats.org/drawingml/2006/main" noGrp="1"/>
-          </p:cNvSpPr>
-          <p:nvPr/>
-        </p:nvSpPr>
-        <p:spPr>
-          <a:xfrm xmlns:a="http://schemas.openxmlformats.org/drawingml/2006/main">
-            <a:off x="8934450" y="1381125"/>
-            <a:ext cx="2533650" cy="3867150"/>
-          </a:xfrm>
-          <a:prstGeom xmlns:a="http://schemas.openxmlformats.org/drawingml/2006/main" prst="roundRect">
-            <a:avLst>
-              <a:gd name="adj" fmla="val 4511"/>
-            </a:avLst>
-          </a:prstGeom>
-          <a:solidFill xmlns:a="http://schemas.openxmlformats.org/drawingml/2006/main">
-            <a:srgbClr val="5C5538"/>
-          </a:solidFill>
-          <a:ln xmlns:a="http://schemas.openxmlformats.org/drawingml/2006/main" w="9525">
-            <a:solidFill>
-              <a:srgbClr val="D9A43B"/>
-            </a:solidFill>
-            <a:prstDash val="solid"/>
-          </a:ln>
-        </p:spPr>
-      </p:sp>
-      <p:sp>
-        <p:nvSpPr>
-          <p:cNvPr id="29" name="card-index-4">
-            <a:extLst xmlns:a="http://schemas.openxmlformats.org/drawingml/2006/main">
-              <a:ext uri="{FF2B5EF4-FFF2-40B4-BE49-F238E27FC236}">
-                <a16:creationId xmlns:a16="http://schemas.microsoft.com/office/drawing/2014/main" id="{751407A3-A342-48F5-AA53-952A614B8EA7}"/>
-              </a:ext>
-            </a:extLst>
-          </p:cNvPr>
-          <p:cNvSpPr>
-            <a:spLocks xmlns:a="http://schemas.openxmlformats.org/drawingml/2006/main" noGrp="1"/>
-          </p:cNvSpPr>
-          <p:nvPr/>
-        </p:nvSpPr>
-        <p:spPr>
-          <a:xfrm xmlns:a="http://schemas.openxmlformats.org/drawingml/2006/main">
-            <a:off x="9124950" y="1571625"/>
-            <a:ext cx="400050" cy="266700"/>
-          </a:xfrm>
-          <a:prstGeom xmlns:a="http://schemas.openxmlformats.org/drawingml/2006/main" prst="rect">
-            <a:avLst/>
-          </a:prstGeom>
-          <a:noFill xmlns:a="http://schemas.openxmlformats.org/drawingml/2006/main"/>
-          <a:ln xmlns:a="http://schemas.openxmlformats.org/drawingml/2006/main" w="0">
-            <a:noFill/>
-            <a:prstDash val="solid"/>
-          </a:ln>
-        </p:spPr>
-        <p:txBody>
-          <a:bodyPr xmlns:a="http://schemas.openxmlformats.org/drawingml/2006/main" wrap="square" lIns="0" tIns="0" rIns="0" bIns="0" anchor="ctr">
-            <a:normAutofit fontScale="100000"/>
-          </a:bodyPr>
-          <a:lstStyle xmlns:a="http://schemas.openxmlformats.org/drawingml/2006/main"/>
-          <a:p xmlns:a="http://schemas.openxmlformats.org/drawingml/2006/main">
-            <a:pPr algn="l">
-              <a:lnSpc>
-                <a:spcPct val="100000"/>
-              </a:lnSpc>
-              <a:buNone/>
-              <a:defRPr sz="1050" b="0" i="0">
-                <a:solidFill>
-                  <a:srgbClr val="F0C766"/>
-                </a:solidFill>
-                <a:latin typeface="Arial"/>
-                <a:ea typeface="Arial"/>
-                <a:cs typeface="Arial"/>
-              </a:defRPr>
-            </a:pPr>
-            <a:r>
-              <a:rPr sz="1050" b="0" i="0">
-                <a:solidFill>
-                  <a:srgbClr val="F0C766"/>
-                </a:solidFill>
-                <a:latin typeface="Arial"/>
-                <a:ea typeface="Arial"/>
-                <a:cs typeface="Arial"/>
-              </a:rPr>
-              <a:t>04</a:t>
-            </a:r>
-          </a:p>
-        </p:txBody>
-      </p:sp>
-      <p:sp>
-        <p:nvSpPr>
-          <p:cNvPr id="30" name="card-ref-4">
-            <a:extLst xmlns:a="http://schemas.openxmlformats.org/drawingml/2006/main">
-              <a:ext uri="{FF2B5EF4-FFF2-40B4-BE49-F238E27FC236}">
-                <a16:creationId xmlns:a16="http://schemas.microsoft.com/office/drawing/2014/main" id="{91A12B5C-9F29-4211-ADD7-248C00853CA1}"/>
-              </a:ext>
-            </a:extLst>
-          </p:cNvPr>
-          <p:cNvSpPr>
-            <a:spLocks xmlns:a="http://schemas.openxmlformats.org/drawingml/2006/main" noGrp="1"/>
-          </p:cNvSpPr>
-          <p:nvPr/>
-        </p:nvSpPr>
-        <p:spPr>
-          <a:xfrm xmlns:a="http://schemas.openxmlformats.org/drawingml/2006/main">
-            <a:off x="9620250" y="1552575"/>
-            <a:ext cx="1619250" cy="285750"/>
-          </a:xfrm>
-          <a:prstGeom xmlns:a="http://schemas.openxmlformats.org/drawingml/2006/main" prst="rect">
-            <a:avLst/>
-          </a:prstGeom>
-          <a:noFill xmlns:a="http://schemas.openxmlformats.org/drawingml/2006/main"/>
-          <a:ln xmlns:a="http://schemas.openxmlformats.org/drawingml/2006/main" w="0">
-            <a:noFill/>
-            <a:prstDash val="solid"/>
-          </a:ln>
-        </p:spPr>
-        <p:txBody>
-          <a:bodyPr xmlns:a="http://schemas.openxmlformats.org/drawingml/2006/main" wrap="square" lIns="0" tIns="0" rIns="0" bIns="0" anchor="ctr">
-            <a:normAutofit fontScale="100000"/>
-          </a:bodyPr>
-          <a:lstStyle xmlns:a="http://schemas.openxmlformats.org/drawingml/2006/main"/>
-          <a:p xmlns:a="http://schemas.openxmlformats.org/drawingml/2006/main">
-            <a:pPr algn="l">
-              <a:lnSpc>
-                <a:spcPct val="100000"/>
-              </a:lnSpc>
-              <a:buNone/>
-              <a:defRPr sz="1350" b="0" i="0">
-                <a:solidFill>
-                  <a:srgbClr val="F5F0E7"/>
-                </a:solidFill>
-                <a:latin typeface="Arial"/>
-                <a:ea typeface="Arial"/>
-                <a:cs typeface="Arial"/>
-              </a:defRPr>
-            </a:pPr>
-            <a:r>
-              <a:rPr sz="1350" b="0" i="0">
-                <a:solidFill>
-                  <a:srgbClr val="F5F0E7"/>
-                </a:solidFill>
-                <a:latin typeface="Arial"/>
-                <a:ea typeface="Arial"/>
-                <a:cs typeface="Arial"/>
-              </a:rPr>
-              <a:t>1 Tes 5,21</a:t>
-            </a:r>
-          </a:p>
-        </p:txBody>
-      </p:sp>
-      <p:sp>
-        <p:nvSpPr>
-          <p:cNvPr id="31" name="card-top-rule-4">
-            <a:extLst xmlns:a="http://schemas.openxmlformats.org/drawingml/2006/main">
-              <a:ext uri="{FF2B5EF4-FFF2-40B4-BE49-F238E27FC236}">
-                <a16:creationId xmlns:a16="http://schemas.microsoft.com/office/drawing/2014/main" id="{13523E80-8254-474D-958C-972E093D00C1}"/>
-              </a:ext>
-            </a:extLst>
-          </p:cNvPr>
-          <p:cNvSpPr>
-            <a:spLocks xmlns:a="http://schemas.openxmlformats.org/drawingml/2006/main" noGrp="1"/>
-          </p:cNvSpPr>
-          <p:nvPr/>
-        </p:nvSpPr>
-        <p:spPr>
-          <a:xfrm xmlns:a="http://schemas.openxmlformats.org/drawingml/2006/main">
-            <a:off x="9124950" y="1971675"/>
-            <a:ext cx="2152650" cy="9525"/>
-          </a:xfrm>
-          <a:prstGeom xmlns:a="http://schemas.openxmlformats.org/drawingml/2006/main" prst="rect">
-            <a:avLst/>
-          </a:prstGeom>
-          <a:solidFill xmlns:a="http://schemas.openxmlformats.org/drawingml/2006/main">
-            <a:srgbClr val="F5F0E7">
-              <a:alpha val="55000"/>
-            </a:srgbClr>
-          </a:solidFill>
-          <a:ln xmlns:a="http://schemas.openxmlformats.org/drawingml/2006/main" w="0">
-            <a:noFill/>
-            <a:prstDash val="solid"/>
-          </a:ln>
-        </p:spPr>
-      </p:sp>
-      <p:sp>
-        <p:nvSpPr>
-          <p:cNvPr id="32" name="card-title-4">
-            <a:extLst xmlns:a="http://schemas.openxmlformats.org/drawingml/2006/main">
-              <a:ext uri="{FF2B5EF4-FFF2-40B4-BE49-F238E27FC236}">
-                <a16:creationId xmlns:a16="http://schemas.microsoft.com/office/drawing/2014/main" id="{3EE7472C-02E1-4BE4-8714-7F1D970CD30E}"/>
-              </a:ext>
-            </a:extLst>
-          </p:cNvPr>
-          <p:cNvSpPr>
-            <a:spLocks xmlns:a="http://schemas.openxmlformats.org/drawingml/2006/main" noGrp="1"/>
-          </p:cNvSpPr>
-          <p:nvPr/>
-        </p:nvSpPr>
-        <p:spPr>
-          <a:xfrm xmlns:a="http://schemas.openxmlformats.org/drawingml/2006/main">
-            <a:off x="9124950" y="2133600"/>
-            <a:ext cx="2152650" cy="552450"/>
-          </a:xfrm>
-          <a:prstGeom xmlns:a="http://schemas.openxmlformats.org/drawingml/2006/main" prst="rect">
-            <a:avLst/>
-          </a:prstGeom>
-          <a:noFill xmlns:a="http://schemas.openxmlformats.org/drawingml/2006/main"/>
-          <a:ln xmlns:a="http://schemas.openxmlformats.org/drawingml/2006/main" w="0">
-            <a:noFill/>
-            <a:prstDash val="solid"/>
-          </a:ln>
-        </p:spPr>
-        <p:txBody>
-          <a:bodyPr xmlns:a="http://schemas.openxmlformats.org/drawingml/2006/main" wrap="square" lIns="0" tIns="0" rIns="0" bIns="0" anchor="ctr">
-            <a:normAutofit fontScale="100000"/>
-          </a:bodyPr>
-          <a:lstStyle xmlns:a="http://schemas.openxmlformats.org/drawingml/2006/main"/>
-          <a:p xmlns:a="http://schemas.openxmlformats.org/drawingml/2006/main">
-            <a:pPr algn="l">
-              <a:lnSpc>
-                <a:spcPct val="95000"/>
-              </a:lnSpc>
-              <a:buNone/>
-              <a:defRPr sz="1500" b="0" i="0">
-                <a:solidFill>
-                  <a:srgbClr val="FFFFFF"/>
-                </a:solidFill>
-                <a:latin typeface="Arial"/>
-                <a:ea typeface="Arial"/>
-                <a:cs typeface="Arial"/>
-              </a:defRPr>
-            </a:pPr>
-            <a:r>
-              <a:rPr sz="1500" b="0" i="0">
-                <a:solidFill>
-                  <a:srgbClr val="FFFFFF"/>
-                </a:solidFill>
-                <a:latin typeface="Arial"/>
-                <a:ea typeface="Arial"/>
-                <a:cs typeface="Arial"/>
-              </a:rPr>
-              <a:t>DISCERNIR LA RED</a:t>
-            </a:r>
-          </a:p>
-        </p:txBody>
-      </p:sp>
-      <p:sp>
-        <p:nvSpPr>
-          <p:cNvPr id="33" name="card-quote-4">
-            <a:extLst xmlns:a="http://schemas.openxmlformats.org/drawingml/2006/main">
-              <a:ext uri="{FF2B5EF4-FFF2-40B4-BE49-F238E27FC236}">
-                <a16:creationId xmlns:a16="http://schemas.microsoft.com/office/drawing/2014/main" id="{993D5F3A-D1CE-4641-8577-573A914F1275}"/>
-              </a:ext>
-            </a:extLst>
-          </p:cNvPr>
-          <p:cNvSpPr>
-            <a:spLocks xmlns:a="http://schemas.openxmlformats.org/drawingml/2006/main" noGrp="1"/>
-          </p:cNvSpPr>
-          <p:nvPr/>
-        </p:nvSpPr>
-        <p:spPr>
-          <a:xfrm xmlns:a="http://schemas.openxmlformats.org/drawingml/2006/main">
-            <a:off x="9124950" y="2781300"/>
-            <a:ext cx="2152650" cy="914400"/>
-          </a:xfrm>
-          <a:prstGeom xmlns:a="http://schemas.openxmlformats.org/drawingml/2006/main" prst="rect">
-            <a:avLst/>
-          </a:prstGeom>
-          <a:noFill xmlns:a="http://schemas.openxmlformats.org/drawingml/2006/main"/>
-          <a:ln xmlns:a="http://schemas.openxmlformats.org/drawingml/2006/main" w="0">
-            <a:noFill/>
-            <a:prstDash val="solid"/>
-          </a:ln>
-        </p:spPr>
-        <p:txBody>
-          <a:bodyPr xmlns:a="http://schemas.openxmlformats.org/drawingml/2006/main" wrap="square" lIns="0" tIns="0" rIns="0" bIns="0" anchor="ctr">
-            <a:normAutofit fontScale="100000"/>
-          </a:bodyPr>
-          <a:lstStyle xmlns:a="http://schemas.openxmlformats.org/drawingml/2006/main"/>
-          <a:p xmlns:a="http://schemas.openxmlformats.org/drawingml/2006/main">
-            <a:pPr algn="l">
-              <a:lnSpc>
-                <a:spcPct val="106000"/>
-              </a:lnSpc>
-              <a:buNone/>
-              <a:defRPr sz="1350" b="0" i="0">
-                <a:solidFill>
-                  <a:srgbClr val="FFF1CF"/>
-                </a:solidFill>
-                <a:latin typeface="Arial"/>
-                <a:ea typeface="Arial"/>
-                <a:cs typeface="Arial"/>
-              </a:defRPr>
-            </a:pPr>
-            <a:r>
-              <a:rPr sz="1350" b="0" i="0">
-                <a:solidFill>
-                  <a:srgbClr val="FFF1CF"/>
-                </a:solidFill>
-                <a:latin typeface="Arial"/>
-                <a:ea typeface="Arial"/>
-                <a:cs typeface="Arial"/>
-              </a:rPr>
-              <a:t>«Examinadlo todo; quedaos con lo bueno.»</a:t>
-            </a:r>
-          </a:p>
-        </p:txBody>
-      </p:sp>
-      <p:sp>
-        <p:nvSpPr>
-          <p:cNvPr id="34" name="card-accent-4">
-            <a:extLst xmlns:a="http://schemas.openxmlformats.org/drawingml/2006/main">
-              <a:ext uri="{FF2B5EF4-FFF2-40B4-BE49-F238E27FC236}">
-                <a16:creationId xmlns:a16="http://schemas.microsoft.com/office/drawing/2014/main" id="{522E8673-F1EF-4ED6-ACE1-AEC1C6F0F330}"/>
-              </a:ext>
-            </a:extLst>
-          </p:cNvPr>
-          <p:cNvSpPr>
-            <a:spLocks xmlns:a="http://schemas.openxmlformats.org/drawingml/2006/main" noGrp="1"/>
-          </p:cNvSpPr>
-          <p:nvPr/>
-        </p:nvSpPr>
-        <p:spPr>
-          <a:xfrm xmlns:a="http://schemas.openxmlformats.org/drawingml/2006/main">
-            <a:off x="9124950" y="3838575"/>
-            <a:ext cx="552450" cy="28575"/>
-          </a:xfrm>
-          <a:prstGeom xmlns:a="http://schemas.openxmlformats.org/drawingml/2006/main" prst="rect">
-            <a:avLst/>
-          </a:prstGeom>
-          <a:solidFill xmlns:a="http://schemas.openxmlformats.org/drawingml/2006/main">
-            <a:srgbClr val="D9A43B"/>
-          </a:solidFill>
-          <a:ln xmlns:a="http://schemas.openxmlformats.org/drawingml/2006/main" w="0">
-            <a:noFill/>
-            <a:prstDash val="solid"/>
-          </a:ln>
-        </p:spPr>
-      </p:sp>
-      <p:sp>
-        <p:nvSpPr>
-          <p:cNvPr id="35" name="card-body-4">
-            <a:extLst xmlns:a="http://schemas.openxmlformats.org/drawingml/2006/main">
-              <a:ext uri="{FF2B5EF4-FFF2-40B4-BE49-F238E27FC236}">
-                <a16:creationId xmlns:a16="http://schemas.microsoft.com/office/drawing/2014/main" id="{9F34A10C-DDD7-4038-A23E-C91DA258CC06}"/>
-              </a:ext>
-            </a:extLst>
-          </p:cNvPr>
-          <p:cNvSpPr>
-            <a:spLocks xmlns:a="http://schemas.openxmlformats.org/drawingml/2006/main" noGrp="1"/>
-          </p:cNvSpPr>
-          <p:nvPr/>
-        </p:nvSpPr>
-        <p:spPr>
-          <a:xfrm xmlns:a="http://schemas.openxmlformats.org/drawingml/2006/main">
-            <a:off x="9124950" y="4038600"/>
-            <a:ext cx="2152650" cy="990600"/>
-          </a:xfrm>
-          <a:prstGeom xmlns:a="http://schemas.openxmlformats.org/drawingml/2006/main" prst="rect">
-            <a:avLst/>
-          </a:prstGeom>
-          <a:noFill xmlns:a="http://schemas.openxmlformats.org/drawingml/2006/main"/>
-          <a:ln xmlns:a="http://schemas.openxmlformats.org/drawingml/2006/main" w="0">
-            <a:noFill/>
-            <a:prstDash val="solid"/>
-          </a:ln>
-        </p:spPr>
-        <p:txBody>
-          <a:bodyPr xmlns:a="http://schemas.openxmlformats.org/drawingml/2006/main" wrap="square" lIns="0" tIns="0" rIns="0" bIns="0" anchor="ctr">
-            <a:normAutofit fontScale="100000"/>
-          </a:bodyPr>
-          <a:lstStyle xmlns:a="http://schemas.openxmlformats.org/drawingml/2006/main"/>
-          <a:p xmlns:a="http://schemas.openxmlformats.org/drawingml/2006/main">
-            <a:pPr algn="l">
-              <a:lnSpc>
-                <a:spcPct val="108000"/>
-              </a:lnSpc>
-              <a:buNone/>
-              <a:defRPr sz="1200" b="0" i="0">
-                <a:solidFill>
-                  <a:srgbClr val="F5F0E7"/>
-                </a:solidFill>
-                <a:latin typeface="Arial"/>
-                <a:ea typeface="Arial"/>
-                <a:cs typeface="Arial"/>
-              </a:defRPr>
-            </a:pPr>
-            <a:r>
-              <a:rPr sz="1200" b="0" i="0">
-                <a:solidFill>
-                  <a:srgbClr val="F5F0E7"/>
-                </a:solidFill>
-                <a:latin typeface="Arial"/>
-                <a:ea typeface="Arial"/>
-                <a:cs typeface="Arial"/>
-              </a:rPr>
-              <a:t>La fe no llama tesoro a cualquier cosa. Conserva lo que da vida y deja ir lo que desvía.</a:t>
-            </a:r>
-          </a:p>
-        </p:txBody>
-      </p:sp>
-      <p:sp>
-        <p:nvSpPr>
-          <p:cNvPr id="36" name="synthesis-label">
-            <a:extLst xmlns:a="http://schemas.openxmlformats.org/drawingml/2006/main">
-              <a:ext uri="{FF2B5EF4-FFF2-40B4-BE49-F238E27FC236}">
-                <a16:creationId xmlns:a16="http://schemas.microsoft.com/office/drawing/2014/main" id="{80431634-2786-44A6-926F-0EA55FF2997F}"/>
-              </a:ext>
-            </a:extLst>
-          </p:cNvPr>
-          <p:cNvSpPr>
-            <a:spLocks xmlns:a="http://schemas.openxmlformats.org/drawingml/2006/main" noGrp="1"/>
-          </p:cNvSpPr>
-          <p:nvPr/>
-        </p:nvSpPr>
-        <p:spPr>
-          <a:xfrm xmlns:a="http://schemas.openxmlformats.org/drawingml/2006/main">
-            <a:off x="628650" y="5524500"/>
-            <a:ext cx="1047750" cy="247650"/>
-          </a:xfrm>
-          <a:prstGeom xmlns:a="http://schemas.openxmlformats.org/drawingml/2006/main" prst="rect">
-            <a:avLst/>
-          </a:prstGeom>
-          <a:noFill xmlns:a="http://schemas.openxmlformats.org/drawingml/2006/main"/>
-          <a:ln xmlns:a="http://schemas.openxmlformats.org/drawingml/2006/main" w="0">
-            <a:noFill/>
-            <a:prstDash val="solid"/>
-          </a:ln>
-        </p:spPr>
-        <p:txBody>
-          <a:bodyPr xmlns:a="http://schemas.openxmlformats.org/drawingml/2006/main" wrap="square" lIns="0" tIns="0" rIns="0" bIns="0" anchor="ctr">
-            <a:normAutofit fontScale="100000"/>
-          </a:bodyPr>
-          <a:lstStyle xmlns:a="http://schemas.openxmlformats.org/drawingml/2006/main"/>
-          <a:p xmlns:a="http://schemas.openxmlformats.org/drawingml/2006/main">
-            <a:pPr algn="l">
-              <a:lnSpc>
-                <a:spcPct val="100000"/>
-              </a:lnSpc>
-              <a:buNone/>
-              <a:defRPr sz="1200" b="0" i="0">
-                <a:solidFill>
-                  <a:srgbClr val="D9A43B"/>
-                </a:solidFill>
-                <a:latin typeface="Arial"/>
-                <a:ea typeface="Arial"/>
-                <a:cs typeface="Arial"/>
-              </a:defRPr>
-            </a:pPr>
-            <a:r>
-              <a:rPr sz="1200" b="0" i="0">
-                <a:solidFill>
-                  <a:srgbClr val="D9A43B"/>
-                </a:solidFill>
-                <a:latin typeface="Arial"/>
-                <a:ea typeface="Arial"/>
-                <a:cs typeface="Arial"/>
-              </a:rPr>
-              <a:t>SÍNTESIS</a:t>
-            </a:r>
-          </a:p>
-        </p:txBody>
-      </p:sp>
-      <p:sp>
-        <p:nvSpPr>
-          <p:cNvPr id="37" name="synthesis">
-            <a:extLst xmlns:a="http://schemas.openxmlformats.org/drawingml/2006/main">
-              <a:ext uri="{FF2B5EF4-FFF2-40B4-BE49-F238E27FC236}">
-                <a16:creationId xmlns:a16="http://schemas.microsoft.com/office/drawing/2014/main" id="{1116CA16-FF0E-490C-B764-80551F006C38}"/>
-              </a:ext>
-            </a:extLst>
-          </p:cNvPr>
-          <p:cNvSpPr>
-            <a:spLocks xmlns:a="http://schemas.openxmlformats.org/drawingml/2006/main" noGrp="1"/>
-          </p:cNvSpPr>
-          <p:nvPr/>
-        </p:nvSpPr>
-        <p:spPr>
-          <a:xfrm xmlns:a="http://schemas.openxmlformats.org/drawingml/2006/main">
-            <a:off x="1771650" y="5467350"/>
-            <a:ext cx="9886950" cy="381000"/>
-          </a:xfrm>
-          <a:prstGeom xmlns:a="http://schemas.openxmlformats.org/drawingml/2006/main" prst="rect">
-            <a:avLst/>
-          </a:prstGeom>
-          <a:noFill xmlns:a="http://schemas.openxmlformats.org/drawingml/2006/main"/>
-          <a:ln xmlns:a="http://schemas.openxmlformats.org/drawingml/2006/main" w="0">
-            <a:noFill/>
-            <a:prstDash val="solid"/>
-          </a:ln>
-        </p:spPr>
-        <p:txBody>
-          <a:bodyPr xmlns:a="http://schemas.openxmlformats.org/drawingml/2006/main" wrap="square" lIns="0" tIns="0" rIns="0" bIns="0" anchor="ctr">
-            <a:normAutofit fontScale="100000"/>
-          </a:bodyPr>
-          <a:lstStyle xmlns:a="http://schemas.openxmlformats.org/drawingml/2006/main"/>
-          <a:p xmlns:a="http://schemas.openxmlformats.org/drawingml/2006/main">
-            <a:pPr algn="l">
-              <a:lnSpc>
-                <a:spcPct val="100000"/>
-              </a:lnSpc>
-              <a:buNone/>
-              <a:defRPr sz="1500" b="0" i="0">
-                <a:solidFill>
-                  <a:srgbClr val="0B1A24"/>
-                </a:solidFill>
-                <a:latin typeface="Arial"/>
-                <a:ea typeface="Arial"/>
-                <a:cs typeface="Arial"/>
-              </a:defRPr>
-            </a:pPr>
-            <a:r>
-              <a:rPr sz="1500" b="0" i="0">
-                <a:solidFill>
-                  <a:srgbClr val="0B1A24"/>
-                </a:solidFill>
-                <a:latin typeface="Arial"/>
-                <a:ea typeface="Arial"/>
-                <a:cs typeface="Arial"/>
-              </a:rPr>
-              <a:t>Presencia ya cercana  ·  deseo purificado  ·  historia releída  ·  elección con alegría</a:t>
-            </a:r>
-          </a:p>
-        </p:txBody>
-      </p:sp>
-      <p:sp>
-        <p:nvSpPr>
-          <p:cNvPr id="38" name="resonance-question">
-            <a:extLst xmlns:a="http://schemas.openxmlformats.org/drawingml/2006/main">
-              <a:ext uri="{FF2B5EF4-FFF2-40B4-BE49-F238E27FC236}">
-                <a16:creationId xmlns:a16="http://schemas.microsoft.com/office/drawing/2014/main" id="{0DB6426E-DE49-41DD-A9EF-CD701FFFE97C}"/>
-              </a:ext>
-            </a:extLst>
-          </p:cNvPr>
-          <p:cNvSpPr>
-            <a:spLocks xmlns:a="http://schemas.openxmlformats.org/drawingml/2006/main" noGrp="1"/>
-          </p:cNvSpPr>
-          <p:nvPr/>
-        </p:nvSpPr>
-        <p:spPr>
-          <a:xfrm xmlns:a="http://schemas.openxmlformats.org/drawingml/2006/main">
-            <a:off x="628650" y="5981700"/>
-            <a:ext cx="10668000" cy="361950"/>
-          </a:xfrm>
-          <a:prstGeom xmlns:a="http://schemas.openxmlformats.org/drawingml/2006/main" prst="rect">
-            <a:avLst/>
-          </a:prstGeom>
-          <a:noFill xmlns:a="http://schemas.openxmlformats.org/drawingml/2006/main"/>
-          <a:ln xmlns:a="http://schemas.openxmlformats.org/drawingml/2006/main" w="0">
-            <a:noFill/>
-            <a:prstDash val="solid"/>
-          </a:ln>
-        </p:spPr>
-        <p:txBody>
-          <a:bodyPr xmlns:a="http://schemas.openxmlformats.org/drawingml/2006/main" wrap="square" lIns="0" tIns="0" rIns="0" bIns="0" anchor="ctr">
-            <a:normAutofit fontScale="100000"/>
-          </a:bodyPr>
-          <a:lstStyle xmlns:a="http://schemas.openxmlformats.org/drawingml/2006/main"/>
-          <a:p xmlns:a="http://schemas.openxmlformats.org/drawingml/2006/main">
-            <a:pPr algn="l">
-              <a:lnSpc>
-                <a:spcPct val="100000"/>
-              </a:lnSpc>
-              <a:buNone/>
-              <a:defRPr sz="1425" b="0" i="0">
-                <a:solidFill>
-                  <a:srgbClr val="47616D"/>
-                </a:solidFill>
-                <a:latin typeface="Arial"/>
-                <a:ea typeface="Arial"/>
-                <a:cs typeface="Arial"/>
-              </a:defRPr>
-            </a:pPr>
-            <a:r>
-              <a:rPr sz="1425" b="0" i="0">
-                <a:solidFill>
-                  <a:srgbClr val="47616D"/>
-                </a:solidFill>
-                <a:latin typeface="Arial"/>
-                <a:ea typeface="Arial"/>
-                <a:cs typeface="Arial"/>
+                <a:ln w="0">
+                  <a:noFill/>
+                  <a:prstDash val="solid"/>
+                </a:ln>
+                <a:solidFill>
+                  <a:srgbClr val="40565E"/>
+                </a:solidFill>
+                <a:latin typeface="Calibri"/>
+                <a:ea typeface="Calibri"/>
+                <a:cs typeface="Calibri"/>
               </a:rPr>
               <a:t>Pregunta de fondo: ¿qué parte de mi vida podría estar hablando de Dios sin que yo la haya leído así todavía?</a:t>
             </a:r>
@@ -5595,23 +5795,31 @@
                 <a:spcPct val="100000"/>
               </a:lnSpc>
               <a:buNone/>
-              <a:defRPr sz="900" b="0" i="0">
-                <a:solidFill>
-                  <a:srgbClr val="A6B6BD"/>
-                </a:solidFill>
-                <a:latin typeface="Arial"/>
-                <a:ea typeface="Arial"/>
-                <a:cs typeface="Arial"/>
+              <a:defRPr sz="825" b="0" i="0">
+                <a:ln w="0">
+                  <a:noFill/>
+                  <a:prstDash val="solid"/>
+                </a:ln>
+                <a:solidFill>
+                  <a:srgbClr val="B8C3C7"/>
+                </a:solidFill>
+                <a:latin typeface="Calibri"/>
+                <a:ea typeface="Calibri"/>
+                <a:cs typeface="Calibri"/>
               </a:defRPr>
             </a:pPr>
             <a:r>
-              <a:rPr sz="900" b="0" i="0">
-                <a:solidFill>
-                  <a:srgbClr val="A6B6BD"/>
-                </a:solidFill>
-                <a:latin typeface="Arial"/>
-                <a:ea typeface="Arial"/>
-                <a:cs typeface="Arial"/>
+              <a:rPr sz="825" b="0" i="0">
+                <a:ln w="0">
+                  <a:noFill/>
+                  <a:prstDash val="solid"/>
+                </a:ln>
+                <a:solidFill>
+                  <a:srgbClr val="B8C3C7"/>
+                </a:solidFill>
+                <a:latin typeface="Calibri"/>
+                <a:ea typeface="Calibri"/>
+                <a:cs typeface="Calibri"/>
               </a:rPr>
               <a:t>02</a:t>
             </a:r>
@@ -5686,23 +5894,31 @@
                 <a:spcPct val="100000"/>
               </a:lnSpc>
               <a:buNone/>
-              <a:defRPr sz="2625" b="0" i="0">
+              <a:defRPr sz="2250" b="1" i="0">
+                <a:ln w="0">
+                  <a:noFill/>
+                  <a:prstDash val="solid"/>
+                </a:ln>
                 <a:solidFill>
                   <a:srgbClr val="FFFFFF"/>
                 </a:solidFill>
-                <a:latin typeface="Arial"/>
-                <a:ea typeface="Arial"/>
-                <a:cs typeface="Arial"/>
+                <a:latin typeface="Calibri"/>
+                <a:ea typeface="Calibri"/>
+                <a:cs typeface="Calibri"/>
               </a:defRPr>
             </a:pPr>
             <a:r>
-              <a:rPr sz="2625" b="0" i="0">
+              <a:rPr sz="2250" b="1" i="0">
+                <a:ln w="0">
+                  <a:noFill/>
+                  <a:prstDash val="solid"/>
+                </a:ln>
                 <a:solidFill>
                   <a:srgbClr val="FFFFFF"/>
                 </a:solidFill>
-                <a:latin typeface="Arial"/>
-                <a:ea typeface="Arial"/>
-                <a:cs typeface="Arial"/>
+                <a:latin typeface="Calibri"/>
+                <a:ea typeface="Calibri"/>
+                <a:cs typeface="Calibri"/>
               </a:rPr>
               <a:t>PROPUESTA DE REUNIÓN · 70 MINUTOS</a:t>
             </a:r>
@@ -5727,130 +5943,6 @@
           <a:xfrm xmlns:a="http://schemas.openxmlformats.org/drawingml/2006/main">
             <a:off x="628650" y="723900"/>
             <a:ext cx="8763000" cy="285750"/>
-          </a:xfrm>
-          <a:prstGeom xmlns:a="http://schemas.openxmlformats.org/drawingml/2006/main" prst="rect">
-            <a:avLst/>
-          </a:prstGeom>
-          <a:noFill xmlns:a="http://schemas.openxmlformats.org/drawingml/2006/main"/>
-          <a:ln xmlns:a="http://schemas.openxmlformats.org/drawingml/2006/main" w="0">
-            <a:noFill/>
-            <a:prstDash val="solid"/>
-          </a:ln>
-        </p:spPr>
-        <p:txBody>
-          <a:bodyPr xmlns:a="http://schemas.openxmlformats.org/drawingml/2006/main" wrap="square" lIns="0" tIns="0" rIns="0" bIns="0" anchor="ctr">
-            <a:normAutofit fontScale="100000"/>
-          </a:bodyPr>
-          <a:lstStyle xmlns:a="http://schemas.openxmlformats.org/drawingml/2006/main"/>
-          <a:p xmlns:a="http://schemas.openxmlformats.org/drawingml/2006/main">
-            <a:pPr algn="l">
-              <a:lnSpc>
-                <a:spcPct val="100000"/>
-              </a:lnSpc>
-              <a:buNone/>
-              <a:defRPr sz="1500" b="0" i="0">
-                <a:solidFill>
-                  <a:srgbClr val="FFF1CF"/>
-                </a:solidFill>
-                <a:latin typeface="Arial"/>
-                <a:ea typeface="Arial"/>
-                <a:cs typeface="Arial"/>
-              </a:defRPr>
-            </a:pPr>
-            <a:r>
-              <a:rPr sz="1500" b="0" i="0">
-                <a:solidFill>
-                  <a:srgbClr val="FFF1CF"/>
-                </a:solidFill>
-                <a:latin typeface="Arial"/>
-                <a:ea typeface="Arial"/>
-                <a:cs typeface="Arial"/>
-              </a:rPr>
-              <a:t>De buscar lejos a reconocer, discernir y elegir</a:t>
-            </a:r>
-          </a:p>
-        </p:txBody>
-      </p:sp>
-      <p:sp>
-        <p:nvSpPr>
-          <p:cNvPr id="3" name="agenda-rule">
-            <a:extLst xmlns:a="http://schemas.openxmlformats.org/drawingml/2006/main">
-              <a:ext uri="{FF2B5EF4-FFF2-40B4-BE49-F238E27FC236}">
-                <a16:creationId xmlns:a16="http://schemas.microsoft.com/office/drawing/2014/main" id="{C218FDBF-3209-4FBB-A822-9E19E2E4A9CC}"/>
-              </a:ext>
-            </a:extLst>
-          </p:cNvPr>
-          <p:cNvSpPr>
-            <a:spLocks xmlns:a="http://schemas.openxmlformats.org/drawingml/2006/main" noGrp="1"/>
-          </p:cNvSpPr>
-          <p:nvPr/>
-        </p:nvSpPr>
-        <p:spPr>
-          <a:xfrm xmlns:a="http://schemas.openxmlformats.org/drawingml/2006/main">
-            <a:off x="533400" y="1066800"/>
-            <a:ext cx="11125200" cy="28575"/>
-          </a:xfrm>
-          <a:prstGeom xmlns:a="http://schemas.openxmlformats.org/drawingml/2006/main" prst="rect">
-            <a:avLst/>
-          </a:prstGeom>
-          <a:solidFill xmlns:a="http://schemas.openxmlformats.org/drawingml/2006/main">
-            <a:srgbClr val="D9A43B"/>
-          </a:solidFill>
-          <a:ln xmlns:a="http://schemas.openxmlformats.org/drawingml/2006/main" w="0">
-            <a:noFill/>
-            <a:prstDash val="solid"/>
-          </a:ln>
-        </p:spPr>
-      </p:sp>
-      <p:sp>
-        <p:nvSpPr>
-          <p:cNvPr id="4" name="timeline">
-            <a:extLst xmlns:a="http://schemas.openxmlformats.org/drawingml/2006/main">
-              <a:ext uri="{FF2B5EF4-FFF2-40B4-BE49-F238E27FC236}">
-                <a16:creationId xmlns:a16="http://schemas.microsoft.com/office/drawing/2014/main" id="{9A532C51-B4DB-4FA9-869A-55C10E3A0050}"/>
-              </a:ext>
-            </a:extLst>
-          </p:cNvPr>
-          <p:cNvSpPr>
-            <a:spLocks xmlns:a="http://schemas.openxmlformats.org/drawingml/2006/main" noGrp="1"/>
-          </p:cNvSpPr>
-          <p:nvPr/>
-        </p:nvSpPr>
-        <p:spPr>
-          <a:xfrm xmlns:a="http://schemas.openxmlformats.org/drawingml/2006/main">
-            <a:off x="1257300" y="1619250"/>
-            <a:ext cx="28575" cy="3943350"/>
-          </a:xfrm>
-          <a:prstGeom xmlns:a="http://schemas.openxmlformats.org/drawingml/2006/main" prst="rect">
-            <a:avLst/>
-          </a:prstGeom>
-          <a:solidFill xmlns:a="http://schemas.openxmlformats.org/drawingml/2006/main">
-            <a:srgbClr val="78909C"/>
-          </a:solidFill>
-          <a:ln xmlns:a="http://schemas.openxmlformats.org/drawingml/2006/main" w="0">
-            <a:noFill/>
-            <a:prstDash val="solid"/>
-          </a:ln>
-        </p:spPr>
-      </p:sp>
-      <p:sp>
-        <p:nvSpPr>
-          <p:cNvPr id="5" name="agenda-time-1">
-            <a:extLst xmlns:a="http://schemas.openxmlformats.org/drawingml/2006/main">
-              <a:ext uri="{FF2B5EF4-FFF2-40B4-BE49-F238E27FC236}">
-                <a16:creationId xmlns:a16="http://schemas.microsoft.com/office/drawing/2014/main" id="{67878E7D-8E56-4872-8388-E0D6ADE1F2D5}"/>
-              </a:ext>
-            </a:extLst>
-          </p:cNvPr>
-          <p:cNvSpPr>
-            <a:spLocks xmlns:a="http://schemas.openxmlformats.org/drawingml/2006/main" noGrp="1"/>
-          </p:cNvSpPr>
-          <p:nvPr/>
-        </p:nvSpPr>
-        <p:spPr>
-          <a:xfrm xmlns:a="http://schemas.openxmlformats.org/drawingml/2006/main">
-            <a:off x="533400" y="1428750"/>
-            <a:ext cx="457200" cy="304800"/>
           </a:xfrm>
           <a:prstGeom xmlns:a="http://schemas.openxmlformats.org/drawingml/2006/main" prst="rect">
             <a:avLst/>
@@ -5873,22 +5965,162 @@
               </a:lnSpc>
               <a:buNone/>
               <a:defRPr sz="1200" b="0" i="0">
-                <a:solidFill>
-                  <a:srgbClr val="9CB3BF"/>
-                </a:solidFill>
-                <a:latin typeface="Arial"/>
-                <a:ea typeface="Arial"/>
-                <a:cs typeface="Arial"/>
+                <a:ln w="0">
+                  <a:noFill/>
+                  <a:prstDash val="solid"/>
+                </a:ln>
+                <a:solidFill>
+                  <a:srgbClr val="F5E7C3"/>
+                </a:solidFill>
+                <a:latin typeface="Calibri"/>
+                <a:ea typeface="Calibri"/>
+                <a:cs typeface="Calibri"/>
               </a:defRPr>
             </a:pPr>
             <a:r>
               <a:rPr sz="1200" b="0" i="0">
-                <a:solidFill>
-                  <a:srgbClr val="9CB3BF"/>
-                </a:solidFill>
-                <a:latin typeface="Arial"/>
-                <a:ea typeface="Arial"/>
-                <a:cs typeface="Arial"/>
+                <a:ln w="0">
+                  <a:noFill/>
+                  <a:prstDash val="solid"/>
+                </a:ln>
+                <a:solidFill>
+                  <a:srgbClr val="F5E7C3"/>
+                </a:solidFill>
+                <a:latin typeface="Calibri"/>
+                <a:ea typeface="Calibri"/>
+                <a:cs typeface="Calibri"/>
+              </a:rPr>
+              <a:t>De buscar lejos a reconocer, discernir y elegir</a:t>
+            </a:r>
+          </a:p>
+        </p:txBody>
+      </p:sp>
+      <p:sp>
+        <p:nvSpPr>
+          <p:cNvPr id="3" name="agenda-rule">
+            <a:extLst xmlns:a="http://schemas.openxmlformats.org/drawingml/2006/main">
+              <a:ext uri="{FF2B5EF4-FFF2-40B4-BE49-F238E27FC236}">
+                <a16:creationId xmlns:a16="http://schemas.microsoft.com/office/drawing/2014/main" id="{C218FDBF-3209-4FBB-A822-9E19E2E4A9CC}"/>
+              </a:ext>
+            </a:extLst>
+          </p:cNvPr>
+          <p:cNvSpPr>
+            <a:spLocks xmlns:a="http://schemas.openxmlformats.org/drawingml/2006/main" noGrp="1"/>
+          </p:cNvSpPr>
+          <p:nvPr/>
+        </p:nvSpPr>
+        <p:spPr>
+          <a:xfrm xmlns:a="http://schemas.openxmlformats.org/drawingml/2006/main">
+            <a:off x="533400" y="1066800"/>
+            <a:ext cx="11125200" cy="28575"/>
+          </a:xfrm>
+          <a:prstGeom xmlns:a="http://schemas.openxmlformats.org/drawingml/2006/main" prst="rect">
+            <a:avLst/>
+          </a:prstGeom>
+          <a:solidFill xmlns:a="http://schemas.openxmlformats.org/drawingml/2006/main">
+            <a:srgbClr val="D9A43B"/>
+          </a:solidFill>
+          <a:ln xmlns:a="http://schemas.openxmlformats.org/drawingml/2006/main" w="0">
+            <a:noFill/>
+            <a:prstDash val="solid"/>
+          </a:ln>
+        </p:spPr>
+      </p:sp>
+      <p:sp>
+        <p:nvSpPr>
+          <p:cNvPr id="4" name="timeline">
+            <a:extLst xmlns:a="http://schemas.openxmlformats.org/drawingml/2006/main">
+              <a:ext uri="{FF2B5EF4-FFF2-40B4-BE49-F238E27FC236}">
+                <a16:creationId xmlns:a16="http://schemas.microsoft.com/office/drawing/2014/main" id="{9A532C51-B4DB-4FA9-869A-55C10E3A0050}"/>
+              </a:ext>
+            </a:extLst>
+          </p:cNvPr>
+          <p:cNvSpPr>
+            <a:spLocks xmlns:a="http://schemas.openxmlformats.org/drawingml/2006/main" noGrp="1"/>
+          </p:cNvSpPr>
+          <p:nvPr/>
+        </p:nvSpPr>
+        <p:spPr>
+          <a:xfrm xmlns:a="http://schemas.openxmlformats.org/drawingml/2006/main">
+            <a:off x="1257300" y="1619250"/>
+            <a:ext cx="28575" cy="3943350"/>
+          </a:xfrm>
+          <a:prstGeom xmlns:a="http://schemas.openxmlformats.org/drawingml/2006/main" prst="rect">
+            <a:avLst/>
+          </a:prstGeom>
+          <a:solidFill xmlns:a="http://schemas.openxmlformats.org/drawingml/2006/main">
+            <a:srgbClr val="78909C"/>
+          </a:solidFill>
+          <a:ln xmlns:a="http://schemas.openxmlformats.org/drawingml/2006/main" w="0">
+            <a:noFill/>
+            <a:prstDash val="solid"/>
+          </a:ln>
+        </p:spPr>
+      </p:sp>
+      <p:sp>
+        <p:nvSpPr>
+          <p:cNvPr id="5" name="agenda-time-1">
+            <a:extLst xmlns:a="http://schemas.openxmlformats.org/drawingml/2006/main">
+              <a:ext uri="{FF2B5EF4-FFF2-40B4-BE49-F238E27FC236}">
+                <a16:creationId xmlns:a16="http://schemas.microsoft.com/office/drawing/2014/main" id="{67878E7D-8E56-4872-8388-E0D6ADE1F2D5}"/>
+              </a:ext>
+            </a:extLst>
+          </p:cNvPr>
+          <p:cNvSpPr>
+            <a:spLocks xmlns:a="http://schemas.openxmlformats.org/drawingml/2006/main" noGrp="1"/>
+          </p:cNvSpPr>
+          <p:nvPr/>
+        </p:nvSpPr>
+        <p:spPr>
+          <a:xfrm xmlns:a="http://schemas.openxmlformats.org/drawingml/2006/main">
+            <a:off x="533400" y="1428750"/>
+            <a:ext cx="457200" cy="304800"/>
+          </a:xfrm>
+          <a:prstGeom xmlns:a="http://schemas.openxmlformats.org/drawingml/2006/main" prst="rect">
+            <a:avLst/>
+          </a:prstGeom>
+          <a:noFill xmlns:a="http://schemas.openxmlformats.org/drawingml/2006/main"/>
+          <a:ln xmlns:a="http://schemas.openxmlformats.org/drawingml/2006/main" w="0">
+            <a:noFill/>
+            <a:prstDash val="solid"/>
+          </a:ln>
+        </p:spPr>
+        <p:txBody>
+          <a:bodyPr xmlns:a="http://schemas.openxmlformats.org/drawingml/2006/main" wrap="square" lIns="0" tIns="0" rIns="0" bIns="0" anchor="ctr">
+            <a:normAutofit fontScale="100000"/>
+          </a:bodyPr>
+          <a:lstStyle xmlns:a="http://schemas.openxmlformats.org/drawingml/2006/main"/>
+          <a:p xmlns:a="http://schemas.openxmlformats.org/drawingml/2006/main">
+            <a:pPr algn="l">
+              <a:lnSpc>
+                <a:spcPct val="100000"/>
+              </a:lnSpc>
+              <a:buNone/>
+              <a:defRPr sz="975" b="1" i="0">
+                <a:ln w="0">
+                  <a:noFill/>
+                  <a:prstDash val="solid"/>
+                </a:ln>
+                <a:solidFill>
+                  <a:srgbClr val="AAB9BC"/>
+                </a:solidFill>
+                <a:latin typeface="Calibri"/>
+                <a:ea typeface="Calibri"/>
+                <a:cs typeface="Calibri"/>
+              </a:defRPr>
+            </a:pPr>
+            <a:r>
+              <a:rPr sz="975" b="1" i="0">
+                <a:ln w="0">
+                  <a:noFill/>
+                  <a:prstDash val="solid"/>
+                </a:ln>
+                <a:solidFill>
+                  <a:srgbClr val="AAB9BC"/>
+                </a:solidFill>
+                <a:latin typeface="Calibri"/>
+                <a:ea typeface="Calibri"/>
+                <a:cs typeface="Calibri"/>
               </a:rPr>
               <a:t>00′</a:t>
             </a:r>
@@ -5967,23 +6199,31 @@
                 <a:spcPct val="100000"/>
               </a:lnSpc>
               <a:buNone/>
-              <a:defRPr sz="1200" b="0" i="0">
+              <a:defRPr sz="1125" b="1" i="0">
+                <a:ln w="0">
+                  <a:noFill/>
+                  <a:prstDash val="solid"/>
+                </a:ln>
                 <a:solidFill>
                   <a:srgbClr val="FFFFFF"/>
                 </a:solidFill>
-                <a:latin typeface="Arial"/>
-                <a:ea typeface="Arial"/>
-                <a:cs typeface="Arial"/>
+                <a:latin typeface="Calibri"/>
+                <a:ea typeface="Calibri"/>
+                <a:cs typeface="Calibri"/>
               </a:defRPr>
             </a:pPr>
             <a:r>
-              <a:rPr sz="1200" b="0" i="0">
+              <a:rPr sz="1125" b="1" i="0">
+                <a:ln w="0">
+                  <a:noFill/>
+                  <a:prstDash val="solid"/>
+                </a:ln>
                 <a:solidFill>
                   <a:srgbClr val="FFFFFF"/>
                 </a:solidFill>
-                <a:latin typeface="Arial"/>
-                <a:ea typeface="Arial"/>
-                <a:cs typeface="Arial"/>
+                <a:latin typeface="Calibri"/>
+                <a:ea typeface="Calibri"/>
+                <a:cs typeface="Calibri"/>
               </a:rPr>
               <a:t>1</a:t>
             </a:r>
@@ -6029,23 +6269,31 @@
                 <a:spcPct val="100000"/>
               </a:lnSpc>
               <a:buNone/>
-              <a:defRPr sz="1500" b="0" i="0">
-                <a:solidFill>
-                  <a:srgbClr val="F0C766"/>
-                </a:solidFill>
-                <a:latin typeface="Arial"/>
-                <a:ea typeface="Arial"/>
-                <a:cs typeface="Arial"/>
+              <a:defRPr sz="1350" b="1" i="0">
+                <a:ln w="0">
+                  <a:noFill/>
+                  <a:prstDash val="solid"/>
+                </a:ln>
+                <a:solidFill>
+                  <a:srgbClr val="D9A441"/>
+                </a:solidFill>
+                <a:latin typeface="Calibri"/>
+                <a:ea typeface="Calibri"/>
+                <a:cs typeface="Calibri"/>
               </a:defRPr>
             </a:pPr>
             <a:r>
-              <a:rPr sz="1500" b="0" i="0">
-                <a:solidFill>
-                  <a:srgbClr val="F0C766"/>
-                </a:solidFill>
-                <a:latin typeface="Arial"/>
-                <a:ea typeface="Arial"/>
-                <a:cs typeface="Arial"/>
+              <a:rPr sz="1350" b="1" i="0">
+                <a:ln w="0">
+                  <a:noFill/>
+                  <a:prstDash val="solid"/>
+                </a:ln>
+                <a:solidFill>
+                  <a:srgbClr val="D9A441"/>
+                </a:solidFill>
+                <a:latin typeface="Calibri"/>
+                <a:ea typeface="Calibri"/>
+                <a:cs typeface="Calibri"/>
               </a:rPr>
               <a:t>ESCUCHAR</a:t>
             </a:r>
@@ -6091,23 +6339,31 @@
                 <a:spcPct val="104000"/>
               </a:lnSpc>
               <a:buNone/>
-              <a:defRPr sz="1200" b="0" i="0">
+              <a:defRPr sz="1125" b="0" i="0">
+                <a:ln w="0">
+                  <a:noFill/>
+                  <a:prstDash val="solid"/>
+                </a:ln>
                 <a:solidFill>
                   <a:srgbClr val="FFFFFF"/>
                 </a:solidFill>
-                <a:latin typeface="Arial"/>
-                <a:ea typeface="Arial"/>
-                <a:cs typeface="Arial"/>
+                <a:latin typeface="Calibri"/>
+                <a:ea typeface="Calibri"/>
+                <a:cs typeface="Calibri"/>
               </a:defRPr>
             </a:pPr>
             <a:r>
-              <a:rPr sz="1200" b="0" i="0">
+              <a:rPr sz="1125" b="0" i="0">
+                <a:ln w="0">
+                  <a:noFill/>
+                  <a:prstDash val="solid"/>
+                </a:ln>
                 <a:solidFill>
                   <a:srgbClr val="FFFFFF"/>
                 </a:solidFill>
-                <a:latin typeface="Arial"/>
-                <a:ea typeface="Arial"/>
-                <a:cs typeface="Arial"/>
+                <a:latin typeface="Calibri"/>
+                <a:ea typeface="Calibri"/>
+                <a:cs typeface="Calibri"/>
               </a:rPr>
               <a:t>Oír «Todo hablaba de ti» completa, sin explicarla todavía.</a:t>
             </a:r>
@@ -6190,23 +6446,31 @@
                 <a:spcPct val="104000"/>
               </a:lnSpc>
               <a:buNone/>
-              <a:defRPr sz="1350" b="0" i="0">
-                <a:solidFill>
-                  <a:srgbClr val="FFF1CF"/>
-                </a:solidFill>
-                <a:latin typeface="Arial"/>
-                <a:ea typeface="Arial"/>
-                <a:cs typeface="Arial"/>
+              <a:defRPr sz="1275" b="1" i="0">
+                <a:ln w="0">
+                  <a:noFill/>
+                  <a:prstDash val="solid"/>
+                </a:ln>
+                <a:solidFill>
+                  <a:srgbClr val="F5E7C3"/>
+                </a:solidFill>
+                <a:latin typeface="Calibri"/>
+                <a:ea typeface="Calibri"/>
+                <a:cs typeface="Calibri"/>
               </a:defRPr>
             </a:pPr>
             <a:r>
-              <a:rPr sz="1350" b="0" i="0">
-                <a:solidFill>
-                  <a:srgbClr val="FFF1CF"/>
-                </a:solidFill>
-                <a:latin typeface="Arial"/>
-                <a:ea typeface="Arial"/>
-                <a:cs typeface="Arial"/>
+              <a:rPr sz="1275" b="1" i="0">
+                <a:ln w="0">
+                  <a:noFill/>
+                  <a:prstDash val="solid"/>
+                </a:ln>
+                <a:solidFill>
+                  <a:srgbClr val="F5E7C3"/>
+                </a:solidFill>
+                <a:latin typeface="Calibri"/>
+                <a:ea typeface="Calibri"/>
+                <a:cs typeface="Calibri"/>
               </a:rPr>
               <a:t>¿Qué frase ha cambiado por un instante mi manera de mirar?</a:t>
             </a:r>
@@ -6252,23 +6516,31 @@
                 <a:spcPct val="100000"/>
               </a:lnSpc>
               <a:buNone/>
-              <a:defRPr sz="1200" b="0" i="0">
-                <a:solidFill>
-                  <a:srgbClr val="9CB3BF"/>
-                </a:solidFill>
-                <a:latin typeface="Arial"/>
-                <a:ea typeface="Arial"/>
-                <a:cs typeface="Arial"/>
+              <a:defRPr sz="975" b="1" i="0">
+                <a:ln w="0">
+                  <a:noFill/>
+                  <a:prstDash val="solid"/>
+                </a:ln>
+                <a:solidFill>
+                  <a:srgbClr val="AAB9BC"/>
+                </a:solidFill>
+                <a:latin typeface="Calibri"/>
+                <a:ea typeface="Calibri"/>
+                <a:cs typeface="Calibri"/>
               </a:defRPr>
             </a:pPr>
             <a:r>
-              <a:rPr sz="1200" b="0" i="0">
-                <a:solidFill>
-                  <a:srgbClr val="9CB3BF"/>
-                </a:solidFill>
-                <a:latin typeface="Arial"/>
-                <a:ea typeface="Arial"/>
-                <a:cs typeface="Arial"/>
+              <a:rPr sz="975" b="1" i="0">
+                <a:ln w="0">
+                  <a:noFill/>
+                  <a:prstDash val="solid"/>
+                </a:ln>
+                <a:solidFill>
+                  <a:srgbClr val="AAB9BC"/>
+                </a:solidFill>
+                <a:latin typeface="Calibri"/>
+                <a:ea typeface="Calibri"/>
+                <a:cs typeface="Calibri"/>
               </a:rPr>
               <a:t>08′</a:t>
             </a:r>
@@ -6347,23 +6619,31 @@
                 <a:spcPct val="100000"/>
               </a:lnSpc>
               <a:buNone/>
-              <a:defRPr sz="1200" b="0" i="0">
+              <a:defRPr sz="1125" b="1" i="0">
+                <a:ln w="0">
+                  <a:noFill/>
+                  <a:prstDash val="solid"/>
+                </a:ln>
                 <a:solidFill>
                   <a:srgbClr val="FFFFFF"/>
                 </a:solidFill>
-                <a:latin typeface="Arial"/>
-                <a:ea typeface="Arial"/>
-                <a:cs typeface="Arial"/>
+                <a:latin typeface="Calibri"/>
+                <a:ea typeface="Calibri"/>
+                <a:cs typeface="Calibri"/>
               </a:defRPr>
             </a:pPr>
             <a:r>
-              <a:rPr sz="1200" b="0" i="0">
+              <a:rPr sz="1125" b="1" i="0">
+                <a:ln w="0">
+                  <a:noFill/>
+                  <a:prstDash val="solid"/>
+                </a:ln>
                 <a:solidFill>
                   <a:srgbClr val="FFFFFF"/>
                 </a:solidFill>
-                <a:latin typeface="Arial"/>
-                <a:ea typeface="Arial"/>
-                <a:cs typeface="Arial"/>
+                <a:latin typeface="Calibri"/>
+                <a:ea typeface="Calibri"/>
+                <a:cs typeface="Calibri"/>
               </a:rPr>
               <a:t>2</a:t>
             </a:r>
@@ -6409,23 +6689,31 @@
                 <a:spcPct val="100000"/>
               </a:lnSpc>
               <a:buNone/>
-              <a:defRPr sz="1500" b="0" i="0">
-                <a:solidFill>
-                  <a:srgbClr val="F0C766"/>
-                </a:solidFill>
-                <a:latin typeface="Arial"/>
-                <a:ea typeface="Arial"/>
-                <a:cs typeface="Arial"/>
+              <a:defRPr sz="1350" b="1" i="0">
+                <a:ln w="0">
+                  <a:noFill/>
+                  <a:prstDash val="solid"/>
+                </a:ln>
+                <a:solidFill>
+                  <a:srgbClr val="D9A441"/>
+                </a:solidFill>
+                <a:latin typeface="Calibri"/>
+                <a:ea typeface="Calibri"/>
+                <a:cs typeface="Calibri"/>
               </a:defRPr>
             </a:pPr>
             <a:r>
-              <a:rPr sz="1500" b="0" i="0">
-                <a:solidFill>
-                  <a:srgbClr val="F0C766"/>
-                </a:solidFill>
-                <a:latin typeface="Arial"/>
-                <a:ea typeface="Arial"/>
-                <a:cs typeface="Arial"/>
+              <a:rPr sz="1350" b="1" i="0">
+                <a:ln w="0">
+                  <a:noFill/>
+                  <a:prstDash val="solid"/>
+                </a:ln>
+                <a:solidFill>
+                  <a:srgbClr val="D9A441"/>
+                </a:solidFill>
+                <a:latin typeface="Calibri"/>
+                <a:ea typeface="Calibri"/>
+                <a:cs typeface="Calibri"/>
               </a:rPr>
               <a:t>RELEER</a:t>
             </a:r>
@@ -6471,23 +6759,31 @@
                 <a:spcPct val="104000"/>
               </a:lnSpc>
               <a:buNone/>
-              <a:defRPr sz="1200" b="0" i="0">
+              <a:defRPr sz="1125" b="0" i="0">
+                <a:ln w="0">
+                  <a:noFill/>
+                  <a:prstDash val="solid"/>
+                </a:ln>
                 <a:solidFill>
                   <a:srgbClr val="FFFFFF"/>
                 </a:solidFill>
-                <a:latin typeface="Arial"/>
-                <a:ea typeface="Arial"/>
-                <a:cs typeface="Arial"/>
+                <a:latin typeface="Calibri"/>
+                <a:ea typeface="Calibri"/>
+                <a:cs typeface="Calibri"/>
               </a:defRPr>
             </a:pPr>
             <a:r>
-              <a:rPr sz="1200" b="0" i="0">
+              <a:rPr sz="1125" b="0" i="0">
+                <a:ln w="0">
+                  <a:noFill/>
+                  <a:prstDash val="solid"/>
+                </a:ln>
                 <a:solidFill>
                   <a:srgbClr val="FFFFFF"/>
                 </a:solidFill>
-                <a:latin typeface="Arial"/>
-                <a:ea typeface="Arial"/>
-                <a:cs typeface="Arial"/>
+                <a:latin typeface="Calibri"/>
+                <a:ea typeface="Calibri"/>
+                <a:cs typeface="Calibri"/>
               </a:rPr>
               <a:t>Tarjeta opcional: lugar conocido, ayuda recibida y algo hoy comprendido distinto.</a:t>
             </a:r>
@@ -6570,23 +6866,31 @@
                 <a:spcPct val="104000"/>
               </a:lnSpc>
               <a:buNone/>
-              <a:defRPr sz="1350" b="0" i="0">
-                <a:solidFill>
-                  <a:srgbClr val="FFF1CF"/>
-                </a:solidFill>
-                <a:latin typeface="Arial"/>
-                <a:ea typeface="Arial"/>
-                <a:cs typeface="Arial"/>
+              <a:defRPr sz="1275" b="1" i="0">
+                <a:ln w="0">
+                  <a:noFill/>
+                  <a:prstDash val="solid"/>
+                </a:ln>
+                <a:solidFill>
+                  <a:srgbClr val="F5E7C3"/>
+                </a:solidFill>
+                <a:latin typeface="Calibri"/>
+                <a:ea typeface="Calibri"/>
+                <a:cs typeface="Calibri"/>
               </a:defRPr>
             </a:pPr>
             <a:r>
-              <a:rPr sz="1350" b="0" i="0">
-                <a:solidFill>
-                  <a:srgbClr val="FFF1CF"/>
-                </a:solidFill>
-                <a:latin typeface="Arial"/>
-                <a:ea typeface="Arial"/>
-                <a:cs typeface="Arial"/>
+              <a:rPr sz="1275" b="1" i="0">
+                <a:ln w="0">
+                  <a:noFill/>
+                  <a:prstDash val="solid"/>
+                </a:ln>
+                <a:solidFill>
+                  <a:srgbClr val="F5E7C3"/>
+                </a:solidFill>
+                <a:latin typeface="Calibri"/>
+                <a:ea typeface="Calibri"/>
+                <a:cs typeface="Calibri"/>
               </a:rPr>
               <a:t>¿Qué hecho antiguo miro hoy con ojos nuevos?</a:t>
             </a:r>
@@ -6632,23 +6936,31 @@
                 <a:spcPct val="100000"/>
               </a:lnSpc>
               <a:buNone/>
-              <a:defRPr sz="1200" b="0" i="0">
-                <a:solidFill>
-                  <a:srgbClr val="9CB3BF"/>
-                </a:solidFill>
-                <a:latin typeface="Arial"/>
-                <a:ea typeface="Arial"/>
-                <a:cs typeface="Arial"/>
+              <a:defRPr sz="975" b="1" i="0">
+                <a:ln w="0">
+                  <a:noFill/>
+                  <a:prstDash val="solid"/>
+                </a:ln>
+                <a:solidFill>
+                  <a:srgbClr val="AAB9BC"/>
+                </a:solidFill>
+                <a:latin typeface="Calibri"/>
+                <a:ea typeface="Calibri"/>
+                <a:cs typeface="Calibri"/>
               </a:defRPr>
             </a:pPr>
             <a:r>
-              <a:rPr sz="1200" b="0" i="0">
-                <a:solidFill>
-                  <a:srgbClr val="9CB3BF"/>
-                </a:solidFill>
-                <a:latin typeface="Arial"/>
-                <a:ea typeface="Arial"/>
-                <a:cs typeface="Arial"/>
+              <a:rPr sz="975" b="1" i="0">
+                <a:ln w="0">
+                  <a:noFill/>
+                  <a:prstDash val="solid"/>
+                </a:ln>
+                <a:solidFill>
+                  <a:srgbClr val="AAB9BC"/>
+                </a:solidFill>
+                <a:latin typeface="Calibri"/>
+                <a:ea typeface="Calibri"/>
+                <a:cs typeface="Calibri"/>
               </a:rPr>
               <a:t>20′</a:t>
             </a:r>
@@ -6727,23 +7039,31 @@
                 <a:spcPct val="100000"/>
               </a:lnSpc>
               <a:buNone/>
-              <a:defRPr sz="1200" b="0" i="0">
+              <a:defRPr sz="1125" b="1" i="0">
+                <a:ln w="0">
+                  <a:noFill/>
+                  <a:prstDash val="solid"/>
+                </a:ln>
                 <a:solidFill>
                   <a:srgbClr val="FFFFFF"/>
                 </a:solidFill>
-                <a:latin typeface="Arial"/>
-                <a:ea typeface="Arial"/>
-                <a:cs typeface="Arial"/>
+                <a:latin typeface="Calibri"/>
+                <a:ea typeface="Calibri"/>
+                <a:cs typeface="Calibri"/>
               </a:defRPr>
             </a:pPr>
             <a:r>
-              <a:rPr sz="1200" b="0" i="0">
+              <a:rPr sz="1125" b="1" i="0">
+                <a:ln w="0">
+                  <a:noFill/>
+                  <a:prstDash val="solid"/>
+                </a:ln>
                 <a:solidFill>
                   <a:srgbClr val="FFFFFF"/>
                 </a:solidFill>
-                <a:latin typeface="Arial"/>
-                <a:ea typeface="Arial"/>
-                <a:cs typeface="Arial"/>
+                <a:latin typeface="Calibri"/>
+                <a:ea typeface="Calibri"/>
+                <a:cs typeface="Calibri"/>
               </a:rPr>
               <a:t>3</a:t>
             </a:r>
@@ -6789,23 +7109,31 @@
                 <a:spcPct val="100000"/>
               </a:lnSpc>
               <a:buNone/>
-              <a:defRPr sz="1500" b="0" i="0">
-                <a:solidFill>
-                  <a:srgbClr val="F0C766"/>
-                </a:solidFill>
-                <a:latin typeface="Arial"/>
-                <a:ea typeface="Arial"/>
-                <a:cs typeface="Arial"/>
+              <a:defRPr sz="1350" b="1" i="0">
+                <a:ln w="0">
+                  <a:noFill/>
+                  <a:prstDash val="solid"/>
+                </a:ln>
+                <a:solidFill>
+                  <a:srgbClr val="D9A441"/>
+                </a:solidFill>
+                <a:latin typeface="Calibri"/>
+                <a:ea typeface="Calibri"/>
+                <a:cs typeface="Calibri"/>
               </a:defRPr>
             </a:pPr>
             <a:r>
-              <a:rPr sz="1500" b="0" i="0">
-                <a:solidFill>
-                  <a:srgbClr val="F0C766"/>
-                </a:solidFill>
-                <a:latin typeface="Arial"/>
-                <a:ea typeface="Arial"/>
-                <a:cs typeface="Arial"/>
+              <a:rPr sz="1350" b="1" i="0">
+                <a:ln w="0">
+                  <a:noFill/>
+                  <a:prstDash val="solid"/>
+                </a:ln>
+                <a:solidFill>
+                  <a:srgbClr val="D9A441"/>
+                </a:solidFill>
+                <a:latin typeface="Calibri"/>
+                <a:ea typeface="Calibri"/>
+                <a:cs typeface="Calibri"/>
               </a:rPr>
               <a:t>ILUMINAR</a:t>
             </a:r>
@@ -6851,23 +7179,31 @@
                 <a:spcPct val="104000"/>
               </a:lnSpc>
               <a:buNone/>
-              <a:defRPr sz="1200" b="0" i="0">
+              <a:defRPr sz="1125" b="0" i="0">
+                <a:ln w="0">
+                  <a:noFill/>
+                  <a:prstDash val="solid"/>
+                </a:ln>
                 <a:solidFill>
                   <a:srgbClr val="FFFFFF"/>
                 </a:solidFill>
-                <a:latin typeface="Arial"/>
-                <a:ea typeface="Arial"/>
-                <a:cs typeface="Arial"/>
+                <a:latin typeface="Calibri"/>
+                <a:ea typeface="Calibri"/>
+                <a:cs typeface="Calibri"/>
               </a:defRPr>
             </a:pPr>
             <a:r>
-              <a:rPr sz="1200" b="0" i="0">
+              <a:rPr sz="1125" b="0" i="0">
+                <a:ln w="0">
+                  <a:noFill/>
+                  <a:prstDash val="solid"/>
+                </a:ln>
                 <a:solidFill>
                   <a:srgbClr val="FFFFFF"/>
                 </a:solidFill>
-                <a:latin typeface="Arial"/>
-                <a:ea typeface="Arial"/>
-                <a:cs typeface="Arial"/>
+                <a:latin typeface="Calibri"/>
+                <a:ea typeface="Calibri"/>
+                <a:cs typeface="Calibri"/>
               </a:rPr>
               <a:t>Leer Mt 13,44–52 y marcar: hallar, buscar, alegría, recoger, separar, nuevo y antiguo.</a:t>
             </a:r>
@@ -6950,23 +7286,31 @@
                 <a:spcPct val="104000"/>
               </a:lnSpc>
               <a:buNone/>
-              <a:defRPr sz="1350" b="0" i="0">
-                <a:solidFill>
-                  <a:srgbClr val="FFF1CF"/>
-                </a:solidFill>
-                <a:latin typeface="Arial"/>
-                <a:ea typeface="Arial"/>
-                <a:cs typeface="Arial"/>
+              <a:defRPr sz="1275" b="1" i="0">
+                <a:ln w="0">
+                  <a:noFill/>
+                  <a:prstDash val="solid"/>
+                </a:ln>
+                <a:solidFill>
+                  <a:srgbClr val="F5E7C3"/>
+                </a:solidFill>
+                <a:latin typeface="Calibri"/>
+                <a:ea typeface="Calibri"/>
+                <a:cs typeface="Calibri"/>
               </a:defRPr>
             </a:pPr>
             <a:r>
-              <a:rPr sz="1350" b="0" i="0">
-                <a:solidFill>
-                  <a:srgbClr val="FFF1CF"/>
-                </a:solidFill>
-                <a:latin typeface="Arial"/>
-                <a:ea typeface="Arial"/>
-                <a:cs typeface="Arial"/>
+              <a:rPr sz="1275" b="1" i="0">
+                <a:ln w="0">
+                  <a:noFill/>
+                  <a:prstDash val="solid"/>
+                </a:ln>
+                <a:solidFill>
+                  <a:srgbClr val="F5E7C3"/>
+                </a:solidFill>
+                <a:latin typeface="Calibri"/>
+                <a:ea typeface="Calibri"/>
+                <a:cs typeface="Calibri"/>
               </a:rPr>
               <a:t>¿Qué cambia cuando aparece el Reino: el camino o la mirada?</a:t>
             </a:r>
@@ -7012,23 +7356,31 @@
                 <a:spcPct val="100000"/>
               </a:lnSpc>
               <a:buNone/>
-              <a:defRPr sz="1200" b="0" i="0">
-                <a:solidFill>
-                  <a:srgbClr val="9CB3BF"/>
-                </a:solidFill>
-                <a:latin typeface="Arial"/>
-                <a:ea typeface="Arial"/>
-                <a:cs typeface="Arial"/>
+              <a:defRPr sz="975" b="1" i="0">
+                <a:ln w="0">
+                  <a:noFill/>
+                  <a:prstDash val="solid"/>
+                </a:ln>
+                <a:solidFill>
+                  <a:srgbClr val="AAB9BC"/>
+                </a:solidFill>
+                <a:latin typeface="Calibri"/>
+                <a:ea typeface="Calibri"/>
+                <a:cs typeface="Calibri"/>
               </a:defRPr>
             </a:pPr>
             <a:r>
-              <a:rPr sz="1200" b="0" i="0">
-                <a:solidFill>
-                  <a:srgbClr val="9CB3BF"/>
-                </a:solidFill>
-                <a:latin typeface="Arial"/>
-                <a:ea typeface="Arial"/>
-                <a:cs typeface="Arial"/>
+              <a:rPr sz="975" b="1" i="0">
+                <a:ln w="0">
+                  <a:noFill/>
+                  <a:prstDash val="solid"/>
+                </a:ln>
+                <a:solidFill>
+                  <a:srgbClr val="AAB9BC"/>
+                </a:solidFill>
+                <a:latin typeface="Calibri"/>
+                <a:ea typeface="Calibri"/>
+                <a:cs typeface="Calibri"/>
               </a:rPr>
               <a:t>38′</a:t>
             </a:r>
@@ -7107,23 +7459,31 @@
                 <a:spcPct val="100000"/>
               </a:lnSpc>
               <a:buNone/>
-              <a:defRPr sz="1200" b="0" i="0">
+              <a:defRPr sz="1125" b="1" i="0">
+                <a:ln w="0">
+                  <a:noFill/>
+                  <a:prstDash val="solid"/>
+                </a:ln>
                 <a:solidFill>
                   <a:srgbClr val="FFFFFF"/>
                 </a:solidFill>
-                <a:latin typeface="Arial"/>
-                <a:ea typeface="Arial"/>
-                <a:cs typeface="Arial"/>
+                <a:latin typeface="Calibri"/>
+                <a:ea typeface="Calibri"/>
+                <a:cs typeface="Calibri"/>
               </a:defRPr>
             </a:pPr>
             <a:r>
-              <a:rPr sz="1200" b="0" i="0">
+              <a:rPr sz="1125" b="1" i="0">
+                <a:ln w="0">
+                  <a:noFill/>
+                  <a:prstDash val="solid"/>
+                </a:ln>
                 <a:solidFill>
                   <a:srgbClr val="FFFFFF"/>
                 </a:solidFill>
-                <a:latin typeface="Arial"/>
-                <a:ea typeface="Arial"/>
-                <a:cs typeface="Arial"/>
+                <a:latin typeface="Calibri"/>
+                <a:ea typeface="Calibri"/>
+                <a:cs typeface="Calibri"/>
               </a:rPr>
               <a:t>4</a:t>
             </a:r>
@@ -7169,23 +7529,31 @@
                 <a:spcPct val="100000"/>
               </a:lnSpc>
               <a:buNone/>
-              <a:defRPr sz="1500" b="0" i="0">
-                <a:solidFill>
-                  <a:srgbClr val="F0C766"/>
-                </a:solidFill>
-                <a:latin typeface="Arial"/>
-                <a:ea typeface="Arial"/>
-                <a:cs typeface="Arial"/>
+              <a:defRPr sz="1350" b="1" i="0">
+                <a:ln w="0">
+                  <a:noFill/>
+                  <a:prstDash val="solid"/>
+                </a:ln>
+                <a:solidFill>
+                  <a:srgbClr val="D9A441"/>
+                </a:solidFill>
+                <a:latin typeface="Calibri"/>
+                <a:ea typeface="Calibri"/>
+                <a:cs typeface="Calibri"/>
               </a:defRPr>
             </a:pPr>
             <a:r>
-              <a:rPr sz="1500" b="0" i="0">
-                <a:solidFill>
-                  <a:srgbClr val="F0C766"/>
-                </a:solidFill>
-                <a:latin typeface="Arial"/>
-                <a:ea typeface="Arial"/>
-                <a:cs typeface="Arial"/>
+              <a:rPr sz="1350" b="1" i="0">
+                <a:ln w="0">
+                  <a:noFill/>
+                  <a:prstDash val="solid"/>
+                </a:ln>
+                <a:solidFill>
+                  <a:srgbClr val="D9A441"/>
+                </a:solidFill>
+                <a:latin typeface="Calibri"/>
+                <a:ea typeface="Calibri"/>
+                <a:cs typeface="Calibri"/>
               </a:rPr>
               <a:t>DISCERNIR</a:t>
             </a:r>
@@ -7231,23 +7599,31 @@
                 <a:spcPct val="104000"/>
               </a:lnSpc>
               <a:buNone/>
-              <a:defRPr sz="1200" b="0" i="0">
+              <a:defRPr sz="1125" b="0" i="0">
+                <a:ln w="0">
+                  <a:noFill/>
+                  <a:prstDash val="solid"/>
+                </a:ln>
                 <a:solidFill>
                   <a:srgbClr val="FFFFFF"/>
                 </a:solidFill>
-                <a:latin typeface="Arial"/>
-                <a:ea typeface="Arial"/>
-                <a:cs typeface="Arial"/>
+                <a:latin typeface="Calibri"/>
+                <a:ea typeface="Calibri"/>
+                <a:cs typeface="Calibri"/>
               </a:defRPr>
             </a:pPr>
             <a:r>
-              <a:rPr sz="1200" b="0" i="0">
+              <a:rPr sz="1125" b="0" i="0">
+                <a:ln w="0">
+                  <a:noFill/>
+                  <a:prstDash val="solid"/>
+                </a:ln>
                 <a:solidFill>
                   <a:srgbClr val="FFFFFF"/>
                 </a:solidFill>
-                <a:latin typeface="Arial"/>
-                <a:ea typeface="Arial"/>
-                <a:cs typeface="Arial"/>
+                <a:latin typeface="Calibri"/>
+                <a:ea typeface="Calibri"/>
+                <a:cs typeface="Calibri"/>
               </a:rPr>
               <a:t>En tríos, aplicar tesoro, perla y red a una semana ficticia.</a:t>
             </a:r>
@@ -7330,23 +7706,31 @@
                 <a:spcPct val="104000"/>
               </a:lnSpc>
               <a:buNone/>
-              <a:defRPr sz="1350" b="0" i="0">
-                <a:solidFill>
-                  <a:srgbClr val="FFF1CF"/>
-                </a:solidFill>
-                <a:latin typeface="Arial"/>
-                <a:ea typeface="Arial"/>
-                <a:cs typeface="Arial"/>
+              <a:defRPr sz="1275" b="1" i="0">
+                <a:ln w="0">
+                  <a:noFill/>
+                  <a:prstDash val="solid"/>
+                </a:ln>
+                <a:solidFill>
+                  <a:srgbClr val="F5E7C3"/>
+                </a:solidFill>
+                <a:latin typeface="Calibri"/>
+                <a:ea typeface="Calibri"/>
+                <a:cs typeface="Calibri"/>
               </a:defRPr>
             </a:pPr>
             <a:r>
-              <a:rPr sz="1350" b="0" i="0">
-                <a:solidFill>
-                  <a:srgbClr val="FFF1CF"/>
-                </a:solidFill>
-                <a:latin typeface="Arial"/>
-                <a:ea typeface="Arial"/>
-                <a:cs typeface="Arial"/>
+              <a:rPr sz="1275" b="1" i="0">
+                <a:ln w="0">
+                  <a:noFill/>
+                  <a:prstDash val="solid"/>
+                </a:ln>
+                <a:solidFill>
+                  <a:srgbClr val="F5E7C3"/>
+                </a:solidFill>
+                <a:latin typeface="Calibri"/>
+                <a:ea typeface="Calibri"/>
+                <a:cs typeface="Calibri"/>
               </a:rPr>
               <a:t>¿Cómo distinguir el valor verdadero del brillo pasajero?</a:t>
             </a:r>
@@ -7392,23 +7776,31 @@
                 <a:spcPct val="100000"/>
               </a:lnSpc>
               <a:buNone/>
-              <a:defRPr sz="1200" b="0" i="0">
-                <a:solidFill>
-                  <a:srgbClr val="9CB3BF"/>
-                </a:solidFill>
-                <a:latin typeface="Arial"/>
-                <a:ea typeface="Arial"/>
-                <a:cs typeface="Arial"/>
+              <a:defRPr sz="975" b="1" i="0">
+                <a:ln w="0">
+                  <a:noFill/>
+                  <a:prstDash val="solid"/>
+                </a:ln>
+                <a:solidFill>
+                  <a:srgbClr val="AAB9BC"/>
+                </a:solidFill>
+                <a:latin typeface="Calibri"/>
+                <a:ea typeface="Calibri"/>
+                <a:cs typeface="Calibri"/>
               </a:defRPr>
             </a:pPr>
             <a:r>
-              <a:rPr sz="1200" b="0" i="0">
-                <a:solidFill>
-                  <a:srgbClr val="9CB3BF"/>
-                </a:solidFill>
-                <a:latin typeface="Arial"/>
-                <a:ea typeface="Arial"/>
-                <a:cs typeface="Arial"/>
+              <a:rPr sz="975" b="1" i="0">
+                <a:ln w="0">
+                  <a:noFill/>
+                  <a:prstDash val="solid"/>
+                </a:ln>
+                <a:solidFill>
+                  <a:srgbClr val="AAB9BC"/>
+                </a:solidFill>
+                <a:latin typeface="Calibri"/>
+                <a:ea typeface="Calibri"/>
+                <a:cs typeface="Calibri"/>
               </a:rPr>
               <a:t>58′</a:t>
             </a:r>
@@ -7487,23 +7879,31 @@
                 <a:spcPct val="100000"/>
               </a:lnSpc>
               <a:buNone/>
-              <a:defRPr sz="1200" b="0" i="0">
+              <a:defRPr sz="1125" b="1" i="0">
+                <a:ln w="0">
+                  <a:noFill/>
+                  <a:prstDash val="solid"/>
+                </a:ln>
                 <a:solidFill>
                   <a:srgbClr val="FFFFFF"/>
                 </a:solidFill>
-                <a:latin typeface="Arial"/>
-                <a:ea typeface="Arial"/>
-                <a:cs typeface="Arial"/>
+                <a:latin typeface="Calibri"/>
+                <a:ea typeface="Calibri"/>
+                <a:cs typeface="Calibri"/>
               </a:defRPr>
             </a:pPr>
             <a:r>
-              <a:rPr sz="1200" b="0" i="0">
+              <a:rPr sz="1125" b="1" i="0">
+                <a:ln w="0">
+                  <a:noFill/>
+                  <a:prstDash val="solid"/>
+                </a:ln>
                 <a:solidFill>
                   <a:srgbClr val="FFFFFF"/>
                 </a:solidFill>
-                <a:latin typeface="Arial"/>
-                <a:ea typeface="Arial"/>
-                <a:cs typeface="Arial"/>
+                <a:latin typeface="Calibri"/>
+                <a:ea typeface="Calibri"/>
+                <a:cs typeface="Calibri"/>
               </a:rPr>
               <a:t>5</a:t>
             </a:r>
@@ -7549,23 +7949,31 @@
                 <a:spcPct val="100000"/>
               </a:lnSpc>
               <a:buNone/>
-              <a:defRPr sz="1500" b="0" i="0">
-                <a:solidFill>
-                  <a:srgbClr val="F0C766"/>
-                </a:solidFill>
-                <a:latin typeface="Arial"/>
-                <a:ea typeface="Arial"/>
-                <a:cs typeface="Arial"/>
+              <a:defRPr sz="1350" b="1" i="0">
+                <a:ln w="0">
+                  <a:noFill/>
+                  <a:prstDash val="solid"/>
+                </a:ln>
+                <a:solidFill>
+                  <a:srgbClr val="D9A441"/>
+                </a:solidFill>
+                <a:latin typeface="Calibri"/>
+                <a:ea typeface="Calibri"/>
+                <a:cs typeface="Calibri"/>
               </a:defRPr>
             </a:pPr>
             <a:r>
-              <a:rPr sz="1500" b="0" i="0">
-                <a:solidFill>
-                  <a:srgbClr val="F0C766"/>
-                </a:solidFill>
-                <a:latin typeface="Arial"/>
-                <a:ea typeface="Arial"/>
-                <a:cs typeface="Arial"/>
+              <a:rPr sz="1350" b="1" i="0">
+                <a:ln w="0">
+                  <a:noFill/>
+                  <a:prstDash val="solid"/>
+                </a:ln>
+                <a:solidFill>
+                  <a:srgbClr val="D9A441"/>
+                </a:solidFill>
+                <a:latin typeface="Calibri"/>
+                <a:ea typeface="Calibri"/>
+                <a:cs typeface="Calibri"/>
               </a:rPr>
               <a:t>RESPONDER</a:t>
             </a:r>
@@ -7611,23 +8019,31 @@
                 <a:spcPct val="104000"/>
               </a:lnSpc>
               <a:buNone/>
-              <a:defRPr sz="1200" b="0" i="0">
+              <a:defRPr sz="1125" b="0" i="0">
+                <a:ln w="0">
+                  <a:noFill/>
+                  <a:prstDash val="solid"/>
+                </a:ln>
                 <a:solidFill>
                   <a:srgbClr val="FFFFFF"/>
                 </a:solidFill>
-                <a:latin typeface="Arial"/>
-                <a:ea typeface="Arial"/>
-                <a:cs typeface="Arial"/>
+                <a:latin typeface="Calibri"/>
+                <a:ea typeface="Calibri"/>
+                <a:cs typeface="Calibri"/>
               </a:defRPr>
             </a:pPr>
             <a:r>
-              <a:rPr sz="1200" b="0" i="0">
+              <a:rPr sz="1125" b="0" i="0">
+                <a:ln w="0">
+                  <a:noFill/>
+                  <a:prstDash val="solid"/>
+                </a:ln>
                 <a:solidFill>
                   <a:srgbClr val="FFFFFF"/>
                 </a:solidFill>
-                <a:latin typeface="Arial"/>
-                <a:ea typeface="Arial"/>
-                <a:cs typeface="Arial"/>
+                <a:latin typeface="Calibri"/>
+                <a:ea typeface="Calibri"/>
+                <a:cs typeface="Calibri"/>
               </a:rPr>
               <a:t>Escribir «esta semana miraré de nuevo…» y un gesto. Compartir libremente y orar.</a:t>
             </a:r>
@@ -7710,23 +8126,31 @@
                 <a:spcPct val="104000"/>
               </a:lnSpc>
               <a:buNone/>
-              <a:defRPr sz="1350" b="0" i="0">
-                <a:solidFill>
-                  <a:srgbClr val="FFF1CF"/>
-                </a:solidFill>
-                <a:latin typeface="Arial"/>
-                <a:ea typeface="Arial"/>
-                <a:cs typeface="Arial"/>
+              <a:defRPr sz="1275" b="1" i="0">
+                <a:ln w="0">
+                  <a:noFill/>
+                  <a:prstDash val="solid"/>
+                </a:ln>
+                <a:solidFill>
+                  <a:srgbClr val="F5E7C3"/>
+                </a:solidFill>
+                <a:latin typeface="Calibri"/>
+                <a:ea typeface="Calibri"/>
+                <a:cs typeface="Calibri"/>
               </a:defRPr>
             </a:pPr>
             <a:r>
-              <a:rPr sz="1350" b="0" i="0">
-                <a:solidFill>
-                  <a:srgbClr val="FFF1CF"/>
-                </a:solidFill>
-                <a:latin typeface="Arial"/>
-                <a:ea typeface="Arial"/>
-                <a:cs typeface="Arial"/>
+              <a:rPr sz="1275" b="1" i="0">
+                <a:ln w="0">
+                  <a:noFill/>
+                  <a:prstDash val="solid"/>
+                </a:ln>
+                <a:solidFill>
+                  <a:srgbClr val="F5E7C3"/>
+                </a:solidFill>
+                <a:latin typeface="Calibri"/>
+                <a:ea typeface="Calibri"/>
+                <a:cs typeface="Calibri"/>
               </a:rPr>
               <a:t>¿Qué pequeño acto mostrará que el tesoro vale más?</a:t>
             </a:r>
@@ -7809,23 +8233,31 @@
                 <a:spcPct val="100000"/>
               </a:lnSpc>
               <a:buNone/>
-              <a:defRPr sz="1200" b="0" i="0">
+              <a:defRPr sz="1200" b="1" i="0">
+                <a:ln w="0">
+                  <a:noFill/>
+                  <a:prstDash val="solid"/>
+                </a:ln>
                 <a:solidFill>
                   <a:srgbClr val="FFFFFF"/>
                 </a:solidFill>
-                <a:latin typeface="Arial"/>
-                <a:ea typeface="Arial"/>
-                <a:cs typeface="Arial"/>
+                <a:latin typeface="Calibri"/>
+                <a:ea typeface="Calibri"/>
+                <a:cs typeface="Calibri"/>
               </a:defRPr>
             </a:pPr>
             <a:r>
-              <a:rPr sz="1200" b="0" i="0">
+              <a:rPr sz="1200" b="1" i="0">
+                <a:ln w="0">
+                  <a:noFill/>
+                  <a:prstDash val="solid"/>
+                </a:ln>
                 <a:solidFill>
                   <a:srgbClr val="FFFFFF"/>
                 </a:solidFill>
-                <a:latin typeface="Arial"/>
-                <a:ea typeface="Arial"/>
-                <a:cs typeface="Arial"/>
+                <a:latin typeface="Calibri"/>
+                <a:ea typeface="Calibri"/>
+                <a:cs typeface="Calibri"/>
               </a:rPr>
               <a:t>CRITERIO: releer no es llamar bueno al daño; las decisiones importantes se disciernen con tiempo, libertad y apoyo.</a:t>
             </a:r>
@@ -7871,23 +8303,31 @@
                 <a:spcPct val="100000"/>
               </a:lnSpc>
               <a:buNone/>
-              <a:defRPr sz="900" b="0" i="0">
-                <a:solidFill>
-                  <a:srgbClr val="F5F0E7"/>
-                </a:solidFill>
-                <a:latin typeface="Arial"/>
-                <a:ea typeface="Arial"/>
-                <a:cs typeface="Arial"/>
+              <a:defRPr sz="825" b="0" i="0">
+                <a:ln w="0">
+                  <a:noFill/>
+                  <a:prstDash val="solid"/>
+                </a:ln>
+                <a:solidFill>
+                  <a:srgbClr val="B8C3C7"/>
+                </a:solidFill>
+                <a:latin typeface="Calibri"/>
+                <a:ea typeface="Calibri"/>
+                <a:cs typeface="Calibri"/>
               </a:defRPr>
             </a:pPr>
             <a:r>
-              <a:rPr sz="900" b="0" i="0">
-                <a:solidFill>
-                  <a:srgbClr val="F5F0E7"/>
-                </a:solidFill>
-                <a:latin typeface="Arial"/>
-                <a:ea typeface="Arial"/>
-                <a:cs typeface="Arial"/>
+              <a:rPr sz="825" b="0" i="0">
+                <a:ln w="0">
+                  <a:noFill/>
+                  <a:prstDash val="solid"/>
+                </a:ln>
+                <a:solidFill>
+                  <a:srgbClr val="B8C3C7"/>
+                </a:solidFill>
+                <a:latin typeface="Calibri"/>
+                <a:ea typeface="Calibri"/>
+                <a:cs typeface="Calibri"/>
               </a:rPr>
               <a:t>03</a:t>
             </a:r>
